--- a/AI04-MachineLearning.pptx
+++ b/AI04-MachineLearning.pptx
@@ -5,75 +5,55 @@
     <p:sldMasterId id="2147483653" r:id="rId1"/>
   </p:sldMasterIdLst>
   <p:notesMasterIdLst>
-    <p:notesMasterId r:id="rId65"/>
+    <p:notesMasterId r:id="rId45"/>
   </p:notesMasterIdLst>
   <p:handoutMasterIdLst>
-    <p:handoutMasterId r:id="rId66"/>
+    <p:handoutMasterId r:id="rId46"/>
   </p:handoutMasterIdLst>
   <p:sldIdLst>
     <p:sldId id="264" r:id="rId2"/>
     <p:sldId id="323" r:id="rId3"/>
     <p:sldId id="320" r:id="rId4"/>
     <p:sldId id="267" r:id="rId5"/>
-    <p:sldId id="268" r:id="rId6"/>
-    <p:sldId id="269" r:id="rId7"/>
-    <p:sldId id="270" r:id="rId8"/>
-    <p:sldId id="271" r:id="rId9"/>
-    <p:sldId id="272" r:id="rId10"/>
-    <p:sldId id="287" r:id="rId11"/>
-    <p:sldId id="358" r:id="rId12"/>
-    <p:sldId id="273" r:id="rId13"/>
-    <p:sldId id="274" r:id="rId14"/>
-    <p:sldId id="306" r:id="rId15"/>
-    <p:sldId id="288" r:id="rId16"/>
-    <p:sldId id="289" r:id="rId17"/>
-    <p:sldId id="290" r:id="rId18"/>
-    <p:sldId id="275" r:id="rId19"/>
-    <p:sldId id="276" r:id="rId20"/>
-    <p:sldId id="277" r:id="rId21"/>
-    <p:sldId id="319" r:id="rId22"/>
-    <p:sldId id="278" r:id="rId23"/>
-    <p:sldId id="279" r:id="rId24"/>
-    <p:sldId id="280" r:id="rId25"/>
-    <p:sldId id="281" r:id="rId26"/>
-    <p:sldId id="283" r:id="rId27"/>
-    <p:sldId id="284" r:id="rId28"/>
-    <p:sldId id="285" r:id="rId29"/>
-    <p:sldId id="286" r:id="rId30"/>
-    <p:sldId id="303" r:id="rId31"/>
-    <p:sldId id="304" r:id="rId32"/>
-    <p:sldId id="312" r:id="rId33"/>
-    <p:sldId id="313" r:id="rId34"/>
-    <p:sldId id="321" r:id="rId35"/>
-    <p:sldId id="322" r:id="rId36"/>
-    <p:sldId id="325" r:id="rId37"/>
-    <p:sldId id="265" r:id="rId38"/>
-    <p:sldId id="266" r:id="rId39"/>
-    <p:sldId id="326" r:id="rId40"/>
-    <p:sldId id="328" r:id="rId41"/>
-    <p:sldId id="332" r:id="rId42"/>
-    <p:sldId id="333" r:id="rId43"/>
-    <p:sldId id="334" r:id="rId44"/>
-    <p:sldId id="335" r:id="rId45"/>
-    <p:sldId id="337" r:id="rId46"/>
-    <p:sldId id="338" r:id="rId47"/>
-    <p:sldId id="339" r:id="rId48"/>
-    <p:sldId id="340" r:id="rId49"/>
-    <p:sldId id="341" r:id="rId50"/>
-    <p:sldId id="342" r:id="rId51"/>
-    <p:sldId id="343" r:id="rId52"/>
-    <p:sldId id="344" r:id="rId53"/>
-    <p:sldId id="345" r:id="rId54"/>
-    <p:sldId id="346" r:id="rId55"/>
-    <p:sldId id="347" r:id="rId56"/>
-    <p:sldId id="348" r:id="rId57"/>
-    <p:sldId id="350" r:id="rId58"/>
-    <p:sldId id="351" r:id="rId59"/>
-    <p:sldId id="353" r:id="rId60"/>
-    <p:sldId id="354" r:id="rId61"/>
-    <p:sldId id="355" r:id="rId62"/>
-    <p:sldId id="356" r:id="rId63"/>
-    <p:sldId id="357" r:id="rId64"/>
+    <p:sldId id="270" r:id="rId6"/>
+    <p:sldId id="271" r:id="rId7"/>
+    <p:sldId id="272" r:id="rId8"/>
+    <p:sldId id="287" r:id="rId9"/>
+    <p:sldId id="358" r:id="rId10"/>
+    <p:sldId id="273" r:id="rId11"/>
+    <p:sldId id="274" r:id="rId12"/>
+    <p:sldId id="288" r:id="rId13"/>
+    <p:sldId id="289" r:id="rId14"/>
+    <p:sldId id="290" r:id="rId15"/>
+    <p:sldId id="276" r:id="rId16"/>
+    <p:sldId id="277" r:id="rId17"/>
+    <p:sldId id="319" r:id="rId18"/>
+    <p:sldId id="278" r:id="rId19"/>
+    <p:sldId id="279" r:id="rId20"/>
+    <p:sldId id="280" r:id="rId21"/>
+    <p:sldId id="281" r:id="rId22"/>
+    <p:sldId id="283" r:id="rId23"/>
+    <p:sldId id="284" r:id="rId24"/>
+    <p:sldId id="285" r:id="rId25"/>
+    <p:sldId id="286" r:id="rId26"/>
+    <p:sldId id="313" r:id="rId27"/>
+    <p:sldId id="322" r:id="rId28"/>
+    <p:sldId id="325" r:id="rId29"/>
+    <p:sldId id="265" r:id="rId30"/>
+    <p:sldId id="266" r:id="rId31"/>
+    <p:sldId id="326" r:id="rId32"/>
+    <p:sldId id="328" r:id="rId33"/>
+    <p:sldId id="332" r:id="rId34"/>
+    <p:sldId id="334" r:id="rId35"/>
+    <p:sldId id="337" r:id="rId36"/>
+    <p:sldId id="338" r:id="rId37"/>
+    <p:sldId id="339" r:id="rId38"/>
+    <p:sldId id="342" r:id="rId39"/>
+    <p:sldId id="348" r:id="rId40"/>
+    <p:sldId id="350" r:id="rId41"/>
+    <p:sldId id="351" r:id="rId42"/>
+    <p:sldId id="353" r:id="rId43"/>
+    <p:sldId id="355" r:id="rId44"/>
   </p:sldIdLst>
   <p:sldSz cx="9144000" cy="6858000" type="screen4x3"/>
   <p:notesSz cx="6648450" cy="9782175"/>
@@ -3837,302 +3817,6 @@
           <a:p>
             <a:r>
               <a:rPr lang="fr-FR" dirty="0"/>
-              <a:t>Classification</a:t>
-            </a:r>
-          </a:p>
-        </p:txBody>
-      </p:sp>
-      <p:sp>
-        <p:nvSpPr>
-          <p:cNvPr id="3" name="Espace réservé du contenu 2"/>
-          <p:cNvSpPr>
-            <a:spLocks noGrp="1"/>
-          </p:cNvSpPr>
-          <p:nvPr>
-            <p:ph idx="1"/>
-          </p:nvPr>
-        </p:nvSpPr>
-        <p:spPr/>
-        <p:txBody>
-          <a:bodyPr/>
-          <a:lstStyle/>
-          <a:p>
-            <a:r>
-              <a:rPr lang="fr-FR" dirty="0"/>
-              <a:t>Une autre distinction qui vous aidera dans le choix d'un algorithme de machine </a:t>
-            </a:r>
-            <a:r>
-              <a:rPr lang="fr-FR" dirty="0" err="1"/>
-              <a:t>learning</a:t>
-            </a:r>
-            <a:r>
-              <a:rPr lang="fr-FR" dirty="0"/>
-              <a:t> est le type de sortie que l'on attend de notre programme</a:t>
-            </a:r>
-          </a:p>
-          <a:p>
-            <a:pPr lvl="1"/>
-            <a:r>
-              <a:rPr lang="fr-FR" dirty="0"/>
-              <a:t>Est-ce une valeur continue (un nombre)</a:t>
-            </a:r>
-          </a:p>
-          <a:p>
-            <a:pPr lvl="1"/>
-            <a:r>
-              <a:rPr lang="fr-FR" dirty="0"/>
-              <a:t>ou bien une valeur discrète (une catégorie) ?</a:t>
-            </a:r>
-          </a:p>
-          <a:p>
-            <a:r>
-              <a:rPr lang="fr-FR" dirty="0"/>
-              <a:t>Le premier cas est appelé une régression, le second une classification</a:t>
-            </a:r>
-          </a:p>
-        </p:txBody>
-      </p:sp>
-      <p:pic>
-        <p:nvPicPr>
-          <p:cNvPr id="1026" name="Picture 2" descr="Illustration de la différence entre régression et classification"/>
-          <p:cNvPicPr>
-            <a:picLocks noChangeAspect="1" noChangeArrowheads="1"/>
-          </p:cNvPicPr>
-          <p:nvPr/>
-        </p:nvPicPr>
-        <p:blipFill>
-          <a:blip r:embed="rId2">
-            <a:extLst>
-              <a:ext uri="{28A0092B-C50C-407E-A947-70E740481C1C}">
-                <a14:useLocalDpi xmlns:a14="http://schemas.microsoft.com/office/drawing/2010/main" val="0"/>
-              </a:ext>
-            </a:extLst>
-          </a:blip>
-          <a:srcRect/>
-          <a:stretch>
-            <a:fillRect/>
-          </a:stretch>
-        </p:blipFill>
-        <p:spPr bwMode="auto">
-          <a:xfrm>
-            <a:off x="2267744" y="4591645"/>
-            <a:ext cx="4286250" cy="2143125"/>
-          </a:xfrm>
-          <a:prstGeom prst="rect">
-            <a:avLst/>
-          </a:prstGeom>
-          <a:noFill/>
-          <a:extLst>
-            <a:ext uri="{909E8E84-426E-40DD-AFC4-6F175D3DCCD1}">
-              <a14:hiddenFill xmlns:a14="http://schemas.microsoft.com/office/drawing/2010/main">
-                <a:solidFill>
-                  <a:srgbClr val="FFFFFF"/>
-                </a:solidFill>
-              </a14:hiddenFill>
-            </a:ext>
-          </a:extLst>
-        </p:spPr>
-      </p:pic>
-    </p:spTree>
-    <p:extLst>
-      <p:ext uri="{BB962C8B-B14F-4D97-AF65-F5344CB8AC3E}">
-        <p14:creationId xmlns:p14="http://schemas.microsoft.com/office/powerpoint/2010/main" val="3746526313"/>
-      </p:ext>
-    </p:extLst>
-  </p:cSld>
-  <p:clrMapOvr>
-    <a:masterClrMapping/>
-  </p:clrMapOvr>
-</p:sld>
-</file>
-
-<file path=ppt/slides/slide11.xml><?xml version="1.0" encoding="utf-8"?>
-<p:sld xmlns:a="http://schemas.openxmlformats.org/drawingml/2006/main" xmlns:r="http://schemas.openxmlformats.org/officeDocument/2006/relationships" xmlns:p="http://schemas.openxmlformats.org/presentationml/2006/main">
-  <p:cSld>
-    <p:spTree>
-      <p:nvGrpSpPr>
-        <p:cNvPr id="1" name=""/>
-        <p:cNvGrpSpPr/>
-        <p:nvPr/>
-      </p:nvGrpSpPr>
-      <p:grpSpPr>
-        <a:xfrm>
-          <a:off x="0" y="0"/>
-          <a:ext cx="0" cy="0"/>
-          <a:chOff x="0" y="0"/>
-          <a:chExt cx="0" cy="0"/>
-        </a:xfrm>
-      </p:grpSpPr>
-      <p:sp>
-        <p:nvSpPr>
-          <p:cNvPr id="2" name="Titre 1">
-            <a:extLst>
-              <a:ext uri="{FF2B5EF4-FFF2-40B4-BE49-F238E27FC236}">
-                <a16:creationId xmlns:a16="http://schemas.microsoft.com/office/drawing/2014/main" id="{43B79A36-DCA2-04FF-4BD9-ADEA618418F6}"/>
-              </a:ext>
-            </a:extLst>
-          </p:cNvPr>
-          <p:cNvSpPr>
-            <a:spLocks noGrp="1"/>
-          </p:cNvSpPr>
-          <p:nvPr>
-            <p:ph type="title"/>
-          </p:nvPr>
-        </p:nvSpPr>
-        <p:spPr/>
-        <p:txBody>
-          <a:bodyPr/>
-          <a:lstStyle/>
-          <a:p>
-            <a:r>
-              <a:rPr lang="fr-FR" dirty="0"/>
-              <a:t>Principes mathématiques</a:t>
-            </a:r>
-          </a:p>
-        </p:txBody>
-      </p:sp>
-      <p:sp>
-        <p:nvSpPr>
-          <p:cNvPr id="3" name="Espace réservé du contenu 2">
-            <a:extLst>
-              <a:ext uri="{FF2B5EF4-FFF2-40B4-BE49-F238E27FC236}">
-                <a16:creationId xmlns:a16="http://schemas.microsoft.com/office/drawing/2014/main" id="{AA9957CF-3C17-0A94-E370-57CDB0345762}"/>
-              </a:ext>
-            </a:extLst>
-          </p:cNvPr>
-          <p:cNvSpPr>
-            <a:spLocks noGrp="1"/>
-          </p:cNvSpPr>
-          <p:nvPr>
-            <p:ph idx="1"/>
-          </p:nvPr>
-        </p:nvSpPr>
-        <p:spPr/>
-        <p:txBody>
-          <a:bodyPr/>
-          <a:lstStyle/>
-          <a:p>
-            <a:r>
-              <a:rPr lang="fr-FR" dirty="0"/>
-              <a:t>De nombreux principes mathématiques et statistiques régissent le Machine Learning</a:t>
-            </a:r>
-          </a:p>
-          <a:p>
-            <a:pPr lvl="1"/>
-            <a:r>
-              <a:rPr lang="fr-FR" sz="2000" dirty="0"/>
-              <a:t>D'avantage pour le </a:t>
-            </a:r>
-            <a:r>
-              <a:rPr lang="fr-FR" sz="2000"/>
-              <a:t>Deep Learning</a:t>
-            </a:r>
-            <a:endParaRPr lang="fr-FR" sz="2000" dirty="0"/>
-          </a:p>
-          <a:p>
-            <a:r>
-              <a:rPr lang="fr-FR" dirty="0"/>
-              <a:t>Statistiques</a:t>
-            </a:r>
-          </a:p>
-          <a:p>
-            <a:pPr lvl="1"/>
-            <a:r>
-              <a:rPr lang="fr-FR" sz="2000" dirty="0"/>
-              <a:t>Distribution, loi normale, échantillonnage</a:t>
-            </a:r>
-          </a:p>
-          <a:p>
-            <a:r>
-              <a:rPr lang="fr-FR" dirty="0"/>
-              <a:t>Algorithmiques</a:t>
-            </a:r>
-            <a:endParaRPr lang="fr-FR" sz="2000" dirty="0"/>
-          </a:p>
-          <a:p>
-            <a:r>
-              <a:rPr lang="fr-FR" dirty="0"/>
-              <a:t>MDP</a:t>
-            </a:r>
-          </a:p>
-          <a:p>
-            <a:pPr lvl="1"/>
-            <a:r>
-              <a:rPr lang="fr-FR" sz="2000" dirty="0"/>
-              <a:t>Les processus de décision markoviens modélisent des états, actions et </a:t>
-            </a:r>
-            <a:r>
-              <a:rPr lang="fr-FR" sz="1800" dirty="0"/>
-              <a:t>récompenses </a:t>
-            </a:r>
-            <a:r>
-              <a:rPr lang="fr-FR" dirty="0"/>
-              <a:t>pour la prise de décision séquentielle.​</a:t>
-            </a:r>
-            <a:endParaRPr lang="fr-FR" sz="2800" dirty="0"/>
-          </a:p>
-          <a:p>
-            <a:r>
-              <a:rPr lang="fr-FR" dirty="0"/>
-              <a:t>Équations de Bellman​</a:t>
-            </a:r>
-          </a:p>
-          <a:p>
-            <a:pPr lvl="1"/>
-            <a:r>
-              <a:rPr lang="fr-FR" sz="2000" dirty="0"/>
-              <a:t>Les équations de Bellman définissent la relation récursive pour calculer les fonctions des valeurs optimales.​</a:t>
-            </a:r>
-          </a:p>
-        </p:txBody>
-      </p:sp>
-    </p:spTree>
-    <p:extLst>
-      <p:ext uri="{BB962C8B-B14F-4D97-AF65-F5344CB8AC3E}">
-        <p14:creationId xmlns:p14="http://schemas.microsoft.com/office/powerpoint/2010/main" val="2444278080"/>
-      </p:ext>
-    </p:extLst>
-  </p:cSld>
-  <p:clrMapOvr>
-    <a:masterClrMapping/>
-  </p:clrMapOvr>
-</p:sld>
-</file>
-
-<file path=ppt/slides/slide12.xml><?xml version="1.0" encoding="utf-8"?>
-<p:sld xmlns:a="http://schemas.openxmlformats.org/drawingml/2006/main" xmlns:r="http://schemas.openxmlformats.org/officeDocument/2006/relationships" xmlns:p="http://schemas.openxmlformats.org/presentationml/2006/main">
-  <p:cSld>
-    <p:spTree>
-      <p:nvGrpSpPr>
-        <p:cNvPr id="1" name=""/>
-        <p:cNvGrpSpPr/>
-        <p:nvPr/>
-      </p:nvGrpSpPr>
-      <p:grpSpPr>
-        <a:xfrm>
-          <a:off x="0" y="0"/>
-          <a:ext cx="0" cy="0"/>
-          <a:chOff x="0" y="0"/>
-          <a:chExt cx="0" cy="0"/>
-        </a:xfrm>
-      </p:grpSpPr>
-      <p:sp>
-        <p:nvSpPr>
-          <p:cNvPr id="2" name="Titre 1"/>
-          <p:cNvSpPr>
-            <a:spLocks noGrp="1"/>
-          </p:cNvSpPr>
-          <p:nvPr>
-            <p:ph type="title"/>
-          </p:nvPr>
-        </p:nvSpPr>
-        <p:spPr/>
-        <p:txBody>
-          <a:bodyPr/>
-          <a:lstStyle/>
-          <a:p>
-            <a:r>
-              <a:rPr lang="fr-FR" dirty="0"/>
               <a:t>Trouver le bon modèle</a:t>
             </a:r>
           </a:p>
@@ -4198,7 +3882,7 @@
 </p:sld>
 </file>
 
-<file path=ppt/slides/slide13.xml><?xml version="1.0" encoding="utf-8"?>
+<file path=ppt/slides/slide11.xml><?xml version="1.0" encoding="utf-8"?>
 <p:sld xmlns:a="http://schemas.openxmlformats.org/drawingml/2006/main" xmlns:r="http://schemas.openxmlformats.org/officeDocument/2006/relationships" xmlns:p="http://schemas.openxmlformats.org/presentationml/2006/main">
   <p:cSld>
     <p:spTree>
@@ -4325,122 +4009,7 @@
 </p:sld>
 </file>
 
-<file path=ppt/slides/slide14.xml><?xml version="1.0" encoding="utf-8"?>
-<p:sld xmlns:a="http://schemas.openxmlformats.org/drawingml/2006/main" xmlns:r="http://schemas.openxmlformats.org/officeDocument/2006/relationships" xmlns:p="http://schemas.openxmlformats.org/presentationml/2006/main">
-  <p:cSld>
-    <p:spTree>
-      <p:nvGrpSpPr>
-        <p:cNvPr id="1" name=""/>
-        <p:cNvGrpSpPr/>
-        <p:nvPr/>
-      </p:nvGrpSpPr>
-      <p:grpSpPr>
-        <a:xfrm>
-          <a:off x="0" y="0"/>
-          <a:ext cx="0" cy="0"/>
-          <a:chOff x="0" y="0"/>
-          <a:chExt cx="0" cy="0"/>
-        </a:xfrm>
-      </p:grpSpPr>
-      <p:sp>
-        <p:nvSpPr>
-          <p:cNvPr id="2" name="Titre 1"/>
-          <p:cNvSpPr>
-            <a:spLocks noGrp="1"/>
-          </p:cNvSpPr>
-          <p:nvPr>
-            <p:ph type="title"/>
-          </p:nvPr>
-        </p:nvSpPr>
-        <p:spPr/>
-        <p:txBody>
-          <a:bodyPr/>
-          <a:lstStyle/>
-          <a:p>
-            <a:r>
-              <a:rPr lang="fr-FR" dirty="0"/>
-              <a:t>La régression n’est pas tous les temps linéaire</a:t>
-            </a:r>
-          </a:p>
-        </p:txBody>
-      </p:sp>
-      <p:sp>
-        <p:nvSpPr>
-          <p:cNvPr id="3" name="Espace réservé du contenu 2"/>
-          <p:cNvSpPr>
-            <a:spLocks noGrp="1"/>
-          </p:cNvSpPr>
-          <p:nvPr>
-            <p:ph idx="1"/>
-          </p:nvPr>
-        </p:nvSpPr>
-        <p:spPr/>
-        <p:txBody>
-          <a:bodyPr/>
-          <a:lstStyle/>
-          <a:p>
-            <a:r>
-              <a:rPr lang="fr-FR" dirty="0"/>
-              <a:t>Dans cette exemple il est impossible de faire filer une droite</a:t>
-            </a:r>
-          </a:p>
-        </p:txBody>
-      </p:sp>
-      <p:pic>
-        <p:nvPicPr>
-          <p:cNvPr id="4098" name="Picture 2" descr="Comme on peut le voir sur ce genre de données, c'est difficile de faire fitter une droite!"/>
-          <p:cNvPicPr>
-            <a:picLocks noChangeAspect="1" noChangeArrowheads="1"/>
-          </p:cNvPicPr>
-          <p:nvPr/>
-        </p:nvPicPr>
-        <p:blipFill>
-          <a:blip r:embed="rId2">
-            <a:extLst>
-              <a:ext uri="{28A0092B-C50C-407E-A947-70E740481C1C}">
-                <a14:useLocalDpi xmlns:a14="http://schemas.microsoft.com/office/drawing/2010/main" val="0"/>
-              </a:ext>
-            </a:extLst>
-          </a:blip>
-          <a:srcRect/>
-          <a:stretch>
-            <a:fillRect/>
-          </a:stretch>
-        </p:blipFill>
-        <p:spPr bwMode="auto">
-          <a:xfrm>
-            <a:off x="2339752" y="1860773"/>
-            <a:ext cx="4714875" cy="4619626"/>
-          </a:xfrm>
-          <a:prstGeom prst="rect">
-            <a:avLst/>
-          </a:prstGeom>
-          <a:noFill/>
-          <a:extLst>
-            <a:ext uri="{909E8E84-426E-40DD-AFC4-6F175D3DCCD1}">
-              <a14:hiddenFill xmlns:a14="http://schemas.microsoft.com/office/drawing/2010/main">
-                <a:solidFill>
-                  <a:srgbClr val="FFFFFF"/>
-                </a:solidFill>
-              </a14:hiddenFill>
-            </a:ext>
-          </a:extLst>
-        </p:spPr>
-      </p:pic>
-    </p:spTree>
-    <p:extLst>
-      <p:ext uri="{BB962C8B-B14F-4D97-AF65-F5344CB8AC3E}">
-        <p14:creationId xmlns:p14="http://schemas.microsoft.com/office/powerpoint/2010/main" val="3873009430"/>
-      </p:ext>
-    </p:extLst>
-  </p:cSld>
-  <p:clrMapOvr>
-    <a:masterClrMapping/>
-  </p:clrMapOvr>
-</p:sld>
-</file>
-
-<file path=ppt/slides/slide15.xml><?xml version="1.0" encoding="utf-8"?>
+<file path=ppt/slides/slide12.xml><?xml version="1.0" encoding="utf-8"?>
 <p:sld xmlns:a="http://schemas.openxmlformats.org/drawingml/2006/main" xmlns:r="http://schemas.openxmlformats.org/officeDocument/2006/relationships" xmlns:p="http://schemas.openxmlformats.org/presentationml/2006/main">
   <p:cSld>
     <p:spTree>
@@ -4626,7 +4195,7 @@
 </p:sld>
 </file>
 
-<file path=ppt/slides/slide16.xml><?xml version="1.0" encoding="utf-8"?>
+<file path=ppt/slides/slide13.xml><?xml version="1.0" encoding="utf-8"?>
 <p:sld xmlns:a="http://schemas.openxmlformats.org/drawingml/2006/main" xmlns:r="http://schemas.openxmlformats.org/officeDocument/2006/relationships" xmlns:p="http://schemas.openxmlformats.org/presentationml/2006/main">
   <p:cSld>
     <p:spTree>
@@ -4783,7 +4352,7 @@
 </p:sld>
 </file>
 
-<file path=ppt/slides/slide17.xml><?xml version="1.0" encoding="utf-8"?>
+<file path=ppt/slides/slide14.xml><?xml version="1.0" encoding="utf-8"?>
 <p:sld xmlns:a="http://schemas.openxmlformats.org/drawingml/2006/main" xmlns:r="http://schemas.openxmlformats.org/officeDocument/2006/relationships" xmlns:p="http://schemas.openxmlformats.org/presentationml/2006/main">
   <p:cSld>
     <p:spTree>
@@ -4942,7 +4511,7 @@
 </p:sld>
 </file>
 
-<file path=ppt/slides/slide18.xml><?xml version="1.0" encoding="utf-8"?>
+<file path=ppt/slides/slide15.xml><?xml version="1.0" encoding="utf-8"?>
 <p:sld xmlns:a="http://schemas.openxmlformats.org/drawingml/2006/main" xmlns:r="http://schemas.openxmlformats.org/officeDocument/2006/relationships" xmlns:p="http://schemas.openxmlformats.org/presentationml/2006/main">
   <p:cSld>
     <p:spTree>
@@ -4976,20 +4545,227 @@
           <a:p>
             <a:r>
               <a:rPr lang="fr-FR" dirty="0"/>
-              <a:t>Machine Learning</a:t>
-            </a:r>
+              <a:t>Modélisation</a:t>
+            </a:r>
+          </a:p>
+        </p:txBody>
+      </p:sp>
+      <p:sp>
+        <p:nvSpPr>
+          <p:cNvPr id="3" name="Espace réservé du contenu 2"/>
+          <p:cNvSpPr>
+            <a:spLocks noGrp="1"/>
+          </p:cNvSpPr>
+          <p:nvPr>
+            <p:ph idx="1"/>
+          </p:nvPr>
+        </p:nvSpPr>
+        <p:spPr/>
+        <p:txBody>
+          <a:bodyPr/>
+          <a:lstStyle/>
+          <a:p>
+            <a:r>
+              <a:rPr lang="fr-FR" dirty="0"/>
+              <a:t>Imaginez que vous êtes un data </a:t>
+            </a:r>
+            <a:r>
+              <a:rPr lang="fr-FR" dirty="0" err="1"/>
+              <a:t>scientist</a:t>
+            </a:r>
+            <a:endParaRPr lang="fr-FR" dirty="0"/>
+          </a:p>
+          <a:p>
+            <a:pPr lvl="1"/>
+            <a:r>
+              <a:rPr lang="fr-FR" dirty="0"/>
+              <a:t>Vous êtes maintenant confortable avec l'ensemble des données récupérées pour vos analyses</a:t>
+            </a:r>
+          </a:p>
+          <a:p>
+            <a:pPr lvl="1"/>
+            <a:r>
+              <a:rPr lang="fr-FR" dirty="0"/>
+              <a:t>Vous avez une connaissance des objectifs principaux de l'entreprise, ce qui vous a aidé à synthétiser les différentes variables qui interviennent, ainsi que visualiser les différents comportements et corrélations présents au sein de ces données</a:t>
+            </a:r>
+          </a:p>
+        </p:txBody>
+      </p:sp>
+    </p:spTree>
+    <p:extLst>
+      <p:ext uri="{BB962C8B-B14F-4D97-AF65-F5344CB8AC3E}">
+        <p14:creationId xmlns:p14="http://schemas.microsoft.com/office/powerpoint/2010/main" val="1213284648"/>
+      </p:ext>
+    </p:extLst>
+  </p:cSld>
+  <p:clrMapOvr>
+    <a:masterClrMapping/>
+  </p:clrMapOvr>
+</p:sld>
+</file>
+
+<file path=ppt/slides/slide16.xml><?xml version="1.0" encoding="utf-8"?>
+<p:sld xmlns:a="http://schemas.openxmlformats.org/drawingml/2006/main" xmlns:r="http://schemas.openxmlformats.org/officeDocument/2006/relationships" xmlns:p="http://schemas.openxmlformats.org/presentationml/2006/main">
+  <p:cSld>
+    <p:spTree>
+      <p:nvGrpSpPr>
+        <p:cNvPr id="1" name=""/>
+        <p:cNvGrpSpPr/>
+        <p:nvPr/>
+      </p:nvGrpSpPr>
+      <p:grpSpPr>
+        <a:xfrm>
+          <a:off x="0" y="0"/>
+          <a:ext cx="0" cy="0"/>
+          <a:chOff x="0" y="0"/>
+          <a:chExt cx="0" cy="0"/>
+        </a:xfrm>
+      </p:grpSpPr>
+      <p:sp>
+        <p:nvSpPr>
+          <p:cNvPr id="2" name="Titre 1"/>
+          <p:cNvSpPr>
+            <a:spLocks noGrp="1"/>
+          </p:cNvSpPr>
+          <p:nvPr>
+            <p:ph type="title"/>
+          </p:nvPr>
+        </p:nvSpPr>
+        <p:spPr/>
+        <p:txBody>
+          <a:bodyPr/>
+          <a:lstStyle/>
+          <a:p>
+            <a:r>
+              <a:rPr lang="fr-FR" dirty="0"/>
+              <a:t>Apprentissage</a:t>
+            </a:r>
+          </a:p>
+        </p:txBody>
+      </p:sp>
+      <p:sp>
+        <p:nvSpPr>
+          <p:cNvPr id="3" name="Espace réservé du contenu 2"/>
+          <p:cNvSpPr>
+            <a:spLocks noGrp="1"/>
+          </p:cNvSpPr>
+          <p:nvPr>
+            <p:ph idx="1"/>
+          </p:nvPr>
+        </p:nvSpPr>
+        <p:spPr/>
+        <p:txBody>
+          <a:bodyPr/>
+          <a:lstStyle/>
+          <a:p>
+            <a:r>
+              <a:rPr lang="fr-FR" dirty="0"/>
+              <a:t>En machine </a:t>
+            </a:r>
+            <a:r>
+              <a:rPr lang="fr-FR" dirty="0" err="1"/>
+              <a:t>learning</a:t>
+            </a:r>
+            <a:r>
+              <a:rPr lang="fr-FR" dirty="0"/>
+              <a:t>, l'idée est que l'algorithme construise une "représentation interne" tout seul afin de pouvoir effectuer la tâche qui lui est demandée (prédiction, identification, </a:t>
+            </a:r>
+            <a:r>
+              <a:rPr lang="fr-FR" dirty="0" err="1"/>
+              <a:t>etc</a:t>
+            </a:r>
+            <a:r>
+              <a:rPr lang="fr-FR" dirty="0"/>
+              <a:t>)</a:t>
+            </a:r>
+          </a:p>
+          <a:p>
+            <a:r>
+              <a:rPr lang="fr-FR" dirty="0"/>
+              <a:t>L’être humain est quasiment incapable d’écrire l’algorithme</a:t>
+            </a:r>
+          </a:p>
+          <a:p>
+            <a:r>
+              <a:rPr lang="fr-FR" dirty="0"/>
+              <a:t>Pour cela, il va d'abord falloir lui entrer un jeu de données d'exemples afin qu'il puisse s'entraîner et s'améliorer, d'où le mot apprentissage</a:t>
+            </a:r>
+          </a:p>
+          <a:p>
+            <a:r>
+              <a:rPr lang="fr-FR" dirty="0"/>
+              <a:t>Ce jeu de données s'appelle le training set</a:t>
+            </a:r>
+          </a:p>
+          <a:p>
+            <a:endParaRPr lang="fr-FR" dirty="0"/>
+          </a:p>
+        </p:txBody>
+      </p:sp>
+    </p:spTree>
+    <p:extLst>
+      <p:ext uri="{BB962C8B-B14F-4D97-AF65-F5344CB8AC3E}">
+        <p14:creationId xmlns:p14="http://schemas.microsoft.com/office/powerpoint/2010/main" val="1896891291"/>
+      </p:ext>
+    </p:extLst>
+  </p:cSld>
+  <p:clrMapOvr>
+    <a:masterClrMapping/>
+  </p:clrMapOvr>
+</p:sld>
+</file>
+
+<file path=ppt/slides/slide17.xml><?xml version="1.0" encoding="utf-8"?>
+<p:sld xmlns:a="http://schemas.openxmlformats.org/drawingml/2006/main" xmlns:r="http://schemas.openxmlformats.org/officeDocument/2006/relationships" xmlns:p="http://schemas.openxmlformats.org/presentationml/2006/main">
+  <p:cSld>
+    <p:spTree>
+      <p:nvGrpSpPr>
+        <p:cNvPr id="1" name=""/>
+        <p:cNvGrpSpPr/>
+        <p:nvPr/>
+      </p:nvGrpSpPr>
+      <p:grpSpPr>
+        <a:xfrm>
+          <a:off x="0" y="0"/>
+          <a:ext cx="0" cy="0"/>
+          <a:chOff x="0" y="0"/>
+          <a:chExt cx="0" cy="0"/>
+        </a:xfrm>
+      </p:grpSpPr>
+      <p:sp>
+        <p:nvSpPr>
+          <p:cNvPr id="2" name="Titre 1"/>
+          <p:cNvSpPr>
+            <a:spLocks noGrp="1"/>
+          </p:cNvSpPr>
+          <p:nvPr>
+            <p:ph type="title"/>
+          </p:nvPr>
+        </p:nvSpPr>
+        <p:spPr/>
+        <p:txBody>
+          <a:bodyPr/>
+          <a:lstStyle/>
+          <a:p>
+            <a:r>
+              <a:rPr lang="fr-FR" dirty="0"/>
+              <a:t>Machine Learning </a:t>
+            </a:r>
+            <a:r>
+              <a:rPr lang="fr-FR"/>
+              <a:t>vs Programmation</a:t>
+            </a:r>
+            <a:endParaRPr lang="fr-FR" dirty="0"/>
           </a:p>
         </p:txBody>
       </p:sp>
       <p:pic>
         <p:nvPicPr>
-          <p:cNvPr id="5122" name="Picture 2" descr="Nous ne nous intéresseront dans ces cours qu'à la création des algorithmes et modélisation"/>
+          <p:cNvPr id="1026" name="Picture 2" descr="https://dpzbhybb2pdcj.cloudfront.net/allaire/Figures/01fig02.jpg"/>
           <p:cNvPicPr>
-            <a:picLocks noGrp="1" noChangeAspect="1" noChangeArrowheads="1"/>
+            <a:picLocks noChangeAspect="1" noChangeArrowheads="1"/>
           </p:cNvPicPr>
-          <p:nvPr>
-            <p:ph idx="1"/>
-          </p:nvPr>
+          <p:nvPr/>
         </p:nvPicPr>
         <p:blipFill>
           <a:blip r:embed="rId2">
@@ -5006,8 +4782,8 @@
         </p:blipFill>
         <p:spPr bwMode="auto">
           <a:xfrm>
-            <a:off x="2051720" y="1156209"/>
-            <a:ext cx="5453559" cy="4090169"/>
+            <a:off x="1979712" y="2420888"/>
+            <a:ext cx="6048672" cy="3069477"/>
           </a:xfrm>
           <a:prstGeom prst="rect">
             <a:avLst/>
@@ -5027,7 +4803,102 @@
     </p:spTree>
     <p:extLst>
       <p:ext uri="{BB962C8B-B14F-4D97-AF65-F5344CB8AC3E}">
-        <p14:creationId xmlns:p14="http://schemas.microsoft.com/office/powerpoint/2010/main" val="2755190476"/>
+        <p14:creationId xmlns:p14="http://schemas.microsoft.com/office/powerpoint/2010/main" val="89981574"/>
+      </p:ext>
+    </p:extLst>
+  </p:cSld>
+  <p:clrMapOvr>
+    <a:masterClrMapping/>
+  </p:clrMapOvr>
+</p:sld>
+</file>
+
+<file path=ppt/slides/slide18.xml><?xml version="1.0" encoding="utf-8"?>
+<p:sld xmlns:a="http://schemas.openxmlformats.org/drawingml/2006/main" xmlns:r="http://schemas.openxmlformats.org/officeDocument/2006/relationships" xmlns:p="http://schemas.openxmlformats.org/presentationml/2006/main">
+  <p:cSld>
+    <p:spTree>
+      <p:nvGrpSpPr>
+        <p:cNvPr id="1" name=""/>
+        <p:cNvGrpSpPr/>
+        <p:nvPr/>
+      </p:nvGrpSpPr>
+      <p:grpSpPr>
+        <a:xfrm>
+          <a:off x="0" y="0"/>
+          <a:ext cx="0" cy="0"/>
+          <a:chOff x="0" y="0"/>
+          <a:chExt cx="0" cy="0"/>
+        </a:xfrm>
+      </p:grpSpPr>
+      <p:sp>
+        <p:nvSpPr>
+          <p:cNvPr id="2" name="Titre 1"/>
+          <p:cNvSpPr>
+            <a:spLocks noGrp="1"/>
+          </p:cNvSpPr>
+          <p:nvPr>
+            <p:ph type="title"/>
+          </p:nvPr>
+        </p:nvSpPr>
+        <p:spPr/>
+        <p:txBody>
+          <a:bodyPr/>
+          <a:lstStyle/>
+          <a:p>
+            <a:r>
+              <a:rPr lang="fr-FR" dirty="0"/>
+              <a:t>Exemple</a:t>
+            </a:r>
+          </a:p>
+        </p:txBody>
+      </p:sp>
+      <p:pic>
+        <p:nvPicPr>
+          <p:cNvPr id="6146" name="Picture 2" descr="Un exemple de jeu de données classique (appelé CIFAR-10) qui permet d'entraîner un modèle de machine learning"/>
+          <p:cNvPicPr>
+            <a:picLocks noGrp="1" noChangeAspect="1" noChangeArrowheads="1"/>
+          </p:cNvPicPr>
+          <p:nvPr>
+            <p:ph idx="1"/>
+          </p:nvPr>
+        </p:nvPicPr>
+        <p:blipFill>
+          <a:blip r:embed="rId2">
+            <a:extLst>
+              <a:ext uri="{28A0092B-C50C-407E-A947-70E740481C1C}">
+                <a14:useLocalDpi xmlns:a14="http://schemas.microsoft.com/office/drawing/2010/main" val="0"/>
+              </a:ext>
+            </a:extLst>
+          </a:blip>
+          <a:srcRect/>
+          <a:stretch>
+            <a:fillRect/>
+          </a:stretch>
+        </p:blipFill>
+        <p:spPr bwMode="auto">
+          <a:xfrm>
+            <a:off x="970716" y="1156209"/>
+            <a:ext cx="6697627" cy="5177997"/>
+          </a:xfrm>
+          <a:prstGeom prst="rect">
+            <a:avLst/>
+          </a:prstGeom>
+          <a:noFill/>
+          <a:extLst>
+            <a:ext uri="{909E8E84-426E-40DD-AFC4-6F175D3DCCD1}">
+              <a14:hiddenFill xmlns:a14="http://schemas.microsoft.com/office/drawing/2010/main">
+                <a:solidFill>
+                  <a:srgbClr val="FFFFFF"/>
+                </a:solidFill>
+              </a14:hiddenFill>
+            </a:ext>
+          </a:extLst>
+        </p:spPr>
+      </p:pic>
+    </p:spTree>
+    <p:extLst>
+      <p:ext uri="{BB962C8B-B14F-4D97-AF65-F5344CB8AC3E}">
+        <p14:creationId xmlns:p14="http://schemas.microsoft.com/office/powerpoint/2010/main" val="3094425722"/>
       </p:ext>
     </p:extLst>
   </p:cSld>
@@ -5071,56 +4942,58 @@
           <a:p>
             <a:r>
               <a:rPr lang="fr-FR" dirty="0"/>
-              <a:t>Modélisation</a:t>
-            </a:r>
-          </a:p>
-        </p:txBody>
-      </p:sp>
-      <p:sp>
-        <p:nvSpPr>
-          <p:cNvPr id="3" name="Espace réservé du contenu 2"/>
-          <p:cNvSpPr>
-            <a:spLocks noGrp="1"/>
-          </p:cNvSpPr>
+              <a:t>Workflow</a:t>
+            </a:r>
+          </a:p>
+        </p:txBody>
+      </p:sp>
+      <p:pic>
+        <p:nvPicPr>
+          <p:cNvPr id="7170" name="Picture 2" descr="Un détail de des deux phases du process de machine learning."/>
+          <p:cNvPicPr>
+            <a:picLocks noGrp="1" noChangeAspect="1" noChangeArrowheads="1"/>
+          </p:cNvPicPr>
           <p:nvPr>
             <p:ph idx="1"/>
           </p:nvPr>
-        </p:nvSpPr>
-        <p:spPr/>
-        <p:txBody>
-          <a:bodyPr/>
-          <a:lstStyle/>
-          <a:p>
-            <a:r>
-              <a:rPr lang="fr-FR" dirty="0"/>
-              <a:t>Imaginez que vous êtes un data </a:t>
-            </a:r>
-            <a:r>
-              <a:rPr lang="fr-FR" dirty="0" err="1"/>
-              <a:t>scientist</a:t>
-            </a:r>
-            <a:endParaRPr lang="fr-FR" dirty="0"/>
-          </a:p>
-          <a:p>
-            <a:pPr lvl="1"/>
-            <a:r>
-              <a:rPr lang="fr-FR" dirty="0"/>
-              <a:t>Vous êtes maintenant confortable avec l'ensemble des données récupérées pour vos analyses</a:t>
-            </a:r>
-          </a:p>
-          <a:p>
-            <a:pPr lvl="1"/>
-            <a:r>
-              <a:rPr lang="fr-FR" dirty="0"/>
-              <a:t>Vous avez une connaissance des objectifs principaux de l'entreprise, ce qui vous a aidé à synthétiser les différentes variables qui interviennent, ainsi que visualiser les différents comportements et corrélations présents au sein de ces données</a:t>
-            </a:r>
-          </a:p>
-        </p:txBody>
-      </p:sp>
+        </p:nvPicPr>
+        <p:blipFill>
+          <a:blip r:embed="rId2">
+            <a:extLst>
+              <a:ext uri="{28A0092B-C50C-407E-A947-70E740481C1C}">
+                <a14:useLocalDpi xmlns:a14="http://schemas.microsoft.com/office/drawing/2010/main" val="0"/>
+              </a:ext>
+            </a:extLst>
+          </a:blip>
+          <a:srcRect/>
+          <a:stretch>
+            <a:fillRect/>
+          </a:stretch>
+        </p:blipFill>
+        <p:spPr bwMode="auto">
+          <a:xfrm>
+            <a:off x="1187624" y="1268760"/>
+            <a:ext cx="6902073" cy="4678809"/>
+          </a:xfrm>
+          <a:prstGeom prst="rect">
+            <a:avLst/>
+          </a:prstGeom>
+          <a:noFill/>
+          <a:extLst>
+            <a:ext uri="{909E8E84-426E-40DD-AFC4-6F175D3DCCD1}">
+              <a14:hiddenFill xmlns:a14="http://schemas.microsoft.com/office/drawing/2010/main">
+                <a:solidFill>
+                  <a:srgbClr val="FFFFFF"/>
+                </a:solidFill>
+              </a14:hiddenFill>
+            </a:ext>
+          </a:extLst>
+        </p:spPr>
+      </p:pic>
     </p:spTree>
     <p:extLst>
       <p:ext uri="{BB962C8B-B14F-4D97-AF65-F5344CB8AC3E}">
-        <p14:creationId xmlns:p14="http://schemas.microsoft.com/office/powerpoint/2010/main" val="1213284648"/>
+        <p14:creationId xmlns:p14="http://schemas.microsoft.com/office/powerpoint/2010/main" val="4097198819"/>
       </p:ext>
     </p:extLst>
   </p:cSld>
@@ -5291,7 +5164,7 @@
           <a:p>
             <a:r>
               <a:rPr lang="fr-FR" dirty="0"/>
-              <a:t>Apprentissage</a:t>
+              <a:t>Notre travail</a:t>
             </a:r>
           </a:p>
         </p:txBody>
@@ -5313,7 +5186,15 @@
           <a:p>
             <a:r>
               <a:rPr lang="fr-FR" dirty="0"/>
-              <a:t>En machine </a:t>
+              <a:t>Le travail du data </a:t>
+            </a:r>
+            <a:r>
+              <a:rPr lang="fr-FR" dirty="0" err="1"/>
+              <a:t>scientist</a:t>
+            </a:r>
+            <a:r>
+              <a:rPr lang="fr-FR" dirty="0"/>
+              <a:t> en machine </a:t>
             </a:r>
             <a:r>
               <a:rPr lang="fr-FR" dirty="0" err="1"/>
@@ -5321,36 +5202,32 @@
             </a:r>
             <a:r>
               <a:rPr lang="fr-FR" dirty="0"/>
-              <a:t>, l'idée est que l'algorithme construise une "représentation interne" tout seul afin de pouvoir effectuer la tâche qui lui est demandée (prédiction, identification, </a:t>
+              <a:t> consiste à sélectionner les bonnes données test, choisir et entraîner le bon algorithme en vérifiant grâce à l'analyse d'erreurs que le modèle devient de plus en plus performant et robuste</a:t>
+            </a:r>
+          </a:p>
+          <a:p>
+            <a:r>
+              <a:rPr lang="fr-FR" dirty="0"/>
+              <a:t>Si les performances s'améliorent lorsqu'on lui fourni les données d'entraînement, on dit alors que la machine "apprend".</a:t>
+            </a:r>
+          </a:p>
+          <a:p>
+            <a:r>
+              <a:rPr lang="fr-FR" dirty="0"/>
+              <a:t>Le data </a:t>
             </a:r>
             <a:r>
               <a:rPr lang="fr-FR" dirty="0" err="1"/>
-              <a:t>etc</a:t>
-            </a:r>
-            <a:r>
-              <a:rPr lang="fr-FR" dirty="0"/>
-              <a:t>)</a:t>
-            </a:r>
-          </a:p>
-          <a:p>
-            <a:r>
-              <a:rPr lang="fr-FR" dirty="0"/>
-              <a:t>L’être humain est quasiment incapable d’écrire l’algorithme</a:t>
-            </a:r>
-          </a:p>
-          <a:p>
-            <a:r>
-              <a:rPr lang="fr-FR" dirty="0"/>
-              <a:t>Pour cela, il va d'abord falloir lui entrer un jeu de données d'exemples afin qu'il puisse s'entraîner et s'améliorer, d'où le mot apprentissage</a:t>
-            </a:r>
-          </a:p>
-          <a:p>
-            <a:r>
-              <a:rPr lang="fr-FR" dirty="0"/>
-              <a:t>Ce jeu de données s'appelle le training set</a:t>
-            </a:r>
-          </a:p>
-          <a:p>
+              <a:t>scientist</a:t>
+            </a:r>
+            <a:r>
+              <a:rPr lang="fr-FR" dirty="0"/>
+              <a:t> peut ensuite déployer le modèle afin qu'il traite de nouvelles données, pour accomplir la tâche (prédiction</a:t>
+            </a:r>
+            <a:r>
+              <a:rPr lang="fr-FR"/>
+              <a:t>, décision, ...).</a:t>
+            </a:r>
             <a:endParaRPr lang="fr-FR" dirty="0"/>
           </a:p>
         </p:txBody>
@@ -5358,7 +5235,7 @@
     </p:spTree>
     <p:extLst>
       <p:ext uri="{BB962C8B-B14F-4D97-AF65-F5344CB8AC3E}">
-        <p14:creationId xmlns:p14="http://schemas.microsoft.com/office/powerpoint/2010/main" val="1896891291"/>
+        <p14:creationId xmlns:p14="http://schemas.microsoft.com/office/powerpoint/2010/main" val="2335869725"/>
       </p:ext>
     </p:extLst>
   </p:cSld>
@@ -5402,61 +5279,51 @@
           <a:p>
             <a:r>
               <a:rPr lang="fr-FR" dirty="0"/>
-              <a:t>Machine Learning </a:t>
-            </a:r>
-            <a:r>
-              <a:rPr lang="fr-FR"/>
-              <a:t>vs Programmation</a:t>
-            </a:r>
-            <a:endParaRPr lang="fr-FR" dirty="0"/>
-          </a:p>
-        </p:txBody>
-      </p:sp>
-      <p:pic>
-        <p:nvPicPr>
-          <p:cNvPr id="1026" name="Picture 2" descr="https://dpzbhybb2pdcj.cloudfront.net/allaire/Figures/01fig02.jpg"/>
-          <p:cNvPicPr>
-            <a:picLocks noChangeAspect="1" noChangeArrowheads="1"/>
-          </p:cNvPicPr>
-          <p:nvPr/>
-        </p:nvPicPr>
-        <p:blipFill>
-          <a:blip r:embed="rId2">
-            <a:extLst>
-              <a:ext uri="{28A0092B-C50C-407E-A947-70E740481C1C}">
-                <a14:useLocalDpi xmlns:a14="http://schemas.microsoft.com/office/drawing/2010/main" val="0"/>
-              </a:ext>
-            </a:extLst>
-          </a:blip>
-          <a:srcRect/>
-          <a:stretch>
-            <a:fillRect/>
-          </a:stretch>
-        </p:blipFill>
-        <p:spPr bwMode="auto">
-          <a:xfrm>
-            <a:off x="1979712" y="2420888"/>
-            <a:ext cx="6048672" cy="3069477"/>
-          </a:xfrm>
-          <a:prstGeom prst="rect">
-            <a:avLst/>
-          </a:prstGeom>
-          <a:noFill/>
-          <a:extLst>
-            <a:ext uri="{909E8E84-426E-40DD-AFC4-6F175D3DCCD1}">
-              <a14:hiddenFill xmlns:a14="http://schemas.microsoft.com/office/drawing/2010/main">
-                <a:solidFill>
-                  <a:srgbClr val="FFFFFF"/>
-                </a:solidFill>
-              </a14:hiddenFill>
-            </a:ext>
-          </a:extLst>
-        </p:spPr>
-      </p:pic>
+              <a:t>L'algorithme d'apprentissage</a:t>
+            </a:r>
+          </a:p>
+        </p:txBody>
+      </p:sp>
+      <p:sp>
+        <p:nvSpPr>
+          <p:cNvPr id="3" name="Espace réservé du contenu 2"/>
+          <p:cNvSpPr>
+            <a:spLocks noGrp="1"/>
+          </p:cNvSpPr>
+          <p:nvPr>
+            <p:ph idx="1"/>
+          </p:nvPr>
+        </p:nvSpPr>
+        <p:spPr/>
+        <p:txBody>
+          <a:bodyPr/>
+          <a:lstStyle/>
+          <a:p>
+            <a:r>
+              <a:rPr lang="fr-FR" dirty="0"/>
+              <a:t>L'algorithme d'apprentissage constitue la méthode avec laquelle le modèle statistique va se paramétrer à partir des données d'exemple</a:t>
+            </a:r>
+          </a:p>
+          <a:p>
+            <a:pPr lvl="1"/>
+            <a:r>
+              <a:rPr lang="fr-FR" dirty="0"/>
+              <a:t>Il existe de nombreux algorithmes différents !</a:t>
+            </a:r>
+          </a:p>
+          <a:p>
+            <a:pPr lvl="1"/>
+            <a:r>
+              <a:rPr lang="fr-FR" dirty="0"/>
+              <a:t>On choisira un type d'algorithme particulier en fonction du type de tâche que l'on souhaite accomplir et du type de données dont on dispose</a:t>
+            </a:r>
+          </a:p>
+        </p:txBody>
+      </p:sp>
     </p:spTree>
     <p:extLst>
       <p:ext uri="{BB962C8B-B14F-4D97-AF65-F5344CB8AC3E}">
-        <p14:creationId xmlns:p14="http://schemas.microsoft.com/office/powerpoint/2010/main" val="89981574"/>
+        <p14:creationId xmlns:p14="http://schemas.microsoft.com/office/powerpoint/2010/main" val="1834491022"/>
       </p:ext>
     </p:extLst>
   </p:cSld>
@@ -5500,58 +5367,109 @@
           <a:p>
             <a:r>
               <a:rPr lang="fr-FR" dirty="0"/>
-              <a:t>Exemple</a:t>
-            </a:r>
-          </a:p>
-        </p:txBody>
-      </p:sp>
-      <p:pic>
-        <p:nvPicPr>
-          <p:cNvPr id="6146" name="Picture 2" descr="Un exemple de jeu de données classique (appelé CIFAR-10) qui permet d'entraîner un modèle de machine learning"/>
-          <p:cNvPicPr>
-            <a:picLocks noGrp="1" noChangeAspect="1" noChangeArrowheads="1"/>
-          </p:cNvPicPr>
+              <a:t>Exemples</a:t>
+            </a:r>
+          </a:p>
+        </p:txBody>
+      </p:sp>
+      <p:sp>
+        <p:nvSpPr>
+          <p:cNvPr id="3" name="Espace réservé du contenu 2"/>
+          <p:cNvSpPr>
+            <a:spLocks noGrp="1"/>
+          </p:cNvSpPr>
           <p:nvPr>
             <p:ph idx="1"/>
           </p:nvPr>
-        </p:nvPicPr>
-        <p:blipFill>
-          <a:blip r:embed="rId2">
-            <a:extLst>
-              <a:ext uri="{28A0092B-C50C-407E-A947-70E740481C1C}">
-                <a14:useLocalDpi xmlns:a14="http://schemas.microsoft.com/office/drawing/2010/main" val="0"/>
-              </a:ext>
-            </a:extLst>
-          </a:blip>
-          <a:srcRect/>
-          <a:stretch>
-            <a:fillRect/>
-          </a:stretch>
-        </p:blipFill>
-        <p:spPr bwMode="auto">
-          <a:xfrm>
-            <a:off x="970716" y="1156209"/>
-            <a:ext cx="6697627" cy="5177997"/>
-          </a:xfrm>
-          <a:prstGeom prst="rect">
-            <a:avLst/>
-          </a:prstGeom>
-          <a:noFill/>
-          <a:extLst>
-            <a:ext uri="{909E8E84-426E-40DD-AFC4-6F175D3DCCD1}">
-              <a14:hiddenFill xmlns:a14="http://schemas.microsoft.com/office/drawing/2010/main">
-                <a:solidFill>
-                  <a:srgbClr val="FFFFFF"/>
-                </a:solidFill>
-              </a14:hiddenFill>
-            </a:ext>
-          </a:extLst>
-        </p:spPr>
-      </p:pic>
+        </p:nvSpPr>
+        <p:spPr/>
+        <p:txBody>
+          <a:bodyPr/>
+          <a:lstStyle/>
+          <a:p>
+            <a:r>
+              <a:rPr lang="fr-FR" dirty="0"/>
+              <a:t>Quelques exemples d'algorithmes de machine </a:t>
+            </a:r>
+            <a:r>
+              <a:rPr lang="fr-FR" dirty="0" err="1"/>
+              <a:t>learning</a:t>
+            </a:r>
+            <a:r>
+              <a:rPr lang="fr-FR" dirty="0"/>
+              <a:t>, dont vous avez peut-être déjà entendu parler :</a:t>
+            </a:r>
+          </a:p>
+          <a:p>
+            <a:pPr lvl="1"/>
+            <a:r>
+              <a:rPr lang="fr-FR" dirty="0"/>
+              <a:t>La régression linéaire</a:t>
+            </a:r>
+          </a:p>
+          <a:p>
+            <a:pPr lvl="1"/>
+            <a:r>
+              <a:rPr lang="fr-FR" dirty="0" err="1"/>
+              <a:t>K-nn</a:t>
+            </a:r>
+            <a:endParaRPr lang="fr-FR" dirty="0"/>
+          </a:p>
+          <a:p>
+            <a:pPr lvl="1"/>
+            <a:r>
+              <a:rPr lang="fr-FR" dirty="0"/>
+              <a:t>Les Support </a:t>
+            </a:r>
+            <a:r>
+              <a:rPr lang="fr-FR" dirty="0" err="1"/>
+              <a:t>Vector</a:t>
+            </a:r>
+            <a:r>
+              <a:rPr lang="fr-FR" dirty="0"/>
+              <a:t> Machine (SVM)</a:t>
+            </a:r>
+          </a:p>
+          <a:p>
+            <a:pPr lvl="1"/>
+            <a:r>
+              <a:rPr lang="fr-FR" dirty="0"/>
+              <a:t>Les réseaux de neurones</a:t>
+            </a:r>
+          </a:p>
+          <a:p>
+            <a:pPr lvl="1"/>
+            <a:r>
+              <a:rPr lang="fr-FR" dirty="0"/>
+              <a:t>Les </a:t>
+            </a:r>
+            <a:r>
+              <a:rPr lang="fr-FR" dirty="0" err="1"/>
+              <a:t>random</a:t>
+            </a:r>
+            <a:r>
+              <a:rPr lang="fr-FR" dirty="0"/>
+              <a:t> </a:t>
+            </a:r>
+            <a:r>
+              <a:rPr lang="fr-FR" dirty="0" err="1"/>
+              <a:t>forests</a:t>
+            </a:r>
+            <a:endParaRPr lang="fr-FR" dirty="0"/>
+          </a:p>
+          <a:p>
+            <a:pPr lvl="1"/>
+            <a:r>
+              <a:rPr lang="fr-FR" dirty="0"/>
+              <a:t>etc.</a:t>
+            </a:r>
+          </a:p>
+        </p:txBody>
+      </p:sp>
     </p:spTree>
     <p:extLst>
       <p:ext uri="{BB962C8B-B14F-4D97-AF65-F5344CB8AC3E}">
-        <p14:creationId xmlns:p14="http://schemas.microsoft.com/office/powerpoint/2010/main" val="3094425722"/>
+        <p14:creationId xmlns:p14="http://schemas.microsoft.com/office/powerpoint/2010/main" val="4152399014"/>
       </p:ext>
     </p:extLst>
   </p:cSld>
@@ -5595,58 +5513,40 @@
           <a:p>
             <a:r>
               <a:rPr lang="fr-FR" dirty="0"/>
-              <a:t>Workflow</a:t>
-            </a:r>
-          </a:p>
-        </p:txBody>
-      </p:sp>
-      <p:pic>
-        <p:nvPicPr>
-          <p:cNvPr id="7170" name="Picture 2" descr="Un détail de des deux phases du process de machine learning."/>
-          <p:cNvPicPr>
-            <a:picLocks noGrp="1" noChangeAspect="1" noChangeArrowheads="1"/>
-          </p:cNvPicPr>
+              <a:t>Mesure de performance</a:t>
+            </a:r>
+          </a:p>
+        </p:txBody>
+      </p:sp>
+      <p:sp>
+        <p:nvSpPr>
+          <p:cNvPr id="3" name="Espace réservé du contenu 2"/>
+          <p:cNvSpPr>
+            <a:spLocks noGrp="1"/>
+          </p:cNvSpPr>
           <p:nvPr>
             <p:ph idx="1"/>
           </p:nvPr>
-        </p:nvPicPr>
-        <p:blipFill>
-          <a:blip r:embed="rId2">
-            <a:extLst>
-              <a:ext uri="{28A0092B-C50C-407E-A947-70E740481C1C}">
-                <a14:useLocalDpi xmlns:a14="http://schemas.microsoft.com/office/drawing/2010/main" val="0"/>
-              </a:ext>
-            </a:extLst>
-          </a:blip>
-          <a:srcRect/>
-          <a:stretch>
-            <a:fillRect/>
-          </a:stretch>
-        </p:blipFill>
-        <p:spPr bwMode="auto">
-          <a:xfrm>
-            <a:off x="1187624" y="1268760"/>
-            <a:ext cx="6902073" cy="4678809"/>
-          </a:xfrm>
-          <a:prstGeom prst="rect">
-            <a:avLst/>
-          </a:prstGeom>
-          <a:noFill/>
-          <a:extLst>
-            <a:ext uri="{909E8E84-426E-40DD-AFC4-6F175D3DCCD1}">
-              <a14:hiddenFill xmlns:a14="http://schemas.microsoft.com/office/drawing/2010/main">
-                <a:solidFill>
-                  <a:srgbClr val="FFFFFF"/>
-                </a:solidFill>
-              </a14:hiddenFill>
-            </a:ext>
-          </a:extLst>
-        </p:spPr>
-      </p:pic>
+        </p:nvSpPr>
+        <p:spPr/>
+        <p:txBody>
+          <a:bodyPr/>
+          <a:lstStyle/>
+          <a:p>
+            <a:r>
+              <a:rPr lang="fr-FR" dirty="0"/>
+              <a:t>Mesurer les performances fait partie intégrante du travail de modélisation. Il faut en général déterminer une mesure principale, souvent spécifique à la tâche à accomplir</a:t>
+            </a:r>
+          </a:p>
+          <a:p>
+            <a:endParaRPr lang="fr-FR" dirty="0"/>
+          </a:p>
+        </p:txBody>
+      </p:sp>
     </p:spTree>
     <p:extLst>
       <p:ext uri="{BB962C8B-B14F-4D97-AF65-F5344CB8AC3E}">
-        <p14:creationId xmlns:p14="http://schemas.microsoft.com/office/powerpoint/2010/main" val="4097198819"/>
+        <p14:creationId xmlns:p14="http://schemas.microsoft.com/office/powerpoint/2010/main" val="1973774351"/>
       </p:ext>
     </p:extLst>
   </p:cSld>
@@ -5690,7 +5590,7 @@
           <a:p>
             <a:r>
               <a:rPr lang="fr-FR" dirty="0"/>
-              <a:t>Notre travail</a:t>
+              <a:t>Exemple</a:t>
             </a:r>
           </a:p>
         </p:txBody>
@@ -5711,57 +5611,57 @@
           <a:lstStyle/>
           <a:p>
             <a:r>
-              <a:rPr lang="fr-FR" dirty="0"/>
-              <a:t>Le travail du data </a:t>
-            </a:r>
-            <a:r>
-              <a:rPr lang="fr-FR" dirty="0" err="1"/>
-              <a:t>scientist</a:t>
-            </a:r>
-            <a:r>
-              <a:rPr lang="fr-FR" dirty="0"/>
-              <a:t> en machine </a:t>
-            </a:r>
-            <a:r>
-              <a:rPr lang="fr-FR" dirty="0" err="1"/>
-              <a:t>learning</a:t>
-            </a:r>
-            <a:r>
-              <a:rPr lang="fr-FR" dirty="0"/>
-              <a:t> consiste à sélectionner les bonnes données test, choisir et entraîner le bon algorithme en vérifiant grâce à l'analyse d'erreurs que le modèle devient de plus en plus performant et robuste</a:t>
-            </a:r>
-          </a:p>
-          <a:p>
-            <a:r>
-              <a:rPr lang="fr-FR" dirty="0"/>
-              <a:t>Si les performances s'améliorent lorsqu'on lui fourni les données d'entraînement, on dit alors que la machine "apprend".</a:t>
-            </a:r>
-          </a:p>
-          <a:p>
-            <a:r>
-              <a:rPr lang="fr-FR" dirty="0"/>
-              <a:t>Le data </a:t>
-            </a:r>
-            <a:r>
-              <a:rPr lang="fr-FR" dirty="0" err="1"/>
-              <a:t>scientist</a:t>
-            </a:r>
-            <a:r>
-              <a:rPr lang="fr-FR" dirty="0"/>
-              <a:t> peut ensuite déployer le modèle afin qu'il traite de nouvelles données, pour accomplir la tâche (prédiction</a:t>
-            </a:r>
-            <a:r>
-              <a:rPr lang="fr-FR"/>
-              <a:t>, décision, ...).</a:t>
-            </a:r>
-            <a:endParaRPr lang="fr-FR" dirty="0"/>
+              <a:rPr lang="fr-FR" sz="2400" dirty="0"/>
+              <a:t>Imaginez que vous voulez créer un algorithme de détection de fraudes bancaires</a:t>
+            </a:r>
+          </a:p>
+          <a:p>
+            <a:pPr lvl="1"/>
+            <a:r>
+              <a:rPr lang="fr-FR" sz="2000" dirty="0"/>
+              <a:t>Vous voulez mesurer à quel point votre programme est performant</a:t>
+            </a:r>
+          </a:p>
+          <a:p>
+            <a:r>
+              <a:rPr lang="fr-FR" sz="2400" dirty="0"/>
+              <a:t>Une manière de faire serait de mesurer la proportion totale de transaction détectées comme fraude</a:t>
+            </a:r>
+          </a:p>
+          <a:p>
+            <a:pPr lvl="1"/>
+            <a:r>
+              <a:rPr lang="fr-FR" sz="2000" dirty="0"/>
+              <a:t>Cependant, on compte ici les transactions qui ne sont pas des fraudes et qui ont quand même été notées comme en étant (appelé "faux positifs")</a:t>
+            </a:r>
+          </a:p>
+          <a:p>
+            <a:pPr lvl="1"/>
+            <a:r>
+              <a:rPr lang="fr-FR" sz="2000" dirty="0"/>
+              <a:t>Donc, avec ce genre de métriques, on est pas exigeant sur ce type d'erreur que produit notre algorithme</a:t>
+            </a:r>
+          </a:p>
+          <a:p>
+            <a:r>
+              <a:rPr lang="fr-FR" sz="2400" dirty="0"/>
+              <a:t>Il faut peut être, utiliser une autre métrique plus pertinente. Par exemple, la précision qui est la proportion de "vraies fraudes" détectées par rapport au total de transactions </a:t>
+            </a:r>
+            <a:r>
+              <a:rPr lang="fr-FR" sz="2400" dirty="0" err="1"/>
+              <a:t>flagées</a:t>
+            </a:r>
+            <a:r>
+              <a:rPr lang="fr-FR" sz="2400" dirty="0"/>
+              <a:t> comme fraudes</a:t>
+            </a:r>
           </a:p>
         </p:txBody>
       </p:sp>
     </p:spTree>
     <p:extLst>
       <p:ext uri="{BB962C8B-B14F-4D97-AF65-F5344CB8AC3E}">
-        <p14:creationId xmlns:p14="http://schemas.microsoft.com/office/powerpoint/2010/main" val="2335869725"/>
+        <p14:creationId xmlns:p14="http://schemas.microsoft.com/office/powerpoint/2010/main" val="1447999638"/>
       </p:ext>
     </p:extLst>
   </p:cSld>
@@ -5805,7 +5705,7 @@
           <a:p>
             <a:r>
               <a:rPr lang="fr-FR" dirty="0"/>
-              <a:t>L'algorithme d'apprentissage</a:t>
+              <a:t>Autre exemple</a:t>
             </a:r>
           </a:p>
         </p:txBody>
@@ -5827,21 +5727,13 @@
           <a:p>
             <a:r>
               <a:rPr lang="fr-FR" dirty="0"/>
-              <a:t>L'algorithme d'apprentissage constitue la méthode avec laquelle le modèle statistique va se paramétrer à partir des données d'exemple</a:t>
-            </a:r>
-          </a:p>
-          <a:p>
-            <a:pPr lvl="1"/>
-            <a:r>
-              <a:rPr lang="fr-FR" dirty="0"/>
-              <a:t>Il existe de nombreux algorithmes différents !</a:t>
-            </a:r>
-          </a:p>
-          <a:p>
-            <a:pPr lvl="1"/>
-            <a:r>
-              <a:rPr lang="fr-FR" dirty="0"/>
-              <a:t>On choisira un type d'algorithme particulier en fonction du type de tâche que l'on souhaite accomplir et du type de données dont on dispose</a:t>
+              <a:t>Dans la détection de maladie comme la méningite le nombre de faux positif n’est pas très important</a:t>
+            </a:r>
+          </a:p>
+          <a:p>
+            <a:r>
+              <a:rPr lang="fr-FR" dirty="0"/>
+              <a:t>Alors que le nombre de faux négatif est potentiellement mortel</a:t>
             </a:r>
           </a:p>
         </p:txBody>
@@ -5849,7 +5741,7 @@
     </p:spTree>
     <p:extLst>
       <p:ext uri="{BB962C8B-B14F-4D97-AF65-F5344CB8AC3E}">
-        <p14:creationId xmlns:p14="http://schemas.microsoft.com/office/powerpoint/2010/main" val="1834491022"/>
+        <p14:creationId xmlns:p14="http://schemas.microsoft.com/office/powerpoint/2010/main" val="989672997"/>
       </p:ext>
     </p:extLst>
   </p:cSld>
@@ -5893,7 +5785,7 @@
           <a:p>
             <a:r>
               <a:rPr lang="fr-FR" dirty="0"/>
-              <a:t>Exemples</a:t>
+              <a:t>Erreur</a:t>
             </a:r>
           </a:p>
         </p:txBody>
@@ -5915,801 +5807,7 @@
           <a:p>
             <a:r>
               <a:rPr lang="fr-FR" dirty="0"/>
-              <a:t>Quelques exemples d'algorithmes de machine </a:t>
-            </a:r>
-            <a:r>
-              <a:rPr lang="fr-FR" dirty="0" err="1"/>
-              <a:t>learning</a:t>
-            </a:r>
-            <a:r>
-              <a:rPr lang="fr-FR" dirty="0"/>
-              <a:t>, dont vous avez peut-être déjà entendu parler :</a:t>
-            </a:r>
-          </a:p>
-          <a:p>
-            <a:pPr lvl="1"/>
-            <a:r>
-              <a:rPr lang="fr-FR" dirty="0"/>
-              <a:t>La régression linéaire</a:t>
-            </a:r>
-          </a:p>
-          <a:p>
-            <a:pPr lvl="1"/>
-            <a:r>
-              <a:rPr lang="fr-FR" dirty="0" err="1"/>
-              <a:t>K-nn</a:t>
-            </a:r>
-            <a:endParaRPr lang="fr-FR" dirty="0"/>
-          </a:p>
-          <a:p>
-            <a:pPr lvl="1"/>
-            <a:r>
-              <a:rPr lang="fr-FR" dirty="0"/>
-              <a:t>Les Support </a:t>
-            </a:r>
-            <a:r>
-              <a:rPr lang="fr-FR" dirty="0" err="1"/>
-              <a:t>Vector</a:t>
-            </a:r>
-            <a:r>
-              <a:rPr lang="fr-FR" dirty="0"/>
-              <a:t> Machine (SVM)</a:t>
-            </a:r>
-          </a:p>
-          <a:p>
-            <a:pPr lvl="1"/>
-            <a:r>
-              <a:rPr lang="fr-FR" dirty="0"/>
-              <a:t>Les réseaux de neurones</a:t>
-            </a:r>
-          </a:p>
-          <a:p>
-            <a:pPr lvl="1"/>
-            <a:r>
-              <a:rPr lang="fr-FR" dirty="0"/>
-              <a:t>Les </a:t>
-            </a:r>
-            <a:r>
-              <a:rPr lang="fr-FR" dirty="0" err="1"/>
-              <a:t>random</a:t>
-            </a:r>
-            <a:r>
-              <a:rPr lang="fr-FR" dirty="0"/>
-              <a:t> </a:t>
-            </a:r>
-            <a:r>
-              <a:rPr lang="fr-FR" dirty="0" err="1"/>
-              <a:t>forests</a:t>
-            </a:r>
-            <a:endParaRPr lang="fr-FR" dirty="0"/>
-          </a:p>
-          <a:p>
-            <a:pPr lvl="1"/>
-            <a:r>
-              <a:rPr lang="fr-FR" dirty="0"/>
-              <a:t>etc.</a:t>
-            </a:r>
-          </a:p>
-        </p:txBody>
-      </p:sp>
-    </p:spTree>
-    <p:extLst>
-      <p:ext uri="{BB962C8B-B14F-4D97-AF65-F5344CB8AC3E}">
-        <p14:creationId xmlns:p14="http://schemas.microsoft.com/office/powerpoint/2010/main" val="4152399014"/>
-      </p:ext>
-    </p:extLst>
-  </p:cSld>
-  <p:clrMapOvr>
-    <a:masterClrMapping/>
-  </p:clrMapOvr>
-</p:sld>
-</file>
-
-<file path=ppt/slides/slide27.xml><?xml version="1.0" encoding="utf-8"?>
-<p:sld xmlns:a="http://schemas.openxmlformats.org/drawingml/2006/main" xmlns:r="http://schemas.openxmlformats.org/officeDocument/2006/relationships" xmlns:p="http://schemas.openxmlformats.org/presentationml/2006/main">
-  <p:cSld>
-    <p:spTree>
-      <p:nvGrpSpPr>
-        <p:cNvPr id="1" name=""/>
-        <p:cNvGrpSpPr/>
-        <p:nvPr/>
-      </p:nvGrpSpPr>
-      <p:grpSpPr>
-        <a:xfrm>
-          <a:off x="0" y="0"/>
-          <a:ext cx="0" cy="0"/>
-          <a:chOff x="0" y="0"/>
-          <a:chExt cx="0" cy="0"/>
-        </a:xfrm>
-      </p:grpSpPr>
-      <p:sp>
-        <p:nvSpPr>
-          <p:cNvPr id="2" name="Titre 1"/>
-          <p:cNvSpPr>
-            <a:spLocks noGrp="1"/>
-          </p:cNvSpPr>
-          <p:nvPr>
-            <p:ph type="title"/>
-          </p:nvPr>
-        </p:nvSpPr>
-        <p:spPr/>
-        <p:txBody>
-          <a:bodyPr/>
-          <a:lstStyle/>
-          <a:p>
-            <a:r>
-              <a:rPr lang="fr-FR" dirty="0"/>
-              <a:t>Mesure de performance</a:t>
-            </a:r>
-          </a:p>
-        </p:txBody>
-      </p:sp>
-      <p:sp>
-        <p:nvSpPr>
-          <p:cNvPr id="3" name="Espace réservé du contenu 2"/>
-          <p:cNvSpPr>
-            <a:spLocks noGrp="1"/>
-          </p:cNvSpPr>
-          <p:nvPr>
-            <p:ph idx="1"/>
-          </p:nvPr>
-        </p:nvSpPr>
-        <p:spPr/>
-        <p:txBody>
-          <a:bodyPr/>
-          <a:lstStyle/>
-          <a:p>
-            <a:r>
-              <a:rPr lang="fr-FR" dirty="0"/>
-              <a:t>Mesurer les performances fait partie intégrante du travail de modélisation. Il faut en général déterminer une mesure principale, souvent spécifique à la tâche à accomplir</a:t>
-            </a:r>
-          </a:p>
-          <a:p>
-            <a:endParaRPr lang="fr-FR" dirty="0"/>
-          </a:p>
-        </p:txBody>
-      </p:sp>
-    </p:spTree>
-    <p:extLst>
-      <p:ext uri="{BB962C8B-B14F-4D97-AF65-F5344CB8AC3E}">
-        <p14:creationId xmlns:p14="http://schemas.microsoft.com/office/powerpoint/2010/main" val="1973774351"/>
-      </p:ext>
-    </p:extLst>
-  </p:cSld>
-  <p:clrMapOvr>
-    <a:masterClrMapping/>
-  </p:clrMapOvr>
-</p:sld>
-</file>
-
-<file path=ppt/slides/slide28.xml><?xml version="1.0" encoding="utf-8"?>
-<p:sld xmlns:a="http://schemas.openxmlformats.org/drawingml/2006/main" xmlns:r="http://schemas.openxmlformats.org/officeDocument/2006/relationships" xmlns:p="http://schemas.openxmlformats.org/presentationml/2006/main">
-  <p:cSld>
-    <p:spTree>
-      <p:nvGrpSpPr>
-        <p:cNvPr id="1" name=""/>
-        <p:cNvGrpSpPr/>
-        <p:nvPr/>
-      </p:nvGrpSpPr>
-      <p:grpSpPr>
-        <a:xfrm>
-          <a:off x="0" y="0"/>
-          <a:ext cx="0" cy="0"/>
-          <a:chOff x="0" y="0"/>
-          <a:chExt cx="0" cy="0"/>
-        </a:xfrm>
-      </p:grpSpPr>
-      <p:sp>
-        <p:nvSpPr>
-          <p:cNvPr id="2" name="Titre 1"/>
-          <p:cNvSpPr>
-            <a:spLocks noGrp="1"/>
-          </p:cNvSpPr>
-          <p:nvPr>
-            <p:ph type="title"/>
-          </p:nvPr>
-        </p:nvSpPr>
-        <p:spPr/>
-        <p:txBody>
-          <a:bodyPr/>
-          <a:lstStyle/>
-          <a:p>
-            <a:r>
-              <a:rPr lang="fr-FR" dirty="0"/>
-              <a:t>Exemple</a:t>
-            </a:r>
-          </a:p>
-        </p:txBody>
-      </p:sp>
-      <p:sp>
-        <p:nvSpPr>
-          <p:cNvPr id="3" name="Espace réservé du contenu 2"/>
-          <p:cNvSpPr>
-            <a:spLocks noGrp="1"/>
-          </p:cNvSpPr>
-          <p:nvPr>
-            <p:ph idx="1"/>
-          </p:nvPr>
-        </p:nvSpPr>
-        <p:spPr/>
-        <p:txBody>
-          <a:bodyPr/>
-          <a:lstStyle/>
-          <a:p>
-            <a:r>
-              <a:rPr lang="fr-FR" sz="2400" dirty="0"/>
-              <a:t>Imaginez que vous voulez créer un algorithme de détection de fraudes bancaires</a:t>
-            </a:r>
-          </a:p>
-          <a:p>
-            <a:pPr lvl="1"/>
-            <a:r>
-              <a:rPr lang="fr-FR" sz="2000" dirty="0"/>
-              <a:t>Vous voulez mesurer à quel point votre programme est performant</a:t>
-            </a:r>
-          </a:p>
-          <a:p>
-            <a:r>
-              <a:rPr lang="fr-FR" sz="2400" dirty="0"/>
-              <a:t>Une manière de faire serait de mesurer la proportion totale de transaction détectées comme fraude</a:t>
-            </a:r>
-          </a:p>
-          <a:p>
-            <a:pPr lvl="1"/>
-            <a:r>
-              <a:rPr lang="fr-FR" sz="2000" dirty="0"/>
-              <a:t>Cependant, on compte ici les transactions qui ne sont pas des fraudes et qui ont quand même été notées comme en étant (appelé "faux positifs")</a:t>
-            </a:r>
-          </a:p>
-          <a:p>
-            <a:pPr lvl="1"/>
-            <a:r>
-              <a:rPr lang="fr-FR" sz="2000" dirty="0"/>
-              <a:t>Donc, avec ce genre de métriques, on est pas exigeant sur ce type d'erreur que produit notre algorithme</a:t>
-            </a:r>
-          </a:p>
-          <a:p>
-            <a:r>
-              <a:rPr lang="fr-FR" sz="2400" dirty="0"/>
-              <a:t>Il faut peut être, utiliser une autre métrique plus pertinente. Par exemple, la précision qui est la proportion de "vraies fraudes" détectées par rapport au total de transactions </a:t>
-            </a:r>
-            <a:r>
-              <a:rPr lang="fr-FR" sz="2400" dirty="0" err="1"/>
-              <a:t>flagées</a:t>
-            </a:r>
-            <a:r>
-              <a:rPr lang="fr-FR" sz="2400" dirty="0"/>
-              <a:t> comme fraudes</a:t>
-            </a:r>
-          </a:p>
-        </p:txBody>
-      </p:sp>
-    </p:spTree>
-    <p:extLst>
-      <p:ext uri="{BB962C8B-B14F-4D97-AF65-F5344CB8AC3E}">
-        <p14:creationId xmlns:p14="http://schemas.microsoft.com/office/powerpoint/2010/main" val="1447999638"/>
-      </p:ext>
-    </p:extLst>
-  </p:cSld>
-  <p:clrMapOvr>
-    <a:masterClrMapping/>
-  </p:clrMapOvr>
-</p:sld>
-</file>
-
-<file path=ppt/slides/slide29.xml><?xml version="1.0" encoding="utf-8"?>
-<p:sld xmlns:a="http://schemas.openxmlformats.org/drawingml/2006/main" xmlns:r="http://schemas.openxmlformats.org/officeDocument/2006/relationships" xmlns:p="http://schemas.openxmlformats.org/presentationml/2006/main">
-  <p:cSld>
-    <p:spTree>
-      <p:nvGrpSpPr>
-        <p:cNvPr id="1" name=""/>
-        <p:cNvGrpSpPr/>
-        <p:nvPr/>
-      </p:nvGrpSpPr>
-      <p:grpSpPr>
-        <a:xfrm>
-          <a:off x="0" y="0"/>
-          <a:ext cx="0" cy="0"/>
-          <a:chOff x="0" y="0"/>
-          <a:chExt cx="0" cy="0"/>
-        </a:xfrm>
-      </p:grpSpPr>
-      <p:sp>
-        <p:nvSpPr>
-          <p:cNvPr id="2" name="Titre 1"/>
-          <p:cNvSpPr>
-            <a:spLocks noGrp="1"/>
-          </p:cNvSpPr>
-          <p:nvPr>
-            <p:ph type="title"/>
-          </p:nvPr>
-        </p:nvSpPr>
-        <p:spPr/>
-        <p:txBody>
-          <a:bodyPr/>
-          <a:lstStyle/>
-          <a:p>
-            <a:r>
-              <a:rPr lang="fr-FR" dirty="0"/>
-              <a:t>Autre exemple</a:t>
-            </a:r>
-          </a:p>
-        </p:txBody>
-      </p:sp>
-      <p:sp>
-        <p:nvSpPr>
-          <p:cNvPr id="3" name="Espace réservé du contenu 2"/>
-          <p:cNvSpPr>
-            <a:spLocks noGrp="1"/>
-          </p:cNvSpPr>
-          <p:nvPr>
-            <p:ph idx="1"/>
-          </p:nvPr>
-        </p:nvSpPr>
-        <p:spPr/>
-        <p:txBody>
-          <a:bodyPr/>
-          <a:lstStyle/>
-          <a:p>
-            <a:r>
-              <a:rPr lang="fr-FR" dirty="0"/>
-              <a:t>Dans la détection de maladie comme la méningite le nombre de faux positif n’est pas très important</a:t>
-            </a:r>
-          </a:p>
-          <a:p>
-            <a:r>
-              <a:rPr lang="fr-FR" dirty="0"/>
-              <a:t>Alors que le nombre de faux négatif est potentiellement mortel</a:t>
-            </a:r>
-          </a:p>
-        </p:txBody>
-      </p:sp>
-    </p:spTree>
-    <p:extLst>
-      <p:ext uri="{BB962C8B-B14F-4D97-AF65-F5344CB8AC3E}">
-        <p14:creationId xmlns:p14="http://schemas.microsoft.com/office/powerpoint/2010/main" val="989672997"/>
-      </p:ext>
-    </p:extLst>
-  </p:cSld>
-  <p:clrMapOvr>
-    <a:masterClrMapping/>
-  </p:clrMapOvr>
-</p:sld>
-</file>
-
-<file path=ppt/slides/slide3.xml><?xml version="1.0" encoding="utf-8"?>
-<p:sld xmlns:a="http://schemas.openxmlformats.org/drawingml/2006/main" xmlns:r="http://schemas.openxmlformats.org/officeDocument/2006/relationships" xmlns:p="http://schemas.openxmlformats.org/presentationml/2006/main">
-  <p:cSld>
-    <p:spTree>
-      <p:nvGrpSpPr>
-        <p:cNvPr id="1" name=""/>
-        <p:cNvGrpSpPr/>
-        <p:nvPr/>
-      </p:nvGrpSpPr>
-      <p:grpSpPr>
-        <a:xfrm>
-          <a:off x="0" y="0"/>
-          <a:ext cx="0" cy="0"/>
-          <a:chOff x="0" y="0"/>
-          <a:chExt cx="0" cy="0"/>
-        </a:xfrm>
-      </p:grpSpPr>
-      <p:sp>
-        <p:nvSpPr>
-          <p:cNvPr id="2" name="Titre 1"/>
-          <p:cNvSpPr>
-            <a:spLocks noGrp="1"/>
-          </p:cNvSpPr>
-          <p:nvPr>
-            <p:ph type="title"/>
-          </p:nvPr>
-        </p:nvSpPr>
-        <p:spPr/>
-        <p:txBody>
-          <a:bodyPr/>
-          <a:lstStyle/>
-          <a:p>
-            <a:r>
-              <a:rPr lang="fr-FR" dirty="0"/>
-              <a:t>IA - ML - DL</a:t>
-            </a:r>
-          </a:p>
-        </p:txBody>
-      </p:sp>
-      <p:pic>
-        <p:nvPicPr>
-          <p:cNvPr id="1026" name="Picture 2" descr="https://www.mytectra.com/media/wysiwyg/Blog/deep-learning.png"/>
-          <p:cNvPicPr>
-            <a:picLocks noChangeAspect="1" noChangeArrowheads="1"/>
-          </p:cNvPicPr>
-          <p:nvPr/>
-        </p:nvPicPr>
-        <p:blipFill>
-          <a:blip r:embed="rId2">
-            <a:extLst>
-              <a:ext uri="{28A0092B-C50C-407E-A947-70E740481C1C}">
-                <a14:useLocalDpi xmlns:a14="http://schemas.microsoft.com/office/drawing/2010/main" val="0"/>
-              </a:ext>
-            </a:extLst>
-          </a:blip>
-          <a:srcRect/>
-          <a:stretch>
-            <a:fillRect/>
-          </a:stretch>
-        </p:blipFill>
-        <p:spPr bwMode="auto">
-          <a:xfrm>
-            <a:off x="0" y="908719"/>
-            <a:ext cx="9144000" cy="5816601"/>
-          </a:xfrm>
-          <a:prstGeom prst="rect">
-            <a:avLst/>
-          </a:prstGeom>
-          <a:noFill/>
-          <a:extLst>
-            <a:ext uri="{909E8E84-426E-40DD-AFC4-6F175D3DCCD1}">
-              <a14:hiddenFill xmlns:a14="http://schemas.microsoft.com/office/drawing/2010/main">
-                <a:solidFill>
-                  <a:srgbClr val="FFFFFF"/>
-                </a:solidFill>
-              </a14:hiddenFill>
-            </a:ext>
-          </a:extLst>
-        </p:spPr>
-      </p:pic>
-    </p:spTree>
-    <p:extLst>
-      <p:ext uri="{BB962C8B-B14F-4D97-AF65-F5344CB8AC3E}">
-        <p14:creationId xmlns:p14="http://schemas.microsoft.com/office/powerpoint/2010/main" val="2673415261"/>
-      </p:ext>
-    </p:extLst>
-  </p:cSld>
-  <p:clrMapOvr>
-    <a:masterClrMapping/>
-  </p:clrMapOvr>
-</p:sld>
-</file>
-
-<file path=ppt/slides/slide30.xml><?xml version="1.0" encoding="utf-8"?>
-<p:sld xmlns:a="http://schemas.openxmlformats.org/drawingml/2006/main" xmlns:r="http://schemas.openxmlformats.org/officeDocument/2006/relationships" xmlns:p="http://schemas.openxmlformats.org/presentationml/2006/main">
-  <p:cSld>
-    <p:spTree>
-      <p:nvGrpSpPr>
-        <p:cNvPr id="1" name=""/>
-        <p:cNvGrpSpPr/>
-        <p:nvPr/>
-      </p:nvGrpSpPr>
-      <p:grpSpPr>
-        <a:xfrm>
-          <a:off x="0" y="0"/>
-          <a:ext cx="0" cy="0"/>
-          <a:chOff x="0" y="0"/>
-          <a:chExt cx="0" cy="0"/>
-        </a:xfrm>
-      </p:grpSpPr>
-      <p:sp>
-        <p:nvSpPr>
-          <p:cNvPr id="2" name="Titre 1"/>
-          <p:cNvSpPr>
-            <a:spLocks noGrp="1"/>
-          </p:cNvSpPr>
-          <p:nvPr>
-            <p:ph type="title"/>
-          </p:nvPr>
-        </p:nvSpPr>
-        <p:spPr/>
-        <p:txBody>
-          <a:bodyPr/>
-          <a:lstStyle/>
-          <a:p>
-            <a:r>
-              <a:rPr lang="fr-FR" dirty="0"/>
-              <a:t>Le </a:t>
-            </a:r>
-            <a:r>
-              <a:rPr lang="fr-FR" dirty="0" err="1"/>
-              <a:t>clustering</a:t>
-            </a:r>
-            <a:endParaRPr lang="fr-FR" dirty="0"/>
-          </a:p>
-        </p:txBody>
-      </p:sp>
-      <p:sp>
-        <p:nvSpPr>
-          <p:cNvPr id="3" name="Espace réservé du contenu 2"/>
-          <p:cNvSpPr>
-            <a:spLocks noGrp="1"/>
-          </p:cNvSpPr>
-          <p:nvPr>
-            <p:ph idx="1"/>
-          </p:nvPr>
-        </p:nvSpPr>
-        <p:spPr/>
-        <p:txBody>
-          <a:bodyPr/>
-          <a:lstStyle/>
-          <a:p>
-            <a:r>
-              <a:rPr lang="fr-FR" dirty="0"/>
-              <a:t>Le </a:t>
-            </a:r>
-            <a:r>
-              <a:rPr lang="fr-FR" dirty="0" err="1"/>
-              <a:t>clustering</a:t>
-            </a:r>
-            <a:r>
-              <a:rPr lang="fr-FR" dirty="0"/>
-              <a:t> désigne les méthodes de regroupement automatique de données qui se ressemblent le plus en un ensemble de "nuages", appelés clusters</a:t>
-            </a:r>
-          </a:p>
-          <a:p>
-            <a:r>
-              <a:rPr lang="fr-FR" dirty="0"/>
-              <a:t>Un ensemble d'algorithmes non-supervisés peuvent réaliser cette tâche</a:t>
-            </a:r>
-          </a:p>
-          <a:p>
-            <a:r>
-              <a:rPr lang="fr-FR" dirty="0"/>
-              <a:t>Ils mesurent donc de manière automatique la similarité entre les différentes données</a:t>
-            </a:r>
-          </a:p>
-        </p:txBody>
-      </p:sp>
-    </p:spTree>
-    <p:extLst>
-      <p:ext uri="{BB962C8B-B14F-4D97-AF65-F5344CB8AC3E}">
-        <p14:creationId xmlns:p14="http://schemas.microsoft.com/office/powerpoint/2010/main" val="2676913319"/>
-      </p:ext>
-    </p:extLst>
-  </p:cSld>
-  <p:clrMapOvr>
-    <a:masterClrMapping/>
-  </p:clrMapOvr>
-</p:sld>
-</file>
-
-<file path=ppt/slides/slide31.xml><?xml version="1.0" encoding="utf-8"?>
-<p:sld xmlns:a="http://schemas.openxmlformats.org/drawingml/2006/main" xmlns:r="http://schemas.openxmlformats.org/officeDocument/2006/relationships" xmlns:p="http://schemas.openxmlformats.org/presentationml/2006/main">
-  <p:cSld>
-    <p:spTree>
-      <p:nvGrpSpPr>
-        <p:cNvPr id="1" name=""/>
-        <p:cNvGrpSpPr/>
-        <p:nvPr/>
-      </p:nvGrpSpPr>
-      <p:grpSpPr>
-        <a:xfrm>
-          <a:off x="0" y="0"/>
-          <a:ext cx="0" cy="0"/>
-          <a:chOff x="0" y="0"/>
-          <a:chExt cx="0" cy="0"/>
-        </a:xfrm>
-      </p:grpSpPr>
-      <p:sp>
-        <p:nvSpPr>
-          <p:cNvPr id="2" name="Titre 1"/>
-          <p:cNvSpPr>
-            <a:spLocks noGrp="1"/>
-          </p:cNvSpPr>
-          <p:nvPr>
-            <p:ph type="title"/>
-          </p:nvPr>
-        </p:nvSpPr>
-        <p:spPr/>
-        <p:txBody>
-          <a:bodyPr/>
-          <a:lstStyle/>
-          <a:p>
-            <a:r>
-              <a:rPr lang="fr-FR" dirty="0"/>
-              <a:t>Exemple</a:t>
-            </a:r>
-          </a:p>
-        </p:txBody>
-      </p:sp>
-      <p:pic>
-        <p:nvPicPr>
-          <p:cNvPr id="3074" name="Picture 2" descr="L'objectif du clustering est de retrouver les différents clusters de données similaires"/>
-          <p:cNvPicPr>
-            <a:picLocks noGrp="1" noChangeAspect="1" noChangeArrowheads="1"/>
-          </p:cNvPicPr>
-          <p:nvPr>
-            <p:ph idx="1"/>
-          </p:nvPr>
-        </p:nvPicPr>
-        <p:blipFill>
-          <a:blip r:embed="rId2">
-            <a:extLst>
-              <a:ext uri="{28A0092B-C50C-407E-A947-70E740481C1C}">
-                <a14:useLocalDpi xmlns:a14="http://schemas.microsoft.com/office/drawing/2010/main" val="0"/>
-              </a:ext>
-            </a:extLst>
-          </a:blip>
-          <a:srcRect/>
-          <a:stretch>
-            <a:fillRect/>
-          </a:stretch>
-        </p:blipFill>
-        <p:spPr bwMode="auto">
-          <a:xfrm>
-            <a:off x="2419350" y="1828006"/>
-            <a:ext cx="4286250" cy="4210050"/>
-          </a:xfrm>
-          <a:prstGeom prst="rect">
-            <a:avLst/>
-          </a:prstGeom>
-          <a:noFill/>
-          <a:extLst>
-            <a:ext uri="{909E8E84-426E-40DD-AFC4-6F175D3DCCD1}">
-              <a14:hiddenFill xmlns:a14="http://schemas.microsoft.com/office/drawing/2010/main">
-                <a:solidFill>
-                  <a:srgbClr val="FFFFFF"/>
-                </a:solidFill>
-              </a14:hiddenFill>
-            </a:ext>
-          </a:extLst>
-        </p:spPr>
-      </p:pic>
-    </p:spTree>
-    <p:extLst>
-      <p:ext uri="{BB962C8B-B14F-4D97-AF65-F5344CB8AC3E}">
-        <p14:creationId xmlns:p14="http://schemas.microsoft.com/office/powerpoint/2010/main" val="2665853787"/>
-      </p:ext>
-    </p:extLst>
-  </p:cSld>
-  <p:clrMapOvr>
-    <a:masterClrMapping/>
-  </p:clrMapOvr>
-</p:sld>
-</file>
-
-<file path=ppt/slides/slide32.xml><?xml version="1.0" encoding="utf-8"?>
-<p:sld xmlns:a="http://schemas.openxmlformats.org/drawingml/2006/main" xmlns:r="http://schemas.openxmlformats.org/officeDocument/2006/relationships" xmlns:p="http://schemas.openxmlformats.org/presentationml/2006/main">
-  <p:cSld>
-    <p:spTree>
-      <p:nvGrpSpPr>
-        <p:cNvPr id="1" name=""/>
-        <p:cNvGrpSpPr/>
-        <p:nvPr/>
-      </p:nvGrpSpPr>
-      <p:grpSpPr>
-        <a:xfrm>
-          <a:off x="0" y="0"/>
-          <a:ext cx="0" cy="0"/>
-          <a:chOff x="0" y="0"/>
-          <a:chExt cx="0" cy="0"/>
-        </a:xfrm>
-      </p:grpSpPr>
-      <p:sp>
-        <p:nvSpPr>
-          <p:cNvPr id="2" name="Titre 1"/>
-          <p:cNvSpPr>
-            <a:spLocks noGrp="1"/>
-          </p:cNvSpPr>
-          <p:nvPr>
-            <p:ph type="title"/>
-          </p:nvPr>
-        </p:nvSpPr>
-        <p:spPr/>
-        <p:txBody>
-          <a:bodyPr/>
-          <a:lstStyle/>
-          <a:p>
-            <a:r>
-              <a:rPr lang="fr-FR" dirty="0" err="1"/>
-              <a:t>Loss</a:t>
-            </a:r>
-            <a:endParaRPr lang="fr-FR" dirty="0"/>
-          </a:p>
-        </p:txBody>
-      </p:sp>
-      <p:sp>
-        <p:nvSpPr>
-          <p:cNvPr id="3" name="Espace réservé du contenu 2"/>
-          <p:cNvSpPr>
-            <a:spLocks noGrp="1"/>
-          </p:cNvSpPr>
-          <p:nvPr>
-            <p:ph idx="1"/>
-          </p:nvPr>
-        </p:nvSpPr>
-        <p:spPr/>
-        <p:txBody>
-          <a:bodyPr/>
-          <a:lstStyle/>
-          <a:p>
-            <a:r>
-              <a:rPr lang="fr-FR" dirty="0"/>
-              <a:t>En apprentissage supervisé, la notion principale est celle de perte d’information (</a:t>
-            </a:r>
-            <a:r>
-              <a:rPr lang="fr-FR" dirty="0" err="1"/>
-              <a:t>loss</a:t>
-            </a:r>
-            <a:r>
-              <a:rPr lang="fr-FR" dirty="0"/>
-              <a:t> en anglais) due à l'approximation du modèle</a:t>
-            </a:r>
-          </a:p>
-          <a:p>
-            <a:r>
-              <a:rPr lang="fr-FR" dirty="0"/>
-              <a:t>Elle détermine à quel point notre modélisation du phénomène, qui est une approximation de la réalité (régression), perd de l’information par rapport à la réalité observée à travers les données d’exemple</a:t>
-            </a:r>
-          </a:p>
-        </p:txBody>
-      </p:sp>
-    </p:spTree>
-    <p:extLst>
-      <p:ext uri="{BB962C8B-B14F-4D97-AF65-F5344CB8AC3E}">
-        <p14:creationId xmlns:p14="http://schemas.microsoft.com/office/powerpoint/2010/main" val="3658382805"/>
-      </p:ext>
-    </p:extLst>
-  </p:cSld>
-  <p:clrMapOvr>
-    <a:masterClrMapping/>
-  </p:clrMapOvr>
-</p:sld>
-</file>
-
-<file path=ppt/slides/slide33.xml><?xml version="1.0" encoding="utf-8"?>
-<p:sld xmlns:a="http://schemas.openxmlformats.org/drawingml/2006/main" xmlns:r="http://schemas.openxmlformats.org/officeDocument/2006/relationships" xmlns:p="http://schemas.openxmlformats.org/presentationml/2006/main">
-  <p:cSld>
-    <p:spTree>
-      <p:nvGrpSpPr>
-        <p:cNvPr id="1" name=""/>
-        <p:cNvGrpSpPr/>
-        <p:nvPr/>
-      </p:nvGrpSpPr>
-      <p:grpSpPr>
-        <a:xfrm>
-          <a:off x="0" y="0"/>
-          <a:ext cx="0" cy="0"/>
-          <a:chOff x="0" y="0"/>
-          <a:chExt cx="0" cy="0"/>
-        </a:xfrm>
-      </p:grpSpPr>
-      <p:sp>
-        <p:nvSpPr>
-          <p:cNvPr id="2" name="Titre 1"/>
-          <p:cNvSpPr>
-            <a:spLocks noGrp="1"/>
-          </p:cNvSpPr>
-          <p:nvPr>
-            <p:ph type="title"/>
-          </p:nvPr>
-        </p:nvSpPr>
-        <p:spPr/>
-        <p:txBody>
-          <a:bodyPr/>
-          <a:lstStyle/>
-          <a:p>
-            <a:r>
-              <a:rPr lang="fr-FR" dirty="0"/>
-              <a:t>Erreur</a:t>
-            </a:r>
-          </a:p>
-        </p:txBody>
-      </p:sp>
-      <p:sp>
-        <p:nvSpPr>
-          <p:cNvPr id="3" name="Espace réservé du contenu 2"/>
-          <p:cNvSpPr>
-            <a:spLocks noGrp="1"/>
-          </p:cNvSpPr>
-          <p:nvPr>
-            <p:ph idx="1"/>
-          </p:nvPr>
-        </p:nvSpPr>
-        <p:spPr/>
-        <p:txBody>
-          <a:bodyPr/>
-          <a:lstStyle/>
-          <a:p>
-            <a:r>
-              <a:rPr lang="fr-FR" dirty="0"/>
-              <a:t>L’erreur (ou le risque) est l’écart entre la données et le modèle</a:t>
+              <a:t>L’erreur (ou le risque) est l’écart entre les données et le modèle</a:t>
             </a:r>
           </a:p>
           <a:p>
@@ -6775,7 +5873,7 @@
 </p:sld>
 </file>
 
-<file path=ppt/slides/slide34.xml><?xml version="1.0" encoding="utf-8"?>
+<file path=ppt/slides/slide27.xml><?xml version="1.0" encoding="utf-8"?>
 <p:sld xmlns:a="http://schemas.openxmlformats.org/drawingml/2006/main" xmlns:r="http://schemas.openxmlformats.org/officeDocument/2006/relationships" xmlns:p="http://schemas.openxmlformats.org/presentationml/2006/main">
   <p:cSld>
     <p:spTree>
@@ -6808,200 +5906,6 @@
           <a:lstStyle/>
           <a:p>
             <a:r>
-              <a:rPr lang="fr-FR" dirty="0"/>
-              <a:t>Problèmes non modélisables</a:t>
-            </a:r>
-          </a:p>
-        </p:txBody>
-      </p:sp>
-      <p:sp>
-        <p:nvSpPr>
-          <p:cNvPr id="3" name="Espace réservé du contenu 2"/>
-          <p:cNvSpPr>
-            <a:spLocks noGrp="1"/>
-          </p:cNvSpPr>
-          <p:nvPr>
-            <p:ph idx="1"/>
-          </p:nvPr>
-        </p:nvSpPr>
-        <p:spPr/>
-        <p:txBody>
-          <a:bodyPr/>
-          <a:lstStyle/>
-          <a:p>
-            <a:r>
-              <a:rPr lang="fr-FR" dirty="0"/>
-              <a:t>Certains problèmes ne sont pas modélisables par une régression</a:t>
-            </a:r>
-          </a:p>
-          <a:p>
-            <a:pPr lvl="1"/>
-            <a:r>
-              <a:rPr lang="fr-FR" dirty="0"/>
-              <a:t>Non rationnel : Pi, nombres premiers</a:t>
-            </a:r>
-          </a:p>
-          <a:p>
-            <a:pPr lvl="1"/>
-            <a:r>
-              <a:rPr lang="fr-FR" dirty="0"/>
-              <a:t>Fortement dispersé : </a:t>
-            </a:r>
-            <a:r>
-              <a:rPr lang="fr-FR" dirty="0" err="1"/>
-              <a:t>Random</a:t>
-            </a:r>
-            <a:endParaRPr lang="fr-FR" dirty="0"/>
-          </a:p>
-          <a:p>
-            <a:pPr lvl="1"/>
-            <a:r>
-              <a:rPr lang="fr-FR" dirty="0"/>
-              <a:t>Ici </a:t>
-            </a:r>
-            <a:r>
-              <a:rPr lang="fr-FR" dirty="0" err="1"/>
-              <a:t>random.rand</a:t>
-            </a:r>
-            <a:r>
-              <a:rPr lang="fr-FR" dirty="0"/>
-              <a:t>(30) et les 40000 premiers nombres premiers sur une grille 200 x 200</a:t>
-            </a:r>
-          </a:p>
-          <a:p>
-            <a:pPr lvl="1"/>
-            <a:endParaRPr lang="fr-FR" dirty="0"/>
-          </a:p>
-        </p:txBody>
-      </p:sp>
-      <p:pic>
-        <p:nvPicPr>
-          <p:cNvPr id="6146" name="Picture 2" descr="Échantillon d'une variable aléatoire gaussienne"/>
-          <p:cNvPicPr>
-            <a:picLocks noChangeAspect="1" noChangeArrowheads="1"/>
-          </p:cNvPicPr>
-          <p:nvPr/>
-        </p:nvPicPr>
-        <p:blipFill>
-          <a:blip r:embed="rId2">
-            <a:extLst>
-              <a:ext uri="{28A0092B-C50C-407E-A947-70E740481C1C}">
-                <a14:useLocalDpi xmlns:a14="http://schemas.microsoft.com/office/drawing/2010/main" val="0"/>
-              </a:ext>
-            </a:extLst>
-          </a:blip>
-          <a:srcRect/>
-          <a:stretch>
-            <a:fillRect/>
-          </a:stretch>
-        </p:blipFill>
-        <p:spPr bwMode="auto">
-          <a:xfrm>
-            <a:off x="1162669" y="4060792"/>
-            <a:ext cx="3571875" cy="2400301"/>
-          </a:xfrm>
-          <a:prstGeom prst="rect">
-            <a:avLst/>
-          </a:prstGeom>
-          <a:noFill/>
-          <a:extLst>
-            <a:ext uri="{909E8E84-426E-40DD-AFC4-6F175D3DCCD1}">
-              <a14:hiddenFill xmlns:a14="http://schemas.microsoft.com/office/drawing/2010/main">
-                <a:solidFill>
-                  <a:srgbClr val="FFFFFF"/>
-                </a:solidFill>
-              </a14:hiddenFill>
-            </a:ext>
-          </a:extLst>
-        </p:spPr>
-      </p:pic>
-      <p:pic>
-        <p:nvPicPr>
-          <p:cNvPr id="6148" name="Picture 4" descr="Image associée"/>
-          <p:cNvPicPr>
-            <a:picLocks noChangeAspect="1" noChangeArrowheads="1"/>
-          </p:cNvPicPr>
-          <p:nvPr/>
-        </p:nvPicPr>
-        <p:blipFill>
-          <a:blip r:embed="rId3">
-            <a:extLst>
-              <a:ext uri="{28A0092B-C50C-407E-A947-70E740481C1C}">
-                <a14:useLocalDpi xmlns:a14="http://schemas.microsoft.com/office/drawing/2010/main" val="0"/>
-              </a:ext>
-            </a:extLst>
-          </a:blip>
-          <a:srcRect/>
-          <a:stretch>
-            <a:fillRect/>
-          </a:stretch>
-        </p:blipFill>
-        <p:spPr bwMode="auto">
-          <a:xfrm>
-            <a:off x="5232146" y="4090085"/>
-            <a:ext cx="2148166" cy="2129884"/>
-          </a:xfrm>
-          <a:prstGeom prst="rect">
-            <a:avLst/>
-          </a:prstGeom>
-          <a:noFill/>
-          <a:extLst>
-            <a:ext uri="{909E8E84-426E-40DD-AFC4-6F175D3DCCD1}">
-              <a14:hiddenFill xmlns:a14="http://schemas.microsoft.com/office/drawing/2010/main">
-                <a:solidFill>
-                  <a:srgbClr val="FFFFFF"/>
-                </a:solidFill>
-              </a14:hiddenFill>
-            </a:ext>
-          </a:extLst>
-        </p:spPr>
-      </p:pic>
-    </p:spTree>
-    <p:extLst>
-      <p:ext uri="{BB962C8B-B14F-4D97-AF65-F5344CB8AC3E}">
-        <p14:creationId xmlns:p14="http://schemas.microsoft.com/office/powerpoint/2010/main" val="1959611085"/>
-      </p:ext>
-    </p:extLst>
-  </p:cSld>
-  <p:clrMapOvr>
-    <a:masterClrMapping/>
-  </p:clrMapOvr>
-</p:sld>
-</file>
-
-<file path=ppt/slides/slide35.xml><?xml version="1.0" encoding="utf-8"?>
-<p:sld xmlns:a="http://schemas.openxmlformats.org/drawingml/2006/main" xmlns:r="http://schemas.openxmlformats.org/officeDocument/2006/relationships" xmlns:p="http://schemas.openxmlformats.org/presentationml/2006/main">
-  <p:cSld>
-    <p:spTree>
-      <p:nvGrpSpPr>
-        <p:cNvPr id="1" name=""/>
-        <p:cNvGrpSpPr/>
-        <p:nvPr/>
-      </p:nvGrpSpPr>
-      <p:grpSpPr>
-        <a:xfrm>
-          <a:off x="0" y="0"/>
-          <a:ext cx="0" cy="0"/>
-          <a:chOff x="0" y="0"/>
-          <a:chExt cx="0" cy="0"/>
-        </a:xfrm>
-      </p:grpSpPr>
-      <p:sp>
-        <p:nvSpPr>
-          <p:cNvPr id="2" name="Titre 1"/>
-          <p:cNvSpPr>
-            <a:spLocks noGrp="1"/>
-          </p:cNvSpPr>
-          <p:nvPr>
-            <p:ph type="title"/>
-          </p:nvPr>
-        </p:nvSpPr>
-        <p:spPr/>
-        <p:txBody>
-          <a:bodyPr/>
-          <a:lstStyle/>
-          <a:p>
-            <a:r>
               <a:rPr lang="fr-FR" dirty="0" err="1"/>
               <a:t>Edmunt</a:t>
             </a:r>
@@ -7047,7 +5951,7 @@
 </p:sld>
 </file>
 
-<file path=ppt/slides/slide36.xml><?xml version="1.0" encoding="utf-8"?>
+<file path=ppt/slides/slide28.xml><?xml version="1.0" encoding="utf-8"?>
 <p:sld xmlns:a="http://schemas.openxmlformats.org/drawingml/2006/main" xmlns:r="http://schemas.openxmlformats.org/officeDocument/2006/relationships" xmlns:p="http://schemas.openxmlformats.org/presentationml/2006/main">
   <p:cSld>
     <p:spTree>
@@ -7237,7 +6141,7 @@
 </p:sld>
 </file>
 
-<file path=ppt/slides/slide37.xml><?xml version="1.0" encoding="utf-8"?>
+<file path=ppt/slides/slide29.xml><?xml version="1.0" encoding="utf-8"?>
 <p:sld xmlns:a="http://schemas.openxmlformats.org/drawingml/2006/main" xmlns:r="http://schemas.openxmlformats.org/officeDocument/2006/relationships" xmlns:p="http://schemas.openxmlformats.org/presentationml/2006/main">
   <p:cSld>
     <p:spTree>
@@ -7443,7 +6347,7 @@
 </p:sld>
 </file>
 
-<file path=ppt/slides/slide38.xml><?xml version="1.0" encoding="utf-8"?>
+<file path=ppt/slides/slide3.xml><?xml version="1.0" encoding="utf-8"?>
 <p:sld xmlns:a="http://schemas.openxmlformats.org/drawingml/2006/main" xmlns:r="http://schemas.openxmlformats.org/officeDocument/2006/relationships" xmlns:p="http://schemas.openxmlformats.org/presentationml/2006/main">
   <p:cSld>
     <p:spTree>
@@ -7477,6 +6381,99 @@
           <a:p>
             <a:r>
               <a:rPr lang="fr-FR" dirty="0"/>
+              <a:t>IA - ML - DL</a:t>
+            </a:r>
+          </a:p>
+        </p:txBody>
+      </p:sp>
+      <p:pic>
+        <p:nvPicPr>
+          <p:cNvPr id="1026" name="Picture 2" descr="https://www.mytectra.com/media/wysiwyg/Blog/deep-learning.png"/>
+          <p:cNvPicPr>
+            <a:picLocks noChangeAspect="1" noChangeArrowheads="1"/>
+          </p:cNvPicPr>
+          <p:nvPr/>
+        </p:nvPicPr>
+        <p:blipFill>
+          <a:blip r:embed="rId2">
+            <a:extLst>
+              <a:ext uri="{28A0092B-C50C-407E-A947-70E740481C1C}">
+                <a14:useLocalDpi xmlns:a14="http://schemas.microsoft.com/office/drawing/2010/main" val="0"/>
+              </a:ext>
+            </a:extLst>
+          </a:blip>
+          <a:srcRect/>
+          <a:stretch>
+            <a:fillRect/>
+          </a:stretch>
+        </p:blipFill>
+        <p:spPr bwMode="auto">
+          <a:xfrm>
+            <a:off x="0" y="908719"/>
+            <a:ext cx="9144000" cy="5816601"/>
+          </a:xfrm>
+          <a:prstGeom prst="rect">
+            <a:avLst/>
+          </a:prstGeom>
+          <a:noFill/>
+          <a:extLst>
+            <a:ext uri="{909E8E84-426E-40DD-AFC4-6F175D3DCCD1}">
+              <a14:hiddenFill xmlns:a14="http://schemas.microsoft.com/office/drawing/2010/main">
+                <a:solidFill>
+                  <a:srgbClr val="FFFFFF"/>
+                </a:solidFill>
+              </a14:hiddenFill>
+            </a:ext>
+          </a:extLst>
+        </p:spPr>
+      </p:pic>
+    </p:spTree>
+    <p:extLst>
+      <p:ext uri="{BB962C8B-B14F-4D97-AF65-F5344CB8AC3E}">
+        <p14:creationId xmlns:p14="http://schemas.microsoft.com/office/powerpoint/2010/main" val="2673415261"/>
+      </p:ext>
+    </p:extLst>
+  </p:cSld>
+  <p:clrMapOvr>
+    <a:masterClrMapping/>
+  </p:clrMapOvr>
+</p:sld>
+</file>
+
+<file path=ppt/slides/slide30.xml><?xml version="1.0" encoding="utf-8"?>
+<p:sld xmlns:a="http://schemas.openxmlformats.org/drawingml/2006/main" xmlns:r="http://schemas.openxmlformats.org/officeDocument/2006/relationships" xmlns:p="http://schemas.openxmlformats.org/presentationml/2006/main">
+  <p:cSld>
+    <p:spTree>
+      <p:nvGrpSpPr>
+        <p:cNvPr id="1" name=""/>
+        <p:cNvGrpSpPr/>
+        <p:nvPr/>
+      </p:nvGrpSpPr>
+      <p:grpSpPr>
+        <a:xfrm>
+          <a:off x="0" y="0"/>
+          <a:ext cx="0" cy="0"/>
+          <a:chOff x="0" y="0"/>
+          <a:chExt cx="0" cy="0"/>
+        </a:xfrm>
+      </p:grpSpPr>
+      <p:sp>
+        <p:nvSpPr>
+          <p:cNvPr id="2" name="Titre 1"/>
+          <p:cNvSpPr>
+            <a:spLocks noGrp="1"/>
+          </p:cNvSpPr>
+          <p:nvPr>
+            <p:ph type="title"/>
+          </p:nvPr>
+        </p:nvSpPr>
+        <p:spPr/>
+        <p:txBody>
+          <a:bodyPr/>
+          <a:lstStyle/>
+          <a:p>
+            <a:r>
+              <a:rPr lang="fr-FR" dirty="0"/>
               <a:t>Régression</a:t>
             </a:r>
           </a:p>
@@ -7592,7 +6589,7 @@
 </p:sld>
 </file>
 
-<file path=ppt/slides/slide39.xml><?xml version="1.0" encoding="utf-8"?>
+<file path=ppt/slides/slide31.xml><?xml version="1.0" encoding="utf-8"?>
 <p:sld xmlns:a="http://schemas.openxmlformats.org/drawingml/2006/main" xmlns:r="http://schemas.openxmlformats.org/officeDocument/2006/relationships" xmlns:p="http://schemas.openxmlformats.org/presentationml/2006/main">
   <p:cSld>
     <p:spTree>
@@ -7685,103 +6682,7 @@
 </p:sld>
 </file>
 
-<file path=ppt/slides/slide4.xml><?xml version="1.0" encoding="utf-8"?>
-<p:sld xmlns:a="http://schemas.openxmlformats.org/drawingml/2006/main" xmlns:r="http://schemas.openxmlformats.org/officeDocument/2006/relationships" xmlns:p="http://schemas.openxmlformats.org/presentationml/2006/main">
-  <p:cSld>
-    <p:spTree>
-      <p:nvGrpSpPr>
-        <p:cNvPr id="1" name=""/>
-        <p:cNvGrpSpPr/>
-        <p:nvPr/>
-      </p:nvGrpSpPr>
-      <p:grpSpPr>
-        <a:xfrm>
-          <a:off x="0" y="0"/>
-          <a:ext cx="0" cy="0"/>
-          <a:chOff x="0" y="0"/>
-          <a:chExt cx="0" cy="0"/>
-        </a:xfrm>
-      </p:grpSpPr>
-      <p:sp>
-        <p:nvSpPr>
-          <p:cNvPr id="2" name="Titre 1"/>
-          <p:cNvSpPr>
-            <a:spLocks noGrp="1"/>
-          </p:cNvSpPr>
-          <p:nvPr>
-            <p:ph type="title"/>
-          </p:nvPr>
-        </p:nvSpPr>
-        <p:spPr/>
-        <p:txBody>
-          <a:bodyPr/>
-          <a:lstStyle/>
-          <a:p>
-            <a:r>
-              <a:rPr lang="fr-FR" dirty="0"/>
-              <a:t>But</a:t>
-            </a:r>
-          </a:p>
-        </p:txBody>
-      </p:sp>
-      <p:sp>
-        <p:nvSpPr>
-          <p:cNvPr id="3" name="Espace réservé du contenu 2"/>
-          <p:cNvSpPr>
-            <a:spLocks noGrp="1"/>
-          </p:cNvSpPr>
-          <p:nvPr>
-            <p:ph idx="1"/>
-          </p:nvPr>
-        </p:nvSpPr>
-        <p:spPr/>
-        <p:txBody>
-          <a:bodyPr/>
-          <a:lstStyle/>
-          <a:p>
-            <a:r>
-              <a:rPr lang="fr-FR" dirty="0"/>
-              <a:t>En machine </a:t>
-            </a:r>
-            <a:r>
-              <a:rPr lang="fr-FR" dirty="0" err="1"/>
-              <a:t>learning</a:t>
-            </a:r>
-            <a:r>
-              <a:rPr lang="fr-FR" dirty="0"/>
-              <a:t> et en data science plus généralement, l'objectif est de trouver un modèle du phénomène à l'origine des données</a:t>
-            </a:r>
-          </a:p>
-          <a:p>
-            <a:r>
-              <a:rPr lang="fr-FR" dirty="0"/>
-              <a:t>C'est à dire qu'on considère que chaque donnée observée est l'expression d'une variable aléatoire générée par une distribution de probabilité</a:t>
-            </a:r>
-          </a:p>
-          <a:p>
-            <a:pPr lvl="1"/>
-            <a:r>
-              <a:rPr lang="fr-FR"/>
-              <a:t>Par exemple les sondages</a:t>
-            </a:r>
-            <a:endParaRPr lang="fr-FR" dirty="0"/>
-          </a:p>
-        </p:txBody>
-      </p:sp>
-    </p:spTree>
-    <p:extLst>
-      <p:ext uri="{BB962C8B-B14F-4D97-AF65-F5344CB8AC3E}">
-        <p14:creationId xmlns:p14="http://schemas.microsoft.com/office/powerpoint/2010/main" val="3282916395"/>
-      </p:ext>
-    </p:extLst>
-  </p:cSld>
-  <p:clrMapOvr>
-    <a:masterClrMapping/>
-  </p:clrMapOvr>
-</p:sld>
-</file>
-
-<file path=ppt/slides/slide40.xml><?xml version="1.0" encoding="utf-8"?>
+<file path=ppt/slides/slide32.xml><?xml version="1.0" encoding="utf-8"?>
 <p:sld xmlns:a="http://schemas.openxmlformats.org/drawingml/2006/main" xmlns:r="http://schemas.openxmlformats.org/officeDocument/2006/relationships" xmlns:p="http://schemas.openxmlformats.org/presentationml/2006/main">
   <p:cSld>
     <p:spTree>
@@ -7900,7 +6801,7 @@
 </p:sld>
 </file>
 
-<file path=ppt/slides/slide41.xml><?xml version="1.0" encoding="utf-8"?>
+<file path=ppt/slides/slide33.xml><?xml version="1.0" encoding="utf-8"?>
 <p:sld xmlns:a="http://schemas.openxmlformats.org/drawingml/2006/main" xmlns:r="http://schemas.openxmlformats.org/officeDocument/2006/relationships" xmlns:p="http://schemas.openxmlformats.org/presentationml/2006/main">
   <p:cSld>
     <p:spTree>
@@ -8060,7 +6961,7 @@
 </p:sld>
 </file>
 
-<file path=ppt/slides/slide42.xml><?xml version="1.0" encoding="utf-8"?>
+<file path=ppt/slides/slide34.xml><?xml version="1.0" encoding="utf-8"?>
 <p:sld xmlns:a="http://schemas.openxmlformats.org/drawingml/2006/main" xmlns:r="http://schemas.openxmlformats.org/officeDocument/2006/relationships" xmlns:p="http://schemas.openxmlformats.org/presentationml/2006/main">
   <p:cSld>
     <p:spTree>
@@ -8093,10 +6994,9 @@
           <a:lstStyle/>
           <a:p>
             <a:r>
-              <a:rPr lang="fr-FR"/>
-              <a:t>Échantillonnage</a:t>
-            </a:r>
-            <a:endParaRPr lang="fr-FR" dirty="0"/>
+              <a:rPr lang="fr-FR" dirty="0"/>
+              <a:t>Randomisation</a:t>
+            </a:r>
           </a:p>
         </p:txBody>
       </p:sp>
@@ -8117,63 +7017,65 @@
           <a:p>
             <a:r>
               <a:rPr lang="fr-FR" dirty="0"/>
-              <a:t>Le jeu de données (</a:t>
-            </a:r>
+              <a:t>Il faut utiliser le bon échantillon</a:t>
+            </a:r>
+          </a:p>
+          <a:p>
+            <a:pPr lvl="1"/>
+            <a:r>
+              <a:rPr lang="fr-FR" dirty="0"/>
+              <a:t>Bien répartis</a:t>
+            </a:r>
+          </a:p>
+          <a:p>
+            <a:pPr lvl="1"/>
+            <a:r>
+              <a:rPr lang="fr-FR" dirty="0"/>
+              <a:t>Ne pas introduire de biais</a:t>
+            </a:r>
+          </a:p>
+          <a:p>
+            <a:pPr lvl="1"/>
+            <a:r>
+              <a:rPr lang="fr-FR" dirty="0"/>
+              <a:t>Par exemple à Paris les loyers sont plus chers qu’ailleurs</a:t>
+            </a:r>
+          </a:p>
+          <a:p>
+            <a:r>
+              <a:rPr lang="fr-FR" dirty="0"/>
+              <a:t>Il faut ensuite découper l’échantillon avec le</a:t>
+            </a:r>
+          </a:p>
+          <a:p>
+            <a:pPr lvl="1"/>
+            <a:r>
+              <a:rPr lang="fr-FR" dirty="0"/>
+              <a:t>Training Set</a:t>
+            </a:r>
+          </a:p>
+          <a:p>
+            <a:pPr lvl="1"/>
             <a:r>
               <a:rPr lang="fr-FR" dirty="0" err="1"/>
-              <a:t>dataset</a:t>
-            </a:r>
-            <a:r>
-              <a:rPr lang="fr-FR" dirty="0"/>
-              <a:t>) dont vous disposez constitue une ressource précieuse</a:t>
+              <a:t>Testing</a:t>
+            </a:r>
+            <a:r>
+              <a:rPr lang="fr-FR" dirty="0"/>
+              <a:t> Set</a:t>
+            </a:r>
+          </a:p>
+          <a:p>
+            <a:r>
+              <a:rPr lang="fr-FR" dirty="0"/>
+              <a:t>L’un sert à l’apprentissage, l’autre au test</a:t>
             </a:r>
           </a:p>
           <a:p>
             <a:pPr lvl="1"/>
             <a:r>
               <a:rPr lang="fr-FR" dirty="0"/>
-              <a:t>Il faut pouvoir l’utiliser à bon escient afin de pouvoir à la fois choisir un modèle et l'entraîner</a:t>
-            </a:r>
-          </a:p>
-          <a:p>
-            <a:pPr lvl="1"/>
-            <a:r>
-              <a:rPr lang="fr-FR" dirty="0"/>
-              <a:t>mais aussi de pouvoir tester la qualité de ce modèle</a:t>
-            </a:r>
-          </a:p>
-          <a:p>
-            <a:r>
-              <a:rPr lang="fr-FR" dirty="0"/>
-              <a:t>La première question à se poser est</a:t>
-            </a:r>
-          </a:p>
-          <a:p>
-            <a:pPr lvl="1"/>
-            <a:r>
-              <a:rPr lang="fr-FR" dirty="0"/>
-              <a:t>Est-ce qu’on va utiliser toutes les données d'exemple dont on dispose ?</a:t>
-            </a:r>
-          </a:p>
-          <a:p>
-            <a:pPr lvl="1"/>
-            <a:r>
-              <a:rPr lang="fr-FR" dirty="0"/>
-              <a:t>Volume, tests, …</a:t>
-            </a:r>
-          </a:p>
-          <a:p>
-            <a:r>
-              <a:rPr lang="fr-FR" dirty="0"/>
-              <a:t>Il faut échantillonner (</a:t>
-            </a:r>
-            <a:r>
-              <a:rPr lang="fr-FR" dirty="0" err="1"/>
-              <a:t>sampling</a:t>
-            </a:r>
-            <a:r>
-              <a:rPr lang="fr-FR" dirty="0"/>
-              <a:t>) les données à tester</a:t>
+              <a:t>Souvent 80/20</a:t>
             </a:r>
           </a:p>
         </p:txBody>
@@ -8181,7 +7083,7 @@
     </p:spTree>
     <p:extLst>
       <p:ext uri="{BB962C8B-B14F-4D97-AF65-F5344CB8AC3E}">
-        <p14:creationId xmlns:p14="http://schemas.microsoft.com/office/powerpoint/2010/main" val="1484659042"/>
+        <p14:creationId xmlns:p14="http://schemas.microsoft.com/office/powerpoint/2010/main" val="785613107"/>
       </p:ext>
     </p:extLst>
   </p:cSld>
@@ -8191,7 +7093,7 @@
 </p:sld>
 </file>
 
-<file path=ppt/slides/slide43.xml><?xml version="1.0" encoding="utf-8"?>
+<file path=ppt/slides/slide35.xml><?xml version="1.0" encoding="utf-8"?>
 <p:sld xmlns:a="http://schemas.openxmlformats.org/drawingml/2006/main" xmlns:r="http://schemas.openxmlformats.org/officeDocument/2006/relationships" xmlns:p="http://schemas.openxmlformats.org/presentationml/2006/main">
   <p:cSld>
     <p:spTree>
@@ -8224,239 +7126,6 @@
           <a:lstStyle/>
           <a:p>
             <a:r>
-              <a:rPr lang="fr-FR" dirty="0"/>
-              <a:t>Randomisation</a:t>
-            </a:r>
-          </a:p>
-        </p:txBody>
-      </p:sp>
-      <p:sp>
-        <p:nvSpPr>
-          <p:cNvPr id="3" name="Espace réservé du contenu 2"/>
-          <p:cNvSpPr>
-            <a:spLocks noGrp="1"/>
-          </p:cNvSpPr>
-          <p:nvPr>
-            <p:ph idx="1"/>
-          </p:nvPr>
-        </p:nvSpPr>
-        <p:spPr/>
-        <p:txBody>
-          <a:bodyPr/>
-          <a:lstStyle/>
-          <a:p>
-            <a:r>
-              <a:rPr lang="fr-FR" dirty="0"/>
-              <a:t>Il faut utiliser le bon échantillon</a:t>
-            </a:r>
-          </a:p>
-          <a:p>
-            <a:pPr lvl="1"/>
-            <a:r>
-              <a:rPr lang="fr-FR" dirty="0"/>
-              <a:t>Bien répartis</a:t>
-            </a:r>
-          </a:p>
-          <a:p>
-            <a:pPr lvl="1"/>
-            <a:r>
-              <a:rPr lang="fr-FR" dirty="0"/>
-              <a:t>Ne pas introduire de biais</a:t>
-            </a:r>
-          </a:p>
-          <a:p>
-            <a:pPr lvl="1"/>
-            <a:r>
-              <a:rPr lang="fr-FR" dirty="0"/>
-              <a:t>Par exemple à Paris les loyers sont plus chères qu’ailleurs</a:t>
-            </a:r>
-          </a:p>
-          <a:p>
-            <a:r>
-              <a:rPr lang="fr-FR" dirty="0"/>
-              <a:t>Il faut ensuite découper l’échantillon avec le</a:t>
-            </a:r>
-          </a:p>
-          <a:p>
-            <a:pPr lvl="1"/>
-            <a:r>
-              <a:rPr lang="fr-FR" dirty="0"/>
-              <a:t>Training Set</a:t>
-            </a:r>
-          </a:p>
-          <a:p>
-            <a:pPr lvl="1"/>
-            <a:r>
-              <a:rPr lang="fr-FR" dirty="0" err="1"/>
-              <a:t>Testing</a:t>
-            </a:r>
-            <a:r>
-              <a:rPr lang="fr-FR" dirty="0"/>
-              <a:t> Set</a:t>
-            </a:r>
-          </a:p>
-          <a:p>
-            <a:r>
-              <a:rPr lang="fr-FR" dirty="0"/>
-              <a:t>L’un sert à l’apprentissage, l’autre au test</a:t>
-            </a:r>
-          </a:p>
-          <a:p>
-            <a:pPr lvl="1"/>
-            <a:r>
-              <a:rPr lang="fr-FR" dirty="0"/>
-              <a:t>Souvent 80/20</a:t>
-            </a:r>
-          </a:p>
-        </p:txBody>
-      </p:sp>
-    </p:spTree>
-    <p:extLst>
-      <p:ext uri="{BB962C8B-B14F-4D97-AF65-F5344CB8AC3E}">
-        <p14:creationId xmlns:p14="http://schemas.microsoft.com/office/powerpoint/2010/main" val="785613107"/>
-      </p:ext>
-    </p:extLst>
-  </p:cSld>
-  <p:clrMapOvr>
-    <a:masterClrMapping/>
-  </p:clrMapOvr>
-</p:sld>
-</file>
-
-<file path=ppt/slides/slide44.xml><?xml version="1.0" encoding="utf-8"?>
-<p:sld xmlns:a="http://schemas.openxmlformats.org/drawingml/2006/main" xmlns:r="http://schemas.openxmlformats.org/officeDocument/2006/relationships" xmlns:p="http://schemas.openxmlformats.org/presentationml/2006/main">
-  <p:cSld>
-    <p:spTree>
-      <p:nvGrpSpPr>
-        <p:cNvPr id="1" name=""/>
-        <p:cNvGrpSpPr/>
-        <p:nvPr/>
-      </p:nvGrpSpPr>
-      <p:grpSpPr>
-        <a:xfrm>
-          <a:off x="0" y="0"/>
-          <a:ext cx="0" cy="0"/>
-          <a:chOff x="0" y="0"/>
-          <a:chExt cx="0" cy="0"/>
-        </a:xfrm>
-      </p:grpSpPr>
-      <p:sp>
-        <p:nvSpPr>
-          <p:cNvPr id="2" name="Titre 1"/>
-          <p:cNvSpPr>
-            <a:spLocks noGrp="1"/>
-          </p:cNvSpPr>
-          <p:nvPr>
-            <p:ph type="title"/>
-          </p:nvPr>
-        </p:nvSpPr>
-        <p:spPr/>
-        <p:txBody>
-          <a:bodyPr/>
-          <a:lstStyle/>
-          <a:p>
-            <a:r>
-              <a:rPr lang="fr-FR" dirty="0"/>
-              <a:t>Randomisation</a:t>
-            </a:r>
-          </a:p>
-        </p:txBody>
-      </p:sp>
-      <p:sp>
-        <p:nvSpPr>
-          <p:cNvPr id="3" name="Espace réservé du contenu 2"/>
-          <p:cNvSpPr>
-            <a:spLocks noGrp="1"/>
-          </p:cNvSpPr>
-          <p:nvPr>
-            <p:ph idx="1"/>
-          </p:nvPr>
-        </p:nvSpPr>
-        <p:spPr/>
-        <p:txBody>
-          <a:bodyPr/>
-          <a:lstStyle/>
-          <a:p>
-            <a:r>
-              <a:rPr lang="fr-FR" dirty="0"/>
-              <a:t>Il s’avère que si on entraîne le modèle avec des données, il va naturellement être plus performant sur ces données-là</a:t>
-            </a:r>
-          </a:p>
-          <a:p>
-            <a:r>
-              <a:rPr lang="fr-FR" dirty="0"/>
-              <a:t>Ce qui nous intéresse c’est de mesurer sa performance sur des données qu’il n’a jamais vues puisque c’est ce qui va se passer en pratique</a:t>
-            </a:r>
-          </a:p>
-          <a:p>
-            <a:r>
-              <a:rPr lang="fr-FR" dirty="0"/>
-              <a:t>Cette performance est appelée la </a:t>
-            </a:r>
-            <a:r>
-              <a:rPr lang="fr-FR" b="1" dirty="0"/>
-              <a:t>généralisation</a:t>
-            </a:r>
-            <a:r>
-              <a:rPr lang="fr-FR" dirty="0"/>
-              <a:t> du modèle</a:t>
-            </a:r>
-          </a:p>
-          <a:p>
-            <a:pPr lvl="1"/>
-            <a:r>
-              <a:rPr lang="fr-FR" dirty="0"/>
-              <a:t>Sa capacité à effectuer des prédictions de qualité sur des situations jamais rencontrées.</a:t>
-            </a:r>
-          </a:p>
-        </p:txBody>
-      </p:sp>
-    </p:spTree>
-    <p:extLst>
-      <p:ext uri="{BB962C8B-B14F-4D97-AF65-F5344CB8AC3E}">
-        <p14:creationId xmlns:p14="http://schemas.microsoft.com/office/powerpoint/2010/main" val="2271259804"/>
-      </p:ext>
-    </p:extLst>
-  </p:cSld>
-  <p:clrMapOvr>
-    <a:masterClrMapping/>
-  </p:clrMapOvr>
-</p:sld>
-</file>
-
-<file path=ppt/slides/slide45.xml><?xml version="1.0" encoding="utf-8"?>
-<p:sld xmlns:a="http://schemas.openxmlformats.org/drawingml/2006/main" xmlns:r="http://schemas.openxmlformats.org/officeDocument/2006/relationships" xmlns:p="http://schemas.openxmlformats.org/presentationml/2006/main">
-  <p:cSld>
-    <p:spTree>
-      <p:nvGrpSpPr>
-        <p:cNvPr id="1" name=""/>
-        <p:cNvGrpSpPr/>
-        <p:nvPr/>
-      </p:nvGrpSpPr>
-      <p:grpSpPr>
-        <a:xfrm>
-          <a:off x="0" y="0"/>
-          <a:ext cx="0" cy="0"/>
-          <a:chOff x="0" y="0"/>
-          <a:chExt cx="0" cy="0"/>
-        </a:xfrm>
-      </p:grpSpPr>
-      <p:sp>
-        <p:nvSpPr>
-          <p:cNvPr id="2" name="Titre 1"/>
-          <p:cNvSpPr>
-            <a:spLocks noGrp="1"/>
-          </p:cNvSpPr>
-          <p:nvPr>
-            <p:ph type="title"/>
-          </p:nvPr>
-        </p:nvSpPr>
-        <p:spPr/>
-        <p:txBody>
-          <a:bodyPr/>
-          <a:lstStyle/>
-          <a:p>
-            <a:r>
               <a:rPr lang="fr-FR" altLang="fr-FR" dirty="0" err="1"/>
               <a:t>Nearest</a:t>
             </a:r>
@@ -8527,7 +7196,7 @@
 </p:sld>
 </file>
 
-<file path=ppt/slides/slide46.xml><?xml version="1.0" encoding="utf-8"?>
+<file path=ppt/slides/slide36.xml><?xml version="1.0" encoding="utf-8"?>
 <p:sld xmlns:a="http://schemas.openxmlformats.org/drawingml/2006/main" xmlns:r="http://schemas.openxmlformats.org/officeDocument/2006/relationships" xmlns:p="http://schemas.openxmlformats.org/presentationml/2006/main">
   <p:cSld>
     <p:spTree>
@@ -8651,7 +7320,7 @@
 </p:sld>
 </file>
 
-<file path=ppt/slides/slide47.xml><?xml version="1.0" encoding="utf-8"?>
+<file path=ppt/slides/slide37.xml><?xml version="1.0" encoding="utf-8"?>
 <p:sld xmlns:a="http://schemas.openxmlformats.org/drawingml/2006/main" xmlns:r="http://schemas.openxmlformats.org/officeDocument/2006/relationships" xmlns:p="http://schemas.openxmlformats.org/presentationml/2006/main">
   <p:cSld>
     <p:spTree>
@@ -8781,517 +7450,7 @@
 </p:sld>
 </file>
 
-<file path=ppt/slides/slide48.xml><?xml version="1.0" encoding="utf-8"?>
-<p:sld xmlns:a="http://schemas.openxmlformats.org/drawingml/2006/main" xmlns:r="http://schemas.openxmlformats.org/officeDocument/2006/relationships" xmlns:p="http://schemas.openxmlformats.org/presentationml/2006/main">
-  <p:cSld>
-    <p:spTree>
-      <p:nvGrpSpPr>
-        <p:cNvPr id="1" name=""/>
-        <p:cNvGrpSpPr/>
-        <p:nvPr/>
-      </p:nvGrpSpPr>
-      <p:grpSpPr>
-        <a:xfrm>
-          <a:off x="0" y="0"/>
-          <a:ext cx="0" cy="0"/>
-          <a:chOff x="0" y="0"/>
-          <a:chExt cx="0" cy="0"/>
-        </a:xfrm>
-      </p:grpSpPr>
-      <p:sp>
-        <p:nvSpPr>
-          <p:cNvPr id="2" name="Titre 1"/>
-          <p:cNvSpPr>
-            <a:spLocks noGrp="1"/>
-          </p:cNvSpPr>
-          <p:nvPr>
-            <p:ph type="title"/>
-          </p:nvPr>
-        </p:nvSpPr>
-        <p:spPr/>
-        <p:txBody>
-          <a:bodyPr/>
-          <a:lstStyle/>
-          <a:p>
-            <a:r>
-              <a:rPr lang="fr-FR" dirty="0"/>
-              <a:t>Algorithmes</a:t>
-            </a:r>
-          </a:p>
-        </p:txBody>
-      </p:sp>
-      <p:sp>
-        <p:nvSpPr>
-          <p:cNvPr id="3" name="Espace réservé du contenu 2"/>
-          <p:cNvSpPr>
-            <a:spLocks noGrp="1"/>
-          </p:cNvSpPr>
-          <p:nvPr>
-            <p:ph idx="1"/>
-          </p:nvPr>
-        </p:nvSpPr>
-        <p:spPr/>
-        <p:txBody>
-          <a:bodyPr/>
-          <a:lstStyle/>
-          <a:p>
-            <a:r>
-              <a:rPr lang="fr-FR" sz="2400" dirty="0"/>
-              <a:t>Il existe plusieurs algorithmes </a:t>
-            </a:r>
-            <a:r>
-              <a:rPr lang="fr-FR" sz="2400" dirty="0" err="1"/>
-              <a:t>knn</a:t>
-            </a:r>
-            <a:endParaRPr lang="fr-FR" sz="2400" dirty="0"/>
-          </a:p>
-          <a:p>
-            <a:r>
-              <a:rPr lang="fr-FR" sz="2400" dirty="0"/>
-              <a:t>Brute Force</a:t>
-            </a:r>
-          </a:p>
-          <a:p>
-            <a:pPr lvl="1"/>
-            <a:r>
-              <a:rPr lang="fr-FR" sz="2000" dirty="0"/>
-              <a:t>Etablit la distance entre tous les points</a:t>
-            </a:r>
-          </a:p>
-          <a:p>
-            <a:pPr lvl="1"/>
-            <a:r>
-              <a:rPr lang="fr-FR" sz="2000" dirty="0"/>
-              <a:t>Très bon, mais très couteux pour les gros </a:t>
-            </a:r>
-            <a:r>
-              <a:rPr lang="fr-FR" sz="2000" dirty="0" err="1"/>
-              <a:t>datasets</a:t>
-            </a:r>
-            <a:endParaRPr lang="fr-FR" sz="2000" dirty="0"/>
-          </a:p>
-          <a:p>
-            <a:pPr lvl="1"/>
-            <a:r>
-              <a:rPr lang="fr-FR" sz="2000" dirty="0"/>
-              <a:t>O(n²)</a:t>
-            </a:r>
-          </a:p>
-          <a:p>
-            <a:r>
-              <a:rPr lang="fr-FR" sz="2400" dirty="0" err="1"/>
-              <a:t>KDTree</a:t>
-            </a:r>
-            <a:endParaRPr lang="fr-FR" sz="2400" dirty="0"/>
-          </a:p>
-          <a:p>
-            <a:pPr lvl="1"/>
-            <a:r>
-              <a:rPr lang="fr-FR" sz="2000" dirty="0"/>
-              <a:t>Elimine des distances</a:t>
-            </a:r>
-          </a:p>
-          <a:p>
-            <a:pPr lvl="1"/>
-            <a:r>
-              <a:rPr lang="fr-FR" sz="2000" dirty="0"/>
-              <a:t>Si A est loin de B et B proche de C alors A est loin de C</a:t>
-            </a:r>
-          </a:p>
-          <a:p>
-            <a:pPr lvl="1"/>
-            <a:r>
-              <a:rPr lang="fr-FR" sz="2000" dirty="0"/>
-              <a:t>O(n.log(n))</a:t>
-            </a:r>
-          </a:p>
-          <a:p>
-            <a:r>
-              <a:rPr lang="fr-FR" sz="2400" dirty="0" err="1"/>
-              <a:t>BallTree</a:t>
-            </a:r>
-            <a:endParaRPr lang="fr-FR" sz="2400" dirty="0"/>
-          </a:p>
-          <a:p>
-            <a:pPr lvl="1"/>
-            <a:r>
-              <a:rPr lang="fr-FR" sz="2000" dirty="0"/>
-              <a:t>Sépare les données en partitions</a:t>
-            </a:r>
-          </a:p>
-          <a:p>
-            <a:pPr lvl="1"/>
-            <a:r>
-              <a:rPr lang="fr-FR" sz="2000" dirty="0"/>
-              <a:t>Peut être très efficace ou très </a:t>
-            </a:r>
-            <a:r>
-              <a:rPr lang="fr-FR" sz="2000" dirty="0" err="1"/>
-              <a:t>inneficace</a:t>
-            </a:r>
-            <a:endParaRPr lang="fr-FR" sz="2000" dirty="0"/>
-          </a:p>
-          <a:p>
-            <a:r>
-              <a:rPr lang="fr-FR" sz="2400" dirty="0"/>
-              <a:t>Par défaut </a:t>
-            </a:r>
-            <a:r>
-              <a:rPr lang="fr-FR" sz="2400" dirty="0" err="1"/>
-              <a:t>sklearn</a:t>
-            </a:r>
-            <a:r>
-              <a:rPr lang="fr-FR" sz="2400" dirty="0"/>
-              <a:t> essaie de choisir le meilleur</a:t>
-            </a:r>
-          </a:p>
-        </p:txBody>
-      </p:sp>
-    </p:spTree>
-    <p:extLst>
-      <p:ext uri="{BB962C8B-B14F-4D97-AF65-F5344CB8AC3E}">
-        <p14:creationId xmlns:p14="http://schemas.microsoft.com/office/powerpoint/2010/main" val="3462804227"/>
-      </p:ext>
-    </p:extLst>
-  </p:cSld>
-  <p:clrMapOvr>
-    <a:masterClrMapping/>
-  </p:clrMapOvr>
-</p:sld>
-</file>
-
-<file path=ppt/slides/slide49.xml><?xml version="1.0" encoding="utf-8"?>
-<p:sld xmlns:a="http://schemas.openxmlformats.org/drawingml/2006/main" xmlns:r="http://schemas.openxmlformats.org/officeDocument/2006/relationships" xmlns:p="http://schemas.openxmlformats.org/presentationml/2006/main">
-  <p:cSld>
-    <p:spTree>
-      <p:nvGrpSpPr>
-        <p:cNvPr id="1" name=""/>
-        <p:cNvGrpSpPr/>
-        <p:nvPr/>
-      </p:nvGrpSpPr>
-      <p:grpSpPr>
-        <a:xfrm>
-          <a:off x="0" y="0"/>
-          <a:ext cx="0" cy="0"/>
-          <a:chOff x="0" y="0"/>
-          <a:chExt cx="0" cy="0"/>
-        </a:xfrm>
-      </p:grpSpPr>
-      <p:sp>
-        <p:nvSpPr>
-          <p:cNvPr id="2" name="Titre 1"/>
-          <p:cNvSpPr>
-            <a:spLocks noGrp="1"/>
-          </p:cNvSpPr>
-          <p:nvPr>
-            <p:ph type="title"/>
-          </p:nvPr>
-        </p:nvSpPr>
-        <p:spPr/>
-        <p:txBody>
-          <a:bodyPr/>
-          <a:lstStyle/>
-          <a:p>
-            <a:r>
-              <a:rPr lang="fr-FR" dirty="0"/>
-              <a:t>Modèle</a:t>
-            </a:r>
-          </a:p>
-        </p:txBody>
-      </p:sp>
-      <p:sp>
-        <p:nvSpPr>
-          <p:cNvPr id="3" name="Espace réservé du contenu 2"/>
-          <p:cNvSpPr>
-            <a:spLocks noGrp="1"/>
-          </p:cNvSpPr>
-          <p:nvPr>
-            <p:ph idx="1"/>
-          </p:nvPr>
-        </p:nvSpPr>
-        <p:spPr/>
-        <p:txBody>
-          <a:bodyPr/>
-          <a:lstStyle/>
-          <a:p>
-            <a:r>
-              <a:rPr lang="fr-FR" dirty="0">
-                <a:latin typeface="Courier New" panose="02070309020205020404" pitchFamily="49" charset="0"/>
-                <a:cs typeface="Courier New" panose="02070309020205020404" pitchFamily="49" charset="0"/>
-              </a:rPr>
-              <a:t>import </a:t>
-            </a:r>
-            <a:r>
-              <a:rPr lang="fr-FR" dirty="0" err="1">
-                <a:latin typeface="Courier New" panose="02070309020205020404" pitchFamily="49" charset="0"/>
-                <a:cs typeface="Courier New" panose="02070309020205020404" pitchFamily="49" charset="0"/>
-              </a:rPr>
-              <a:t>sklearn.neighbors</a:t>
-            </a:r>
-            <a:r>
-              <a:rPr lang="fr-FR" dirty="0">
-                <a:latin typeface="Courier New" panose="02070309020205020404" pitchFamily="49" charset="0"/>
-                <a:cs typeface="Courier New" panose="02070309020205020404" pitchFamily="49" charset="0"/>
-              </a:rPr>
-              <a:t> as </a:t>
-            </a:r>
-            <a:r>
-              <a:rPr lang="fr-FR" dirty="0" err="1">
-                <a:latin typeface="Courier New" panose="02070309020205020404" pitchFamily="49" charset="0"/>
-                <a:cs typeface="Courier New" panose="02070309020205020404" pitchFamily="49" charset="0"/>
-              </a:rPr>
-              <a:t>nn</a:t>
-            </a:r>
-            <a:endParaRPr lang="fr-FR" dirty="0">
-              <a:latin typeface="Courier New" panose="02070309020205020404" pitchFamily="49" charset="0"/>
-              <a:cs typeface="Courier New" panose="02070309020205020404" pitchFamily="49" charset="0"/>
-            </a:endParaRPr>
-          </a:p>
-          <a:p>
-            <a:r>
-              <a:rPr lang="fr-FR" dirty="0">
-                <a:latin typeface="Courier New" panose="02070309020205020404" pitchFamily="49" charset="0"/>
-                <a:cs typeface="Courier New" panose="02070309020205020404" pitchFamily="49" charset="0"/>
-              </a:rPr>
-              <a:t>model = </a:t>
-            </a:r>
-            <a:r>
-              <a:rPr lang="fr-FR" dirty="0" err="1">
-                <a:latin typeface="Courier New" panose="02070309020205020404" pitchFamily="49" charset="0"/>
-                <a:cs typeface="Courier New" panose="02070309020205020404" pitchFamily="49" charset="0"/>
-              </a:rPr>
-              <a:t>nn.KNeighborsClassifier</a:t>
-            </a:r>
-            <a:r>
-              <a:rPr lang="fr-FR" dirty="0">
-                <a:latin typeface="Courier New" panose="02070309020205020404" pitchFamily="49" charset="0"/>
-                <a:cs typeface="Courier New" panose="02070309020205020404" pitchFamily="49" charset="0"/>
-              </a:rPr>
-              <a:t>(</a:t>
-            </a:r>
-            <a:r>
-              <a:rPr lang="fr-FR" dirty="0" err="1">
-                <a:latin typeface="Courier New" panose="02070309020205020404" pitchFamily="49" charset="0"/>
-                <a:cs typeface="Courier New" panose="02070309020205020404" pitchFamily="49" charset="0"/>
-              </a:rPr>
-              <a:t>n_neighbors</a:t>
-            </a:r>
-            <a:r>
-              <a:rPr lang="fr-FR" dirty="0">
-                <a:latin typeface="Courier New" panose="02070309020205020404" pitchFamily="49" charset="0"/>
-                <a:cs typeface="Courier New" panose="02070309020205020404" pitchFamily="49" charset="0"/>
-              </a:rPr>
-              <a:t>=3)</a:t>
-            </a:r>
-          </a:p>
-          <a:p>
-            <a:r>
-              <a:rPr lang="fr-FR" dirty="0" err="1">
-                <a:latin typeface="Courier New" panose="02070309020205020404" pitchFamily="49" charset="0"/>
-                <a:cs typeface="Courier New" panose="02070309020205020404" pitchFamily="49" charset="0"/>
-              </a:rPr>
-              <a:t>model.fit</a:t>
-            </a:r>
-            <a:r>
-              <a:rPr lang="fr-FR" dirty="0">
-                <a:latin typeface="Courier New" panose="02070309020205020404" pitchFamily="49" charset="0"/>
-                <a:cs typeface="Courier New" panose="02070309020205020404" pitchFamily="49" charset="0"/>
-              </a:rPr>
-              <a:t>(</a:t>
-            </a:r>
-            <a:r>
-              <a:rPr lang="fr-FR" dirty="0" err="1">
-                <a:latin typeface="Courier New" panose="02070309020205020404" pitchFamily="49" charset="0"/>
-                <a:cs typeface="Courier New" panose="02070309020205020404" pitchFamily="49" charset="0"/>
-              </a:rPr>
-              <a:t>xtrain</a:t>
-            </a:r>
-            <a:r>
-              <a:rPr lang="fr-FR" dirty="0">
-                <a:latin typeface="Courier New" panose="02070309020205020404" pitchFamily="49" charset="0"/>
-                <a:cs typeface="Courier New" panose="02070309020205020404" pitchFamily="49" charset="0"/>
-              </a:rPr>
-              <a:t>, </a:t>
-            </a:r>
-            <a:r>
-              <a:rPr lang="fr-FR" dirty="0" err="1">
-                <a:latin typeface="Courier New" panose="02070309020205020404" pitchFamily="49" charset="0"/>
-                <a:cs typeface="Courier New" panose="02070309020205020404" pitchFamily="49" charset="0"/>
-              </a:rPr>
-              <a:t>ytrain</a:t>
-            </a:r>
-            <a:r>
-              <a:rPr lang="fr-FR" dirty="0">
-                <a:latin typeface="Courier New" panose="02070309020205020404" pitchFamily="49" charset="0"/>
-                <a:cs typeface="Courier New" panose="02070309020205020404" pitchFamily="49" charset="0"/>
-              </a:rPr>
-              <a:t>)</a:t>
-            </a:r>
-          </a:p>
-          <a:p>
-            <a:r>
-              <a:rPr lang="fr-FR" dirty="0" err="1">
-                <a:latin typeface="Courier New" panose="02070309020205020404" pitchFamily="49" charset="0"/>
-                <a:cs typeface="Courier New" panose="02070309020205020404" pitchFamily="49" charset="0"/>
-              </a:rPr>
-              <a:t>model.score</a:t>
-            </a:r>
-            <a:r>
-              <a:rPr lang="fr-FR" dirty="0">
-                <a:latin typeface="Courier New" panose="02070309020205020404" pitchFamily="49" charset="0"/>
-                <a:cs typeface="Courier New" panose="02070309020205020404" pitchFamily="49" charset="0"/>
-              </a:rPr>
-              <a:t>(</a:t>
-            </a:r>
-            <a:r>
-              <a:rPr lang="fr-FR" dirty="0" err="1">
-                <a:latin typeface="Courier New" panose="02070309020205020404" pitchFamily="49" charset="0"/>
-                <a:cs typeface="Courier New" panose="02070309020205020404" pitchFamily="49" charset="0"/>
-              </a:rPr>
-              <a:t>xtest</a:t>
-            </a:r>
-            <a:r>
-              <a:rPr lang="fr-FR" dirty="0">
-                <a:latin typeface="Courier New" panose="02070309020205020404" pitchFamily="49" charset="0"/>
-                <a:cs typeface="Courier New" panose="02070309020205020404" pitchFamily="49" charset="0"/>
-              </a:rPr>
-              <a:t>, </a:t>
-            </a:r>
-            <a:r>
-              <a:rPr lang="fr-FR" dirty="0" err="1">
-                <a:latin typeface="Courier New" panose="02070309020205020404" pitchFamily="49" charset="0"/>
-                <a:cs typeface="Courier New" panose="02070309020205020404" pitchFamily="49" charset="0"/>
-              </a:rPr>
-              <a:t>ytest</a:t>
-            </a:r>
-            <a:r>
-              <a:rPr lang="fr-FR" dirty="0">
-                <a:latin typeface="Courier New" panose="02070309020205020404" pitchFamily="49" charset="0"/>
-                <a:cs typeface="Courier New" panose="02070309020205020404" pitchFamily="49" charset="0"/>
-              </a:rPr>
-              <a:t>)</a:t>
-            </a:r>
-          </a:p>
-        </p:txBody>
-      </p:sp>
-    </p:spTree>
-    <p:extLst>
-      <p:ext uri="{BB962C8B-B14F-4D97-AF65-F5344CB8AC3E}">
-        <p14:creationId xmlns:p14="http://schemas.microsoft.com/office/powerpoint/2010/main" val="3171691522"/>
-      </p:ext>
-    </p:extLst>
-  </p:cSld>
-  <p:clrMapOvr>
-    <a:masterClrMapping/>
-  </p:clrMapOvr>
-</p:sld>
-</file>
-
-<file path=ppt/slides/slide5.xml><?xml version="1.0" encoding="utf-8"?>
-<p:sld xmlns:a="http://schemas.openxmlformats.org/drawingml/2006/main" xmlns:r="http://schemas.openxmlformats.org/officeDocument/2006/relationships" xmlns:p="http://schemas.openxmlformats.org/presentationml/2006/main">
-  <p:cSld>
-    <p:spTree>
-      <p:nvGrpSpPr>
-        <p:cNvPr id="1" name=""/>
-        <p:cNvGrpSpPr/>
-        <p:nvPr/>
-      </p:nvGrpSpPr>
-      <p:grpSpPr>
-        <a:xfrm>
-          <a:off x="0" y="0"/>
-          <a:ext cx="0" cy="0"/>
-          <a:chOff x="0" y="0"/>
-          <a:chExt cx="0" cy="0"/>
-        </a:xfrm>
-      </p:grpSpPr>
-      <p:sp>
-        <p:nvSpPr>
-          <p:cNvPr id="2" name="Titre 1"/>
-          <p:cNvSpPr>
-            <a:spLocks noGrp="1"/>
-          </p:cNvSpPr>
-          <p:nvPr>
-            <p:ph type="title"/>
-          </p:nvPr>
-        </p:nvSpPr>
-        <p:spPr/>
-        <p:txBody>
-          <a:bodyPr/>
-          <a:lstStyle/>
-          <a:p>
-            <a:r>
-              <a:rPr lang="fr-FR" dirty="0"/>
-              <a:t>Exemple</a:t>
-            </a:r>
-          </a:p>
-        </p:txBody>
-      </p:sp>
-      <p:sp>
-        <p:nvSpPr>
-          <p:cNvPr id="3" name="Espace réservé du contenu 2"/>
-          <p:cNvSpPr>
-            <a:spLocks noGrp="1"/>
-          </p:cNvSpPr>
-          <p:nvPr>
-            <p:ph idx="1"/>
-          </p:nvPr>
-        </p:nvSpPr>
-        <p:spPr/>
-        <p:txBody>
-          <a:bodyPr/>
-          <a:lstStyle/>
-          <a:p>
-            <a:r>
-              <a:rPr lang="fr-FR" dirty="0"/>
-              <a:t>Imaginez que vous voulez savoir si vous payez trop cher votre loyer</a:t>
-            </a:r>
-          </a:p>
-          <a:p>
-            <a:r>
-              <a:rPr lang="fr-FR" dirty="0"/>
-              <a:t>Vous avez récupéré sur un site de location une trentaine de prix des locations disponibles, ainsi que la surface associée</a:t>
-            </a:r>
-          </a:p>
-        </p:txBody>
-      </p:sp>
-      <p:pic>
-        <p:nvPicPr>
-          <p:cNvPr id="4" name="Image 3"/>
-          <p:cNvPicPr>
-            <a:picLocks noChangeAspect="1"/>
-          </p:cNvPicPr>
-          <p:nvPr/>
-        </p:nvPicPr>
-        <p:blipFill>
-          <a:blip r:embed="rId2"/>
-          <a:stretch>
-            <a:fillRect/>
-          </a:stretch>
-        </p:blipFill>
-        <p:spPr>
-          <a:xfrm>
-            <a:off x="4932040" y="4149080"/>
-            <a:ext cx="2809875" cy="2038350"/>
-          </a:xfrm>
-          <a:prstGeom prst="rect">
-            <a:avLst/>
-          </a:prstGeom>
-        </p:spPr>
-      </p:pic>
-    </p:spTree>
-    <p:extLst>
-      <p:ext uri="{BB962C8B-B14F-4D97-AF65-F5344CB8AC3E}">
-        <p14:creationId xmlns:p14="http://schemas.microsoft.com/office/powerpoint/2010/main" val="1040096879"/>
-      </p:ext>
-    </p:extLst>
-  </p:cSld>
-  <p:clrMapOvr>
-    <a:masterClrMapping/>
-  </p:clrMapOvr>
-</p:sld>
-</file>
-
-<file path=ppt/slides/slide50.xml><?xml version="1.0" encoding="utf-8"?>
+<file path=ppt/slides/slide38.xml><?xml version="1.0" encoding="utf-8"?>
 <p:sld xmlns:a="http://schemas.openxmlformats.org/drawingml/2006/main" xmlns:r="http://schemas.openxmlformats.org/officeDocument/2006/relationships" xmlns:p="http://schemas.openxmlformats.org/presentationml/2006/main">
   <p:cSld>
     <p:spTree>
@@ -9406,905 +7565,7 @@
 </p:sld>
 </file>
 
-<file path=ppt/slides/slide51.xml><?xml version="1.0" encoding="utf-8"?>
-<p:sld xmlns:a="http://schemas.openxmlformats.org/drawingml/2006/main" xmlns:r="http://schemas.openxmlformats.org/officeDocument/2006/relationships" xmlns:p="http://schemas.openxmlformats.org/presentationml/2006/main">
-  <p:cSld>
-    <p:spTree>
-      <p:nvGrpSpPr>
-        <p:cNvPr id="1" name=""/>
-        <p:cNvGrpSpPr/>
-        <p:nvPr/>
-      </p:nvGrpSpPr>
-      <p:grpSpPr>
-        <a:xfrm>
-          <a:off x="0" y="0"/>
-          <a:ext cx="0" cy="0"/>
-          <a:chOff x="0" y="0"/>
-          <a:chExt cx="0" cy="0"/>
-        </a:xfrm>
-      </p:grpSpPr>
-      <p:sp>
-        <p:nvSpPr>
-          <p:cNvPr id="2" name="Titre 1"/>
-          <p:cNvSpPr>
-            <a:spLocks noGrp="1"/>
-          </p:cNvSpPr>
-          <p:nvPr>
-            <p:ph type="title"/>
-          </p:nvPr>
-        </p:nvSpPr>
-        <p:spPr/>
-        <p:txBody>
-          <a:bodyPr/>
-          <a:lstStyle/>
-          <a:p>
-            <a:r>
-              <a:rPr lang="fr-FR" dirty="0"/>
-              <a:t>Problème détecté</a:t>
-            </a:r>
-          </a:p>
-        </p:txBody>
-      </p:sp>
-      <p:sp>
-        <p:nvSpPr>
-          <p:cNvPr id="3" name="Espace réservé du contenu 2"/>
-          <p:cNvSpPr>
-            <a:spLocks noGrp="1"/>
-          </p:cNvSpPr>
-          <p:nvPr>
-            <p:ph idx="1"/>
-          </p:nvPr>
-        </p:nvSpPr>
-        <p:spPr>
-          <a:xfrm>
-            <a:off x="179513" y="1412776"/>
-            <a:ext cx="5256584" cy="5040560"/>
-          </a:xfrm>
-        </p:spPr>
-        <p:txBody>
-          <a:bodyPr/>
-          <a:lstStyle/>
-          <a:p>
-            <a:r>
-              <a:rPr lang="fr-FR" dirty="0"/>
-              <a:t>Si k est trop faible nous obtenons</a:t>
-            </a:r>
-          </a:p>
-          <a:p>
-            <a:endParaRPr lang="fr-FR" dirty="0"/>
-          </a:p>
-          <a:p>
-            <a:endParaRPr lang="fr-FR" dirty="0"/>
-          </a:p>
-          <a:p>
-            <a:endParaRPr lang="fr-FR" dirty="0"/>
-          </a:p>
-          <a:p>
-            <a:r>
-              <a:rPr lang="fr-FR" dirty="0"/>
-              <a:t>Nous aurions préféré</a:t>
-            </a:r>
-          </a:p>
-          <a:p>
-            <a:pPr lvl="1"/>
-            <a:r>
-              <a:rPr lang="fr-FR" dirty="0"/>
-              <a:t>Pour cela nous sommes passé à k=5</a:t>
-            </a:r>
-          </a:p>
-          <a:p>
-            <a:endParaRPr lang="fr-FR" dirty="0"/>
-          </a:p>
-          <a:p>
-            <a:endParaRPr lang="fr-FR" dirty="0"/>
-          </a:p>
-        </p:txBody>
-      </p:sp>
-      <p:pic>
-        <p:nvPicPr>
-          <p:cNvPr id="1026" name="Picture 2" descr="Les zones désignées par les flèches ne vont pas être bien classées"/>
-          <p:cNvPicPr>
-            <a:picLocks noChangeAspect="1" noChangeArrowheads="1"/>
-          </p:cNvPicPr>
-          <p:nvPr/>
-        </p:nvPicPr>
-        <p:blipFill>
-          <a:blip r:embed="rId2">
-            <a:extLst>
-              <a:ext uri="{28A0092B-C50C-407E-A947-70E740481C1C}">
-                <a14:useLocalDpi xmlns:a14="http://schemas.microsoft.com/office/drawing/2010/main" val="0"/>
-              </a:ext>
-            </a:extLst>
-          </a:blip>
-          <a:srcRect/>
-          <a:stretch>
-            <a:fillRect/>
-          </a:stretch>
-        </p:blipFill>
-        <p:spPr bwMode="auto">
-          <a:xfrm>
-            <a:off x="5783593" y="1149225"/>
-            <a:ext cx="3233978" cy="2207767"/>
-          </a:xfrm>
-          <a:prstGeom prst="rect">
-            <a:avLst/>
-          </a:prstGeom>
-          <a:noFill/>
-          <a:extLst>
-            <a:ext uri="{909E8E84-426E-40DD-AFC4-6F175D3DCCD1}">
-              <a14:hiddenFill xmlns:a14="http://schemas.microsoft.com/office/drawing/2010/main">
-                <a:solidFill>
-                  <a:srgbClr val="FFFFFF"/>
-                </a:solidFill>
-              </a14:hiddenFill>
-            </a:ext>
-          </a:extLst>
-        </p:spPr>
-      </p:pic>
-      <p:pic>
-        <p:nvPicPr>
-          <p:cNvPr id="1028" name="Picture 4" descr="Classifieur 5-nn sur le même jeu de données, beaucoup plus efficace."/>
-          <p:cNvPicPr>
-            <a:picLocks noChangeAspect="1" noChangeArrowheads="1"/>
-          </p:cNvPicPr>
-          <p:nvPr/>
-        </p:nvPicPr>
-        <p:blipFill>
-          <a:blip r:embed="rId3">
-            <a:extLst>
-              <a:ext uri="{28A0092B-C50C-407E-A947-70E740481C1C}">
-                <a14:useLocalDpi xmlns:a14="http://schemas.microsoft.com/office/drawing/2010/main" val="0"/>
-              </a:ext>
-            </a:extLst>
-          </a:blip>
-          <a:srcRect/>
-          <a:stretch>
-            <a:fillRect/>
-          </a:stretch>
-        </p:blipFill>
-        <p:spPr bwMode="auto">
-          <a:xfrm>
-            <a:off x="5783593" y="3415634"/>
-            <a:ext cx="3156313" cy="2154747"/>
-          </a:xfrm>
-          <a:prstGeom prst="rect">
-            <a:avLst/>
-          </a:prstGeom>
-          <a:noFill/>
-          <a:extLst>
-            <a:ext uri="{909E8E84-426E-40DD-AFC4-6F175D3DCCD1}">
-              <a14:hiddenFill xmlns:a14="http://schemas.microsoft.com/office/drawing/2010/main">
-                <a:solidFill>
-                  <a:srgbClr val="FFFFFF"/>
-                </a:solidFill>
-              </a14:hiddenFill>
-            </a:ext>
-          </a:extLst>
-        </p:spPr>
-      </p:pic>
-    </p:spTree>
-    <p:extLst>
-      <p:ext uri="{BB962C8B-B14F-4D97-AF65-F5344CB8AC3E}">
-        <p14:creationId xmlns:p14="http://schemas.microsoft.com/office/powerpoint/2010/main" val="3051369363"/>
-      </p:ext>
-    </p:extLst>
-  </p:cSld>
-  <p:clrMapOvr>
-    <a:masterClrMapping/>
-  </p:clrMapOvr>
-</p:sld>
-</file>
-
-<file path=ppt/slides/slide52.xml><?xml version="1.0" encoding="utf-8"?>
-<p:sld xmlns:a="http://schemas.openxmlformats.org/drawingml/2006/main" xmlns:r="http://schemas.openxmlformats.org/officeDocument/2006/relationships" xmlns:p="http://schemas.openxmlformats.org/presentationml/2006/main">
-  <p:cSld>
-    <p:spTree>
-      <p:nvGrpSpPr>
-        <p:cNvPr id="1" name=""/>
-        <p:cNvGrpSpPr/>
-        <p:nvPr/>
-      </p:nvGrpSpPr>
-      <p:grpSpPr>
-        <a:xfrm>
-          <a:off x="0" y="0"/>
-          <a:ext cx="0" cy="0"/>
-          <a:chOff x="0" y="0"/>
-          <a:chExt cx="0" cy="0"/>
-        </a:xfrm>
-      </p:grpSpPr>
-      <p:sp>
-        <p:nvSpPr>
-          <p:cNvPr id="2" name="Titre 1"/>
-          <p:cNvSpPr>
-            <a:spLocks noGrp="1"/>
-          </p:cNvSpPr>
-          <p:nvPr>
-            <p:ph type="title"/>
-          </p:nvPr>
-        </p:nvSpPr>
-        <p:spPr/>
-        <p:txBody>
-          <a:bodyPr/>
-          <a:lstStyle/>
-          <a:p>
-            <a:r>
-              <a:rPr lang="fr-FR" dirty="0"/>
-              <a:t>Biais vs Variance</a:t>
-            </a:r>
-          </a:p>
-        </p:txBody>
-      </p:sp>
-      <p:sp>
-        <p:nvSpPr>
-          <p:cNvPr id="3" name="Espace réservé du contenu 2"/>
-          <p:cNvSpPr>
-            <a:spLocks noGrp="1"/>
-          </p:cNvSpPr>
-          <p:nvPr>
-            <p:ph idx="1"/>
-          </p:nvPr>
-        </p:nvSpPr>
-        <p:spPr>
-          <a:xfrm>
-            <a:off x="179513" y="1412776"/>
-            <a:ext cx="8838058" cy="5040560"/>
-          </a:xfrm>
-        </p:spPr>
-        <p:txBody>
-          <a:bodyPr/>
-          <a:lstStyle/>
-          <a:p>
-            <a:r>
-              <a:rPr lang="fr-FR" dirty="0"/>
-              <a:t>Avec k=5 notre modèle est plus indépendant du training set</a:t>
-            </a:r>
-          </a:p>
-          <a:p>
-            <a:pPr lvl="1"/>
-            <a:r>
-              <a:rPr lang="fr-FR" dirty="0"/>
-              <a:t>Nous avons augmenté la variance</a:t>
-            </a:r>
-          </a:p>
-          <a:p>
-            <a:pPr lvl="1"/>
-            <a:r>
-              <a:rPr lang="fr-FR" dirty="0"/>
-              <a:t>Cependant plus k est grand plus l’erreur sera grande</a:t>
-            </a:r>
-          </a:p>
-          <a:p>
-            <a:pPr lvl="1"/>
-            <a:r>
-              <a:rPr lang="fr-FR" dirty="0"/>
-              <a:t>Nous avons introduit un biais</a:t>
-            </a:r>
-          </a:p>
-          <a:p>
-            <a:r>
-              <a:rPr lang="fr-FR" dirty="0"/>
-              <a:t>Avec k=1 la variance sera plus faible, l’erreur également</a:t>
-            </a:r>
-          </a:p>
-          <a:p>
-            <a:r>
-              <a:rPr lang="fr-FR" dirty="0"/>
-              <a:t>Par exemple pour k=12 </a:t>
-            </a:r>
-          </a:p>
-          <a:p>
-            <a:pPr lvl="1"/>
-            <a:r>
-              <a:rPr lang="fr-FR" dirty="0"/>
-              <a:t>Le biais est énorme</a:t>
-            </a:r>
-          </a:p>
-          <a:p>
-            <a:endParaRPr lang="fr-FR" dirty="0"/>
-          </a:p>
-        </p:txBody>
-      </p:sp>
-      <p:pic>
-        <p:nvPicPr>
-          <p:cNvPr id="2050" name="Picture 2" descr="Parce qu'on a choisi un k trop grand, la zone de classification est trop lisse par rapport à la complexité du modèle"/>
-          <p:cNvPicPr>
-            <a:picLocks noChangeAspect="1" noChangeArrowheads="1"/>
-          </p:cNvPicPr>
-          <p:nvPr/>
-        </p:nvPicPr>
-        <p:blipFill>
-          <a:blip r:embed="rId2">
-            <a:extLst>
-              <a:ext uri="{28A0092B-C50C-407E-A947-70E740481C1C}">
-                <a14:useLocalDpi xmlns:a14="http://schemas.microsoft.com/office/drawing/2010/main" val="0"/>
-              </a:ext>
-            </a:extLst>
-          </a:blip>
-          <a:srcRect/>
-          <a:stretch>
-            <a:fillRect/>
-          </a:stretch>
-        </p:blipFill>
-        <p:spPr bwMode="auto">
-          <a:xfrm>
-            <a:off x="5148064" y="4149448"/>
-            <a:ext cx="3995936" cy="2743916"/>
-          </a:xfrm>
-          <a:prstGeom prst="rect">
-            <a:avLst/>
-          </a:prstGeom>
-          <a:noFill/>
-          <a:extLst>
-            <a:ext uri="{909E8E84-426E-40DD-AFC4-6F175D3DCCD1}">
-              <a14:hiddenFill xmlns:a14="http://schemas.microsoft.com/office/drawing/2010/main">
-                <a:solidFill>
-                  <a:srgbClr val="FFFFFF"/>
-                </a:solidFill>
-              </a14:hiddenFill>
-            </a:ext>
-          </a:extLst>
-        </p:spPr>
-      </p:pic>
-    </p:spTree>
-    <p:extLst>
-      <p:ext uri="{BB962C8B-B14F-4D97-AF65-F5344CB8AC3E}">
-        <p14:creationId xmlns:p14="http://schemas.microsoft.com/office/powerpoint/2010/main" val="3372267551"/>
-      </p:ext>
-    </p:extLst>
-  </p:cSld>
-  <p:clrMapOvr>
-    <a:masterClrMapping/>
-  </p:clrMapOvr>
-</p:sld>
-</file>
-
-<file path=ppt/slides/slide53.xml><?xml version="1.0" encoding="utf-8"?>
-<p:sld xmlns:a="http://schemas.openxmlformats.org/drawingml/2006/main" xmlns:r="http://schemas.openxmlformats.org/officeDocument/2006/relationships" xmlns:p="http://schemas.openxmlformats.org/presentationml/2006/main">
-  <p:cSld>
-    <p:spTree>
-      <p:nvGrpSpPr>
-        <p:cNvPr id="1" name=""/>
-        <p:cNvGrpSpPr/>
-        <p:nvPr/>
-      </p:nvGrpSpPr>
-      <p:grpSpPr>
-        <a:xfrm>
-          <a:off x="0" y="0"/>
-          <a:ext cx="0" cy="0"/>
-          <a:chOff x="0" y="0"/>
-          <a:chExt cx="0" cy="0"/>
-        </a:xfrm>
-      </p:grpSpPr>
-      <p:sp>
-        <p:nvSpPr>
-          <p:cNvPr id="2" name="Titre 1"/>
-          <p:cNvSpPr>
-            <a:spLocks noGrp="1"/>
-          </p:cNvSpPr>
-          <p:nvPr>
-            <p:ph type="title"/>
-          </p:nvPr>
-        </p:nvSpPr>
-        <p:spPr/>
-        <p:txBody>
-          <a:bodyPr/>
-          <a:lstStyle/>
-          <a:p>
-            <a:r>
-              <a:rPr lang="fr-FR" dirty="0"/>
-              <a:t>Décomposition </a:t>
-            </a:r>
-            <a:r>
-              <a:rPr lang="fr-FR"/>
-              <a:t>de l’erreur</a:t>
-            </a:r>
-            <a:endParaRPr lang="fr-FR" dirty="0"/>
-          </a:p>
-        </p:txBody>
-      </p:sp>
-      <p:sp>
-        <p:nvSpPr>
-          <p:cNvPr id="3" name="Espace réservé du contenu 2"/>
-          <p:cNvSpPr>
-            <a:spLocks noGrp="1"/>
-          </p:cNvSpPr>
-          <p:nvPr>
-            <p:ph idx="1"/>
-          </p:nvPr>
-        </p:nvSpPr>
-        <p:spPr/>
-        <p:txBody>
-          <a:bodyPr/>
-          <a:lstStyle/>
-          <a:p>
-            <a:r>
-              <a:rPr lang="fr-FR" dirty="0"/>
-              <a:t>L’erreur peut s’écrire</a:t>
-            </a:r>
-          </a:p>
-          <a:p>
-            <a:r>
-              <a:rPr lang="fr-FR" dirty="0" err="1"/>
-              <a:t>Err</a:t>
-            </a:r>
-            <a:r>
-              <a:rPr lang="fr-FR" dirty="0"/>
-              <a:t>(x</a:t>
-            </a:r>
-            <a:r>
-              <a:rPr lang="fr-FR"/>
-              <a:t>)=Biais²+Variance+Erreur </a:t>
-            </a:r>
-            <a:r>
-              <a:rPr lang="fr-FR" dirty="0"/>
-              <a:t>Irréductible</a:t>
-            </a:r>
-          </a:p>
-          <a:p>
-            <a:endParaRPr lang="fr-FR" dirty="0"/>
-          </a:p>
-        </p:txBody>
-      </p:sp>
-      <p:pic>
-        <p:nvPicPr>
-          <p:cNvPr id="3074" name="Picture 2" descr="On cherche à se placer au minimum de l'erreur totale"/>
-          <p:cNvPicPr>
-            <a:picLocks noChangeAspect="1" noChangeArrowheads="1"/>
-          </p:cNvPicPr>
-          <p:nvPr/>
-        </p:nvPicPr>
-        <p:blipFill>
-          <a:blip r:embed="rId2">
-            <a:extLst>
-              <a:ext uri="{28A0092B-C50C-407E-A947-70E740481C1C}">
-                <a14:useLocalDpi xmlns:a14="http://schemas.microsoft.com/office/drawing/2010/main" val="0"/>
-              </a:ext>
-            </a:extLst>
-          </a:blip>
-          <a:srcRect/>
-          <a:stretch>
-            <a:fillRect/>
-          </a:stretch>
-        </p:blipFill>
-        <p:spPr bwMode="auto">
-          <a:xfrm>
-            <a:off x="1331640" y="2780928"/>
-            <a:ext cx="5256584" cy="3301391"/>
-          </a:xfrm>
-          <a:prstGeom prst="rect">
-            <a:avLst/>
-          </a:prstGeom>
-          <a:noFill/>
-          <a:extLst>
-            <a:ext uri="{909E8E84-426E-40DD-AFC4-6F175D3DCCD1}">
-              <a14:hiddenFill xmlns:a14="http://schemas.microsoft.com/office/drawing/2010/main">
-                <a:solidFill>
-                  <a:srgbClr val="FFFFFF"/>
-                </a:solidFill>
-              </a14:hiddenFill>
-            </a:ext>
-          </a:extLst>
-        </p:spPr>
-      </p:pic>
-    </p:spTree>
-    <p:extLst>
-      <p:ext uri="{BB962C8B-B14F-4D97-AF65-F5344CB8AC3E}">
-        <p14:creationId xmlns:p14="http://schemas.microsoft.com/office/powerpoint/2010/main" val="2380443556"/>
-      </p:ext>
-    </p:extLst>
-  </p:cSld>
-  <p:clrMapOvr>
-    <a:masterClrMapping/>
-  </p:clrMapOvr>
-</p:sld>
-</file>
-
-<file path=ppt/slides/slide54.xml><?xml version="1.0" encoding="utf-8"?>
-<p:sld xmlns:a="http://schemas.openxmlformats.org/drawingml/2006/main" xmlns:r="http://schemas.openxmlformats.org/officeDocument/2006/relationships" xmlns:p="http://schemas.openxmlformats.org/presentationml/2006/main">
-  <p:cSld>
-    <p:spTree>
-      <p:nvGrpSpPr>
-        <p:cNvPr id="1" name=""/>
-        <p:cNvGrpSpPr/>
-        <p:nvPr/>
-      </p:nvGrpSpPr>
-      <p:grpSpPr>
-        <a:xfrm>
-          <a:off x="0" y="0"/>
-          <a:ext cx="0" cy="0"/>
-          <a:chOff x="0" y="0"/>
-          <a:chExt cx="0" cy="0"/>
-        </a:xfrm>
-      </p:grpSpPr>
-      <p:sp>
-        <p:nvSpPr>
-          <p:cNvPr id="2" name="Titre 1"/>
-          <p:cNvSpPr>
-            <a:spLocks noGrp="1"/>
-          </p:cNvSpPr>
-          <p:nvPr>
-            <p:ph type="title"/>
-          </p:nvPr>
-        </p:nvSpPr>
-        <p:spPr/>
-        <p:txBody>
-          <a:bodyPr/>
-          <a:lstStyle/>
-          <a:p>
-            <a:r>
-              <a:rPr lang="fr-FR" dirty="0"/>
-              <a:t>Minimisation de l’erreur</a:t>
-            </a:r>
-          </a:p>
-        </p:txBody>
-      </p:sp>
-      <p:sp>
-        <p:nvSpPr>
-          <p:cNvPr id="3" name="Espace réservé du contenu 2"/>
-          <p:cNvSpPr>
-            <a:spLocks noGrp="1"/>
-          </p:cNvSpPr>
-          <p:nvPr>
-            <p:ph idx="1"/>
-          </p:nvPr>
-        </p:nvSpPr>
-        <p:spPr/>
-        <p:txBody>
-          <a:bodyPr/>
-          <a:lstStyle/>
-          <a:p>
-            <a:r>
-              <a:rPr lang="fr-FR" dirty="0"/>
-              <a:t>Il faut faire varier le </a:t>
-            </a:r>
-            <a:r>
-              <a:rPr lang="fr-FR" dirty="0" err="1"/>
-              <a:t>n_neighbors</a:t>
-            </a:r>
-            <a:r>
-              <a:rPr lang="fr-FR" dirty="0"/>
-              <a:t> entre 2 et 15</a:t>
-            </a:r>
-          </a:p>
-          <a:p>
-            <a:pPr marL="0" indent="0">
-              <a:buNone/>
-            </a:pPr>
-            <a:r>
-              <a:rPr lang="fr-FR" sz="1800" dirty="0" err="1">
-                <a:latin typeface="Courier New" panose="02070309020205020404" pitchFamily="49" charset="0"/>
-                <a:cs typeface="Courier New" panose="02070309020205020404" pitchFamily="49" charset="0"/>
-              </a:rPr>
-              <a:t>errors</a:t>
-            </a:r>
-            <a:r>
-              <a:rPr lang="fr-FR" sz="1800" dirty="0">
-                <a:latin typeface="Courier New" panose="02070309020205020404" pitchFamily="49" charset="0"/>
-                <a:cs typeface="Courier New" panose="02070309020205020404" pitchFamily="49" charset="0"/>
-              </a:rPr>
-              <a:t> = []</a:t>
-            </a:r>
-          </a:p>
-          <a:p>
-            <a:pPr marL="0" indent="0">
-              <a:buNone/>
-            </a:pPr>
-            <a:r>
-              <a:rPr lang="fr-FR" sz="1800" dirty="0">
-                <a:latin typeface="Courier New" panose="02070309020205020404" pitchFamily="49" charset="0"/>
-                <a:cs typeface="Courier New" panose="02070309020205020404" pitchFamily="49" charset="0"/>
-              </a:rPr>
-              <a:t>for k in range(2,15):</a:t>
-            </a:r>
-          </a:p>
-          <a:p>
-            <a:pPr marL="0" indent="0">
-              <a:buNone/>
-            </a:pPr>
-            <a:r>
-              <a:rPr lang="fr-FR" sz="1800" dirty="0">
-                <a:latin typeface="Courier New" panose="02070309020205020404" pitchFamily="49" charset="0"/>
-                <a:cs typeface="Courier New" panose="02070309020205020404" pitchFamily="49" charset="0"/>
-              </a:rPr>
-              <a:t>    model = </a:t>
-            </a:r>
-            <a:r>
-              <a:rPr lang="fr-FR" sz="1800" dirty="0" err="1">
-                <a:latin typeface="Courier New" panose="02070309020205020404" pitchFamily="49" charset="0"/>
-                <a:cs typeface="Courier New" panose="02070309020205020404" pitchFamily="49" charset="0"/>
-              </a:rPr>
-              <a:t>nn.KNeighborsClassifier</a:t>
-            </a:r>
-            <a:r>
-              <a:rPr lang="fr-FR" sz="1800" dirty="0">
-                <a:latin typeface="Courier New" panose="02070309020205020404" pitchFamily="49" charset="0"/>
-                <a:cs typeface="Courier New" panose="02070309020205020404" pitchFamily="49" charset="0"/>
-              </a:rPr>
-              <a:t>(k)</a:t>
-            </a:r>
-          </a:p>
-          <a:p>
-            <a:pPr marL="0" indent="0">
-              <a:buNone/>
-            </a:pPr>
-            <a:r>
-              <a:rPr lang="fr-FR" sz="1800" dirty="0">
-                <a:latin typeface="Courier New" panose="02070309020205020404" pitchFamily="49" charset="0"/>
-                <a:cs typeface="Courier New" panose="02070309020205020404" pitchFamily="49" charset="0"/>
-              </a:rPr>
-              <a:t>    </a:t>
-            </a:r>
-            <a:r>
-              <a:rPr lang="fr-FR" sz="1800" dirty="0" err="1">
-                <a:latin typeface="Courier New" panose="02070309020205020404" pitchFamily="49" charset="0"/>
-                <a:cs typeface="Courier New" panose="02070309020205020404" pitchFamily="49" charset="0"/>
-              </a:rPr>
-              <a:t>errors.append</a:t>
-            </a:r>
-            <a:r>
-              <a:rPr lang="fr-FR" sz="1800" dirty="0">
-                <a:latin typeface="Courier New" panose="02070309020205020404" pitchFamily="49" charset="0"/>
-                <a:cs typeface="Courier New" panose="02070309020205020404" pitchFamily="49" charset="0"/>
-              </a:rPr>
-              <a:t>(1 - </a:t>
-            </a:r>
-            <a:r>
-              <a:rPr lang="fr-FR" sz="1800" dirty="0" err="1">
-                <a:latin typeface="Courier New" panose="02070309020205020404" pitchFamily="49" charset="0"/>
-                <a:cs typeface="Courier New" panose="02070309020205020404" pitchFamily="49" charset="0"/>
-              </a:rPr>
-              <a:t>model.fit</a:t>
-            </a:r>
-            <a:r>
-              <a:rPr lang="fr-FR" sz="1800" dirty="0">
-                <a:latin typeface="Courier New" panose="02070309020205020404" pitchFamily="49" charset="0"/>
-                <a:cs typeface="Courier New" panose="02070309020205020404" pitchFamily="49" charset="0"/>
-              </a:rPr>
-              <a:t>(</a:t>
-            </a:r>
-            <a:r>
-              <a:rPr lang="fr-FR" sz="1800" dirty="0" err="1">
-                <a:latin typeface="Courier New" panose="02070309020205020404" pitchFamily="49" charset="0"/>
-                <a:cs typeface="Courier New" panose="02070309020205020404" pitchFamily="49" charset="0"/>
-              </a:rPr>
-              <a:t>xtrain</a:t>
-            </a:r>
-            <a:r>
-              <a:rPr lang="fr-FR" sz="1800" dirty="0">
-                <a:latin typeface="Courier New" panose="02070309020205020404" pitchFamily="49" charset="0"/>
-                <a:cs typeface="Courier New" panose="02070309020205020404" pitchFamily="49" charset="0"/>
-              </a:rPr>
-              <a:t>, </a:t>
-            </a:r>
-            <a:r>
-              <a:rPr lang="fr-FR" sz="1800" dirty="0" err="1">
-                <a:latin typeface="Courier New" panose="02070309020205020404" pitchFamily="49" charset="0"/>
-                <a:cs typeface="Courier New" panose="02070309020205020404" pitchFamily="49" charset="0"/>
-              </a:rPr>
-              <a:t>ytrain</a:t>
-            </a:r>
-            <a:r>
-              <a:rPr lang="fr-FR" sz="1800" dirty="0">
-                <a:latin typeface="Courier New" panose="02070309020205020404" pitchFamily="49" charset="0"/>
-                <a:cs typeface="Courier New" panose="02070309020205020404" pitchFamily="49" charset="0"/>
-              </a:rPr>
-              <a:t>).score(</a:t>
-            </a:r>
-            <a:r>
-              <a:rPr lang="fr-FR" sz="1800" dirty="0" err="1">
-                <a:latin typeface="Courier New" panose="02070309020205020404" pitchFamily="49" charset="0"/>
-                <a:cs typeface="Courier New" panose="02070309020205020404" pitchFamily="49" charset="0"/>
-              </a:rPr>
-              <a:t>xtest</a:t>
-            </a:r>
-            <a:r>
-              <a:rPr lang="fr-FR" sz="1800" dirty="0">
-                <a:latin typeface="Courier New" panose="02070309020205020404" pitchFamily="49" charset="0"/>
-                <a:cs typeface="Courier New" panose="02070309020205020404" pitchFamily="49" charset="0"/>
-              </a:rPr>
-              <a:t>, </a:t>
-            </a:r>
-            <a:r>
-              <a:rPr lang="fr-FR" sz="1800" dirty="0" err="1">
-                <a:latin typeface="Courier New" panose="02070309020205020404" pitchFamily="49" charset="0"/>
-                <a:cs typeface="Courier New" panose="02070309020205020404" pitchFamily="49" charset="0"/>
-              </a:rPr>
-              <a:t>ytest</a:t>
-            </a:r>
-            <a:r>
-              <a:rPr lang="fr-FR" sz="1800" dirty="0">
-                <a:latin typeface="Courier New" panose="02070309020205020404" pitchFamily="49" charset="0"/>
-                <a:cs typeface="Courier New" panose="02070309020205020404" pitchFamily="49" charset="0"/>
-              </a:rPr>
-              <a:t>))</a:t>
-            </a:r>
-          </a:p>
-          <a:p>
-            <a:pPr lvl="1"/>
-            <a:r>
-              <a:rPr lang="fr-FR" dirty="0"/>
-              <a:t>Il essayer les différents algorithmes</a:t>
-            </a:r>
-          </a:p>
-          <a:p>
-            <a:pPr lvl="2"/>
-            <a:r>
-              <a:rPr lang="fr-FR" dirty="0"/>
-              <a:t>Paramètre </a:t>
-            </a:r>
-            <a:r>
-              <a:rPr lang="fr-FR" dirty="0" err="1"/>
-              <a:t>algorithm</a:t>
-            </a:r>
-            <a:endParaRPr lang="fr-FR" dirty="0"/>
-          </a:p>
-          <a:p>
-            <a:pPr lvl="1"/>
-            <a:r>
-              <a:rPr lang="fr-FR" dirty="0"/>
-              <a:t>Il faut essayer les 2 poids</a:t>
-            </a:r>
-          </a:p>
-          <a:p>
-            <a:pPr lvl="2"/>
-            <a:r>
-              <a:rPr lang="fr-FR" dirty="0"/>
-              <a:t>Paramètre </a:t>
-            </a:r>
-            <a:r>
-              <a:rPr lang="fr-FR" dirty="0" err="1"/>
-              <a:t>weight</a:t>
-            </a:r>
-            <a:r>
-              <a:rPr lang="fr-FR" dirty="0"/>
-              <a:t> = « distance » qui monte la distance au carré, c’est-à-dire qu’il donne plus d’importance aux points proches</a:t>
-            </a:r>
-          </a:p>
-        </p:txBody>
-      </p:sp>
-    </p:spTree>
-    <p:extLst>
-      <p:ext uri="{BB962C8B-B14F-4D97-AF65-F5344CB8AC3E}">
-        <p14:creationId xmlns:p14="http://schemas.microsoft.com/office/powerpoint/2010/main" val="1328403328"/>
-      </p:ext>
-    </p:extLst>
-  </p:cSld>
-  <p:clrMapOvr>
-    <a:masterClrMapping/>
-  </p:clrMapOvr>
-</p:sld>
-</file>
-
-<file path=ppt/slides/slide55.xml><?xml version="1.0" encoding="utf-8"?>
-<p:sld xmlns:a="http://schemas.openxmlformats.org/drawingml/2006/main" xmlns:r="http://schemas.openxmlformats.org/officeDocument/2006/relationships" xmlns:p="http://schemas.openxmlformats.org/presentationml/2006/main">
-  <p:cSld>
-    <p:spTree>
-      <p:nvGrpSpPr>
-        <p:cNvPr id="1" name=""/>
-        <p:cNvGrpSpPr/>
-        <p:nvPr/>
-      </p:nvGrpSpPr>
-      <p:grpSpPr>
-        <a:xfrm>
-          <a:off x="0" y="0"/>
-          <a:ext cx="0" cy="0"/>
-          <a:chOff x="0" y="0"/>
-          <a:chExt cx="0" cy="0"/>
-        </a:xfrm>
-      </p:grpSpPr>
-      <p:sp>
-        <p:nvSpPr>
-          <p:cNvPr id="2" name="Titre 1"/>
-          <p:cNvSpPr>
-            <a:spLocks noGrp="1"/>
-          </p:cNvSpPr>
-          <p:nvPr>
-            <p:ph type="title"/>
-          </p:nvPr>
-        </p:nvSpPr>
-        <p:spPr/>
-        <p:txBody>
-          <a:bodyPr/>
-          <a:lstStyle/>
-          <a:p>
-            <a:r>
-              <a:rPr lang="fr-FR" dirty="0"/>
-              <a:t>Entrainement et prédiction</a:t>
-            </a:r>
-          </a:p>
-        </p:txBody>
-      </p:sp>
-      <p:sp>
-        <p:nvSpPr>
-          <p:cNvPr id="3" name="Espace réservé du contenu 2"/>
-          <p:cNvSpPr>
-            <a:spLocks noGrp="1"/>
-          </p:cNvSpPr>
-          <p:nvPr>
-            <p:ph idx="1"/>
-          </p:nvPr>
-        </p:nvSpPr>
-        <p:spPr/>
-        <p:txBody>
-          <a:bodyPr/>
-          <a:lstStyle/>
-          <a:p>
-            <a:r>
-              <a:rPr lang="fr-FR" dirty="0"/>
-              <a:t>Il faut ensuite choisir le meilleur modèle, l’entrainer et mettre en place la prédiction</a:t>
-            </a:r>
-          </a:p>
-          <a:p>
-            <a:r>
-              <a:rPr lang="fr-FR" dirty="0" err="1"/>
-              <a:t>model.fit</a:t>
-            </a:r>
-            <a:r>
-              <a:rPr lang="fr-FR" dirty="0"/>
-              <a:t>(</a:t>
-            </a:r>
-            <a:r>
-              <a:rPr lang="fr-FR" dirty="0" err="1"/>
-              <a:t>xtrain</a:t>
-            </a:r>
-            <a:r>
-              <a:rPr lang="fr-FR" dirty="0"/>
-              <a:t>, </a:t>
-            </a:r>
-            <a:r>
-              <a:rPr lang="fr-FR" dirty="0" err="1"/>
-              <a:t>ytrain</a:t>
-            </a:r>
-            <a:r>
-              <a:rPr lang="fr-FR" dirty="0"/>
-              <a:t>)</a:t>
-            </a:r>
-          </a:p>
-          <a:p>
-            <a:r>
-              <a:rPr lang="fr-FR" dirty="0" err="1"/>
-              <a:t>predicted</a:t>
-            </a:r>
-            <a:r>
-              <a:rPr lang="fr-FR" dirty="0"/>
-              <a:t> = </a:t>
-            </a:r>
-            <a:r>
-              <a:rPr lang="fr-FR" dirty="0" err="1"/>
-              <a:t>model.predict</a:t>
-            </a:r>
-            <a:r>
-              <a:rPr lang="fr-FR" dirty="0"/>
-              <a:t>(</a:t>
-            </a:r>
-            <a:r>
-              <a:rPr lang="fr-FR" dirty="0" err="1"/>
-              <a:t>xtest</a:t>
-            </a:r>
-            <a:r>
-              <a:rPr lang="fr-FR" dirty="0"/>
-              <a:t>)</a:t>
-            </a:r>
-          </a:p>
-          <a:p>
-            <a:endParaRPr lang="fr-FR" dirty="0"/>
-          </a:p>
-        </p:txBody>
-      </p:sp>
-    </p:spTree>
-    <p:extLst>
-      <p:ext uri="{BB962C8B-B14F-4D97-AF65-F5344CB8AC3E}">
-        <p14:creationId xmlns:p14="http://schemas.microsoft.com/office/powerpoint/2010/main" val="3520791719"/>
-      </p:ext>
-    </p:extLst>
-  </p:cSld>
-  <p:clrMapOvr>
-    <a:masterClrMapping/>
-  </p:clrMapOvr>
-</p:sld>
-</file>
-
-<file path=ppt/slides/slide56.xml><?xml version="1.0" encoding="utf-8"?>
+<file path=ppt/slides/slide39.xml><?xml version="1.0" encoding="utf-8"?>
 <p:sld xmlns:a="http://schemas.openxmlformats.org/drawingml/2006/main" xmlns:r="http://schemas.openxmlformats.org/officeDocument/2006/relationships" xmlns:p="http://schemas.openxmlformats.org/presentationml/2006/main">
   <p:cSld>
     <p:spTree>
@@ -10432,7 +7693,7 @@
 </p:sld>
 </file>
 
-<file path=ppt/slides/slide57.xml><?xml version="1.0" encoding="utf-8"?>
+<file path=ppt/slides/slide4.xml><?xml version="1.0" encoding="utf-8"?>
 <p:sld xmlns:a="http://schemas.openxmlformats.org/drawingml/2006/main" xmlns:r="http://schemas.openxmlformats.org/officeDocument/2006/relationships" xmlns:p="http://schemas.openxmlformats.org/presentationml/2006/main">
   <p:cSld>
     <p:spTree>
@@ -10466,7 +7727,7 @@
           <a:p>
             <a:r>
               <a:rPr lang="fr-FR" dirty="0"/>
-              <a:t>Autres modèles</a:t>
+              <a:t>But</a:t>
             </a:r>
           </a:p>
         </p:txBody>
@@ -10488,37 +7749,37 @@
           <a:p>
             <a:r>
               <a:rPr lang="fr-FR" dirty="0"/>
-              <a:t>Il existe de nombreux autres modèles de classification</a:t>
+              <a:t>En machine </a:t>
+            </a:r>
+            <a:r>
+              <a:rPr lang="fr-FR" dirty="0" err="1"/>
+              <a:t>learning</a:t>
+            </a:r>
+            <a:r>
+              <a:rPr lang="fr-FR" dirty="0"/>
+              <a:t> et en data science plus généralement, l'objectif est de trouver un modèle du phénomène à l'origine des données</a:t>
+            </a:r>
+          </a:p>
+          <a:p>
+            <a:r>
+              <a:rPr lang="fr-FR" dirty="0"/>
+              <a:t>C'est à dire qu'on considère que chaque donnée observée est l'expression d'une variable aléatoire générée par une distribution de probabilité</a:t>
             </a:r>
           </a:p>
           <a:p>
             <a:pPr lvl="1"/>
             <a:r>
-              <a:rPr lang="fr-FR" dirty="0" err="1"/>
-              <a:t>RandomForest</a:t>
+              <a:rPr lang="fr-FR"/>
+              <a:t>Par exemple les sondages</a:t>
             </a:r>
             <a:endParaRPr lang="fr-FR" dirty="0"/>
-          </a:p>
-          <a:p>
-            <a:pPr lvl="1"/>
-            <a:r>
-              <a:rPr lang="fr-FR" dirty="0"/>
-              <a:t>SVM</a:t>
-            </a:r>
-          </a:p>
-          <a:p>
-            <a:pPr lvl="1"/>
-            <a:r>
-              <a:rPr lang="fr-FR" dirty="0"/>
-              <a:t>…</a:t>
-            </a:r>
           </a:p>
         </p:txBody>
       </p:sp>
     </p:spTree>
     <p:extLst>
       <p:ext uri="{BB962C8B-B14F-4D97-AF65-F5344CB8AC3E}">
-        <p14:creationId xmlns:p14="http://schemas.microsoft.com/office/powerpoint/2010/main" val="889605795"/>
+        <p14:creationId xmlns:p14="http://schemas.microsoft.com/office/powerpoint/2010/main" val="3282916395"/>
       </p:ext>
     </p:extLst>
   </p:cSld>
@@ -10528,7 +7789,7 @@
 </p:sld>
 </file>
 
-<file path=ppt/slides/slide58.xml><?xml version="1.0" encoding="utf-8"?>
+<file path=ppt/slides/slide40.xml><?xml version="1.0" encoding="utf-8"?>
 <p:sld xmlns:a="http://schemas.openxmlformats.org/drawingml/2006/main" xmlns:r="http://schemas.openxmlformats.org/officeDocument/2006/relationships" xmlns:p="http://schemas.openxmlformats.org/presentationml/2006/main">
   <p:cSld>
     <p:spTree>
@@ -10561,12 +7822,8 @@
           <a:lstStyle/>
           <a:p>
             <a:r>
-              <a:rPr lang="fr-FR" dirty="0" err="1"/>
-              <a:t>Random</a:t>
-            </a:r>
-            <a:r>
-              <a:rPr lang="fr-FR" dirty="0"/>
-              <a:t> Forest</a:t>
+              <a:rPr lang="fr-FR" dirty="0"/>
+              <a:t>Autres modèles</a:t>
             </a:r>
           </a:p>
         </p:txBody>
@@ -10588,37 +7845,29 @@
           <a:p>
             <a:r>
               <a:rPr lang="fr-FR" dirty="0"/>
-              <a:t>Les forêts d'arbres décisionnels ont été formellement proposées en 2001 par Leo </a:t>
-            </a:r>
+              <a:t>Il existe de nombreux autres modèles de classification</a:t>
+            </a:r>
+          </a:p>
+          <a:p>
+            <a:pPr lvl="1"/>
             <a:r>
               <a:rPr lang="fr-FR" dirty="0" err="1"/>
-              <a:t>Breiman</a:t>
-            </a:r>
-            <a:r>
-              <a:rPr lang="fr-FR" dirty="0"/>
-              <a:t> et Adèle </a:t>
-            </a:r>
-            <a:r>
-              <a:rPr lang="fr-FR" dirty="0" err="1"/>
-              <a:t>Cutler</a:t>
+              <a:t>RandomForest</a:t>
             </a:r>
             <a:endParaRPr lang="fr-FR" dirty="0"/>
           </a:p>
           <a:p>
-            <a:r>
-              <a:rPr lang="fr-FR" dirty="0"/>
-              <a:t>Cet algorithme combine les concepts de sous-espaces aléatoires et de </a:t>
-            </a:r>
-            <a:r>
-              <a:rPr lang="fr-FR" dirty="0" err="1"/>
-              <a:t>bagging</a:t>
-            </a:r>
-            <a:endParaRPr lang="fr-FR" dirty="0"/>
-          </a:p>
-          <a:p>
-            <a:r>
-              <a:rPr lang="fr-FR" dirty="0"/>
-              <a:t>L'algorithme des forêts d'arbres décisionnels effectue un apprentissage sur de multiples arbres de décision entraînés sur des sous-ensembles de données légèrement différents</a:t>
+            <a:pPr lvl="1"/>
+            <a:r>
+              <a:rPr lang="fr-FR" dirty="0"/>
+              <a:t>SVM</a:t>
+            </a:r>
+          </a:p>
+          <a:p>
+            <a:pPr lvl="1"/>
+            <a:r>
+              <a:rPr lang="fr-FR" dirty="0"/>
+              <a:t>…</a:t>
             </a:r>
           </a:p>
         </p:txBody>
@@ -10626,7 +7875,7 @@
     </p:spTree>
     <p:extLst>
       <p:ext uri="{BB962C8B-B14F-4D97-AF65-F5344CB8AC3E}">
-        <p14:creationId xmlns:p14="http://schemas.microsoft.com/office/powerpoint/2010/main" val="3428597560"/>
+        <p14:creationId xmlns:p14="http://schemas.microsoft.com/office/powerpoint/2010/main" val="889605795"/>
       </p:ext>
     </p:extLst>
   </p:cSld>
@@ -10636,7 +7885,7 @@
 </p:sld>
 </file>
 
-<file path=ppt/slides/slide59.xml><?xml version="1.0" encoding="utf-8"?>
+<file path=ppt/slides/slide41.xml><?xml version="1.0" encoding="utf-8"?>
 <p:sld xmlns:a="http://schemas.openxmlformats.org/drawingml/2006/main" xmlns:r="http://schemas.openxmlformats.org/officeDocument/2006/relationships" xmlns:p="http://schemas.openxmlformats.org/presentationml/2006/main">
   <p:cSld>
     <p:spTree>
@@ -10669,8 +7918,12 @@
           <a:lstStyle/>
           <a:p>
             <a:r>
-              <a:rPr lang="fr-FR" dirty="0"/>
-              <a:t>Asymétrie</a:t>
+              <a:rPr lang="fr-FR" dirty="0" err="1"/>
+              <a:t>Random</a:t>
+            </a:r>
+            <a:r>
+              <a:rPr lang="fr-FR" dirty="0"/>
+              <a:t> Forest</a:t>
             </a:r>
           </a:p>
         </p:txBody>
@@ -10691,33 +7944,38 @@
           <a:lstStyle/>
           <a:p>
             <a:r>
+              <a:rPr lang="fr-FR" dirty="0"/>
+              <a:t>Les forêts d'arbres décisionnels ont été formellement proposées en 2001 par Leo </a:t>
+            </a:r>
+            <a:r>
               <a:rPr lang="fr-FR" dirty="0" err="1"/>
-              <a:t>Random</a:t>
-            </a:r>
-            <a:r>
-              <a:rPr lang="fr-FR" dirty="0"/>
-              <a:t> Forest est un modèle asymétrique</a:t>
-            </a:r>
-          </a:p>
-          <a:p>
-            <a:pPr lvl="1"/>
-            <a:r>
-              <a:rPr lang="fr-FR" dirty="0"/>
-              <a:t>Apprentissage couteux</a:t>
-            </a:r>
-          </a:p>
-          <a:p>
-            <a:pPr lvl="1"/>
-            <a:r>
-              <a:rPr lang="fr-FR" dirty="0"/>
-              <a:t>Prédiction rapide</a:t>
-            </a:r>
-          </a:p>
-          <a:p>
-            <a:pPr lvl="1"/>
-            <a:r>
-              <a:rPr lang="fr-FR" dirty="0"/>
-              <a:t>Très utile</a:t>
+              <a:t>Breiman</a:t>
+            </a:r>
+            <a:r>
+              <a:rPr lang="fr-FR" dirty="0"/>
+              <a:t> et Adèle </a:t>
+            </a:r>
+            <a:r>
+              <a:rPr lang="fr-FR" dirty="0" err="1"/>
+              <a:t>Cutler</a:t>
+            </a:r>
+            <a:endParaRPr lang="fr-FR" dirty="0"/>
+          </a:p>
+          <a:p>
+            <a:r>
+              <a:rPr lang="fr-FR" dirty="0"/>
+              <a:t>Cet algorithme combine les concepts de sous-espaces aléatoires et de </a:t>
+            </a:r>
+            <a:r>
+              <a:rPr lang="fr-FR" dirty="0" err="1"/>
+              <a:t>bagging</a:t>
+            </a:r>
+            <a:endParaRPr lang="fr-FR" dirty="0"/>
+          </a:p>
+          <a:p>
+            <a:r>
+              <a:rPr lang="fr-FR" dirty="0"/>
+              <a:t>L'algorithme des forêts d'arbres décisionnels effectue un apprentissage sur de multiples arbres de décision entraînés sur des sous-ensembles de données légèrement différents</a:t>
             </a:r>
           </a:p>
         </p:txBody>
@@ -10725,7 +7983,7 @@
     </p:spTree>
     <p:extLst>
       <p:ext uri="{BB962C8B-B14F-4D97-AF65-F5344CB8AC3E}">
-        <p14:creationId xmlns:p14="http://schemas.microsoft.com/office/powerpoint/2010/main" val="847402067"/>
+        <p14:creationId xmlns:p14="http://schemas.microsoft.com/office/powerpoint/2010/main" val="3428597560"/>
       </p:ext>
     </p:extLst>
   </p:cSld>
@@ -10735,7 +7993,7 @@
 </p:sld>
 </file>
 
-<file path=ppt/slides/slide6.xml><?xml version="1.0" encoding="utf-8"?>
+<file path=ppt/slides/slide42.xml><?xml version="1.0" encoding="utf-8"?>
 <p:sld xmlns:a="http://schemas.openxmlformats.org/drawingml/2006/main" xmlns:r="http://schemas.openxmlformats.org/officeDocument/2006/relationships" xmlns:p="http://schemas.openxmlformats.org/presentationml/2006/main">
   <p:cSld>
     <p:spTree>
@@ -10769,7 +8027,7 @@
           <a:p>
             <a:r>
               <a:rPr lang="fr-FR" dirty="0"/>
-              <a:t>Graphique</a:t>
+              <a:t>Asymétrie</a:t>
             </a:r>
           </a:p>
         </p:txBody>
@@ -10790,57 +8048,41 @@
           <a:lstStyle/>
           <a:p>
             <a:r>
-              <a:rPr lang="fr-FR" dirty="0"/>
-              <a:t>Surface / Loyer</a:t>
-            </a:r>
-          </a:p>
-        </p:txBody>
-      </p:sp>
-      <p:pic>
-        <p:nvPicPr>
-          <p:cNvPr id="1028" name="Picture 4" descr="Le loyer mensuel en fonction de la surface du logement"/>
-          <p:cNvPicPr>
-            <a:picLocks noChangeAspect="1" noChangeArrowheads="1"/>
-          </p:cNvPicPr>
-          <p:nvPr/>
-        </p:nvPicPr>
-        <p:blipFill>
-          <a:blip r:embed="rId2">
-            <a:extLst>
-              <a:ext uri="{28A0092B-C50C-407E-A947-70E740481C1C}">
-                <a14:useLocalDpi xmlns:a14="http://schemas.microsoft.com/office/drawing/2010/main" val="0"/>
-              </a:ext>
-            </a:extLst>
-          </a:blip>
-          <a:srcRect/>
-          <a:stretch>
-            <a:fillRect/>
-          </a:stretch>
-        </p:blipFill>
-        <p:spPr bwMode="auto">
-          <a:xfrm>
-            <a:off x="1331640" y="2060848"/>
-            <a:ext cx="5688632" cy="3931478"/>
-          </a:xfrm>
-          <a:prstGeom prst="rect">
-            <a:avLst/>
-          </a:prstGeom>
-          <a:noFill/>
-          <a:extLst>
-            <a:ext uri="{909E8E84-426E-40DD-AFC4-6F175D3DCCD1}">
-              <a14:hiddenFill xmlns:a14="http://schemas.microsoft.com/office/drawing/2010/main">
-                <a:solidFill>
-                  <a:srgbClr val="FFFFFF"/>
-                </a:solidFill>
-              </a14:hiddenFill>
-            </a:ext>
-          </a:extLst>
-        </p:spPr>
-      </p:pic>
+              <a:rPr lang="fr-FR" dirty="0" err="1"/>
+              <a:t>Random</a:t>
+            </a:r>
+            <a:r>
+              <a:rPr lang="fr-FR" dirty="0"/>
+              <a:t> Forest est un modèle asymétrique</a:t>
+            </a:r>
+          </a:p>
+          <a:p>
+            <a:pPr lvl="1"/>
+            <a:r>
+              <a:rPr lang="fr-FR" dirty="0"/>
+              <a:t>Apprentissage couteux</a:t>
+            </a:r>
+          </a:p>
+          <a:p>
+            <a:pPr lvl="1"/>
+            <a:r>
+              <a:rPr lang="fr-FR" dirty="0"/>
+              <a:t>Prédiction rapide</a:t>
+            </a:r>
+          </a:p>
+          <a:p>
+            <a:pPr lvl="1"/>
+            <a:r>
+              <a:rPr lang="fr-FR" dirty="0"/>
+              <a:t>Très utile</a:t>
+            </a:r>
+          </a:p>
+        </p:txBody>
+      </p:sp>
     </p:spTree>
     <p:extLst>
       <p:ext uri="{BB962C8B-B14F-4D97-AF65-F5344CB8AC3E}">
-        <p14:creationId xmlns:p14="http://schemas.microsoft.com/office/powerpoint/2010/main" val="1362639226"/>
+        <p14:creationId xmlns:p14="http://schemas.microsoft.com/office/powerpoint/2010/main" val="847402067"/>
       </p:ext>
     </p:extLst>
   </p:cSld>
@@ -10850,146 +8092,7 @@
 </p:sld>
 </file>
 
-<file path=ppt/slides/slide60.xml><?xml version="1.0" encoding="utf-8"?>
-<p:sld xmlns:a="http://schemas.openxmlformats.org/drawingml/2006/main" xmlns:r="http://schemas.openxmlformats.org/officeDocument/2006/relationships" xmlns:p="http://schemas.openxmlformats.org/presentationml/2006/main">
-  <p:cSld>
-    <p:spTree>
-      <p:nvGrpSpPr>
-        <p:cNvPr id="1" name=""/>
-        <p:cNvGrpSpPr/>
-        <p:nvPr/>
-      </p:nvGrpSpPr>
-      <p:grpSpPr>
-        <a:xfrm>
-          <a:off x="0" y="0"/>
-          <a:ext cx="0" cy="0"/>
-          <a:chOff x="0" y="0"/>
-          <a:chExt cx="0" cy="0"/>
-        </a:xfrm>
-      </p:grpSpPr>
-      <p:sp>
-        <p:nvSpPr>
-          <p:cNvPr id="2" name="Titre 1"/>
-          <p:cNvSpPr>
-            <a:spLocks noGrp="1"/>
-          </p:cNvSpPr>
-          <p:nvPr>
-            <p:ph type="title"/>
-          </p:nvPr>
-        </p:nvSpPr>
-        <p:spPr/>
-        <p:txBody>
-          <a:bodyPr/>
-          <a:lstStyle/>
-          <a:p>
-            <a:r>
-              <a:rPr lang="fr-FR" dirty="0" err="1"/>
-              <a:t>Random</a:t>
-            </a:r>
-            <a:r>
-              <a:rPr lang="fr-FR" dirty="0"/>
-              <a:t> Forest</a:t>
-            </a:r>
-          </a:p>
-        </p:txBody>
-      </p:sp>
-      <p:sp>
-        <p:nvSpPr>
-          <p:cNvPr id="3" name="Espace réservé du contenu 2"/>
-          <p:cNvSpPr>
-            <a:spLocks noGrp="1"/>
-          </p:cNvSpPr>
-          <p:nvPr>
-            <p:ph idx="1"/>
-          </p:nvPr>
-        </p:nvSpPr>
-        <p:spPr/>
-        <p:txBody>
-          <a:bodyPr/>
-          <a:lstStyle/>
-          <a:p>
-            <a:r>
-              <a:rPr lang="fr-FR" dirty="0"/>
-              <a:t>Exemple</a:t>
-            </a:r>
-          </a:p>
-          <a:p>
-            <a:pPr lvl="1"/>
-            <a:r>
-              <a:rPr lang="fr-FR" dirty="0"/>
-              <a:t>import </a:t>
-            </a:r>
-            <a:r>
-              <a:rPr lang="fr-FR" dirty="0" err="1"/>
-              <a:t>sk.ensemble</a:t>
-            </a:r>
-            <a:r>
-              <a:rPr lang="fr-FR" dirty="0"/>
-              <a:t> as </a:t>
-            </a:r>
-            <a:r>
-              <a:rPr lang="fr-FR" dirty="0" err="1"/>
-              <a:t>rf</a:t>
-            </a:r>
-            <a:endParaRPr lang="fr-FR" dirty="0"/>
-          </a:p>
-          <a:p>
-            <a:pPr lvl="1"/>
-            <a:r>
-              <a:rPr lang="fr-FR" dirty="0"/>
-              <a:t>model = </a:t>
-            </a:r>
-            <a:r>
-              <a:rPr lang="fr-FR" dirty="0" err="1"/>
-              <a:t>rf.RandomForestClassifier</a:t>
-            </a:r>
-            <a:r>
-              <a:rPr lang="fr-FR" dirty="0"/>
-              <a:t>(</a:t>
-            </a:r>
-            <a:r>
-              <a:rPr lang="fr-FR" dirty="0" err="1"/>
-              <a:t>n_estimators</a:t>
-            </a:r>
-            <a:r>
-              <a:rPr lang="fr-FR" dirty="0"/>
-              <a:t>=100)</a:t>
-            </a:r>
-          </a:p>
-          <a:p>
-            <a:r>
-              <a:rPr lang="fr-FR" dirty="0"/>
-              <a:t>Très puissant</a:t>
-            </a:r>
-          </a:p>
-          <a:p>
-            <a:pPr lvl="1"/>
-            <a:r>
-              <a:rPr lang="fr-FR" dirty="0"/>
-              <a:t>Bien plus gourmand que </a:t>
-            </a:r>
-            <a:r>
-              <a:rPr lang="fr-FR" dirty="0" err="1"/>
-              <a:t>kNN</a:t>
-            </a:r>
-            <a:endParaRPr lang="fr-FR" dirty="0"/>
-          </a:p>
-        </p:txBody>
-      </p:sp>
-    </p:spTree>
-    <p:extLst>
-      <p:ext uri="{BB962C8B-B14F-4D97-AF65-F5344CB8AC3E}">
-        <p14:creationId xmlns:p14="http://schemas.microsoft.com/office/powerpoint/2010/main" val="519699739"/>
-      </p:ext>
-    </p:extLst>
-  </p:cSld>
-  <p:clrMapOvr>
-    <a:masterClrMapping/>
-  </p:clrMapOvr>
-</p:sld>
-</file>
-
-<file path=ppt/slides/slide61.xml><?xml version="1.0" encoding="utf-8"?>
+<file path=ppt/slides/slide43.xml><?xml version="1.0" encoding="utf-8"?>
 <p:sld xmlns:a="http://schemas.openxmlformats.org/drawingml/2006/main" xmlns:r="http://schemas.openxmlformats.org/officeDocument/2006/relationships" xmlns:p="http://schemas.openxmlformats.org/presentationml/2006/main">
   <p:cSld>
     <p:spTree>
@@ -11101,7 +8204,7 @@
 </p:sld>
 </file>
 
-<file path=ppt/slides/slide62.xml><?xml version="1.0" encoding="utf-8"?>
+<file path=ppt/slides/slide5.xml><?xml version="1.0" encoding="utf-8"?>
 <p:sld xmlns:a="http://schemas.openxmlformats.org/drawingml/2006/main" xmlns:r="http://schemas.openxmlformats.org/officeDocument/2006/relationships" xmlns:p="http://schemas.openxmlformats.org/presentationml/2006/main">
   <p:cSld>
     <p:spTree>
@@ -11135,223 +8238,6 @@
           <a:p>
             <a:r>
               <a:rPr lang="fr-FR" dirty="0"/>
-              <a:t>Importances des </a:t>
-            </a:r>
-            <a:r>
-              <a:rPr lang="fr-FR" dirty="0" err="1"/>
-              <a:t>features</a:t>
-            </a:r>
-            <a:endParaRPr lang="fr-FR" dirty="0"/>
-          </a:p>
-        </p:txBody>
-      </p:sp>
-      <p:sp>
-        <p:nvSpPr>
-          <p:cNvPr id="3" name="Espace réservé du contenu 2"/>
-          <p:cNvSpPr>
-            <a:spLocks noGrp="1"/>
-          </p:cNvSpPr>
-          <p:nvPr>
-            <p:ph idx="1"/>
-          </p:nvPr>
-        </p:nvSpPr>
-        <p:spPr/>
-        <p:txBody>
-          <a:bodyPr/>
-          <a:lstStyle/>
-          <a:p>
-            <a:r>
-              <a:rPr lang="fr-FR" dirty="0"/>
-              <a:t>Les précédents algorithmes ne permettaient pas de connaître l'importance de chaque </a:t>
-            </a:r>
-            <a:r>
-              <a:rPr lang="fr-FR" dirty="0" err="1"/>
-              <a:t>feature</a:t>
-            </a:r>
-            <a:endParaRPr lang="fr-FR" dirty="0"/>
-          </a:p>
-          <a:p>
-            <a:r>
-              <a:rPr lang="fr-FR" dirty="0"/>
-              <a:t>Il est souvent utile de savoir les </a:t>
-            </a:r>
-            <a:r>
-              <a:rPr lang="fr-FR" dirty="0" err="1"/>
-              <a:t>features</a:t>
-            </a:r>
-            <a:r>
-              <a:rPr lang="fr-FR" dirty="0"/>
-              <a:t> prépondérantes</a:t>
-            </a:r>
-          </a:p>
-          <a:p>
-            <a:pPr lvl="1"/>
-            <a:r>
-              <a:rPr lang="fr-FR" dirty="0"/>
-              <a:t>Et l'inverse celle qui ne le sont pas</a:t>
-            </a:r>
-          </a:p>
-          <a:p>
-            <a:pPr lvl="1"/>
-            <a:r>
-              <a:rPr lang="fr-FR" dirty="0"/>
-              <a:t>Permet de faire baisser le nombre de dimension</a:t>
-            </a:r>
-          </a:p>
-          <a:p>
-            <a:pPr lvl="1"/>
-            <a:endParaRPr lang="fr-FR" dirty="0"/>
-          </a:p>
-          <a:p>
-            <a:endParaRPr lang="fr-FR" dirty="0"/>
-          </a:p>
-        </p:txBody>
-      </p:sp>
-    </p:spTree>
-    <p:extLst>
-      <p:ext uri="{BB962C8B-B14F-4D97-AF65-F5344CB8AC3E}">
-        <p14:creationId xmlns:p14="http://schemas.microsoft.com/office/powerpoint/2010/main" val="1701734456"/>
-      </p:ext>
-    </p:extLst>
-  </p:cSld>
-  <p:clrMapOvr>
-    <a:masterClrMapping/>
-  </p:clrMapOvr>
-</p:sld>
-</file>
-
-<file path=ppt/slides/slide63.xml><?xml version="1.0" encoding="utf-8"?>
-<p:sld xmlns:a="http://schemas.openxmlformats.org/drawingml/2006/main" xmlns:r="http://schemas.openxmlformats.org/officeDocument/2006/relationships" xmlns:p="http://schemas.openxmlformats.org/presentationml/2006/main">
-  <p:cSld>
-    <p:spTree>
-      <p:nvGrpSpPr>
-        <p:cNvPr id="1" name=""/>
-        <p:cNvGrpSpPr/>
-        <p:nvPr/>
-      </p:nvGrpSpPr>
-      <p:grpSpPr>
-        <a:xfrm>
-          <a:off x="0" y="0"/>
-          <a:ext cx="0" cy="0"/>
-          <a:chOff x="0" y="0"/>
-          <a:chExt cx="0" cy="0"/>
-        </a:xfrm>
-      </p:grpSpPr>
-      <p:sp>
-        <p:nvSpPr>
-          <p:cNvPr id="2" name="Titre 1"/>
-          <p:cNvSpPr>
-            <a:spLocks noGrp="1"/>
-          </p:cNvSpPr>
-          <p:nvPr>
-            <p:ph type="title"/>
-          </p:nvPr>
-        </p:nvSpPr>
-        <p:spPr/>
-        <p:txBody>
-          <a:bodyPr/>
-          <a:lstStyle/>
-          <a:p>
-            <a:r>
-              <a:rPr lang="fr-FR" dirty="0"/>
-              <a:t>Importance </a:t>
-            </a:r>
-            <a:r>
-              <a:rPr lang="fr-FR" dirty="0" err="1"/>
-              <a:t>Feature</a:t>
-            </a:r>
-            <a:endParaRPr lang="fr-FR" dirty="0"/>
-          </a:p>
-        </p:txBody>
-      </p:sp>
-      <p:sp>
-        <p:nvSpPr>
-          <p:cNvPr id="3" name="Espace réservé du contenu 2"/>
-          <p:cNvSpPr>
-            <a:spLocks noGrp="1"/>
-          </p:cNvSpPr>
-          <p:nvPr>
-            <p:ph idx="1"/>
-          </p:nvPr>
-        </p:nvSpPr>
-        <p:spPr/>
-        <p:txBody>
-          <a:bodyPr/>
-          <a:lstStyle/>
-          <a:p>
-            <a:r>
-              <a:rPr lang="fr-FR" dirty="0" err="1"/>
-              <a:t>forest.feature_importances</a:t>
-            </a:r>
-            <a:r>
-              <a:rPr lang="fr-FR" dirty="0"/>
-              <a:t>_</a:t>
-            </a:r>
-          </a:p>
-          <a:p>
-            <a:pPr lvl="1"/>
-            <a:r>
-              <a:rPr lang="fr-FR" dirty="0"/>
-              <a:t>Permet de donner pour chaque </a:t>
-            </a:r>
-            <a:r>
-              <a:rPr lang="fr-FR" dirty="0" err="1"/>
-              <a:t>feature</a:t>
-            </a:r>
-            <a:r>
-              <a:rPr lang="fr-FR" dirty="0"/>
-              <a:t> son importance sur 1</a:t>
-            </a:r>
-          </a:p>
-        </p:txBody>
-      </p:sp>
-    </p:spTree>
-    <p:extLst>
-      <p:ext uri="{BB962C8B-B14F-4D97-AF65-F5344CB8AC3E}">
-        <p14:creationId xmlns:p14="http://schemas.microsoft.com/office/powerpoint/2010/main" val="2784811699"/>
-      </p:ext>
-    </p:extLst>
-  </p:cSld>
-  <p:clrMapOvr>
-    <a:masterClrMapping/>
-  </p:clrMapOvr>
-</p:sld>
-</file>
-
-<file path=ppt/slides/slide7.xml><?xml version="1.0" encoding="utf-8"?>
-<p:sld xmlns:a="http://schemas.openxmlformats.org/drawingml/2006/main" xmlns:r="http://schemas.openxmlformats.org/officeDocument/2006/relationships" xmlns:p="http://schemas.openxmlformats.org/presentationml/2006/main">
-  <p:cSld>
-    <p:spTree>
-      <p:nvGrpSpPr>
-        <p:cNvPr id="1" name=""/>
-        <p:cNvGrpSpPr/>
-        <p:nvPr/>
-      </p:nvGrpSpPr>
-      <p:grpSpPr>
-        <a:xfrm>
-          <a:off x="0" y="0"/>
-          <a:ext cx="0" cy="0"/>
-          <a:chOff x="0" y="0"/>
-          <a:chExt cx="0" cy="0"/>
-        </a:xfrm>
-      </p:grpSpPr>
-      <p:sp>
-        <p:nvSpPr>
-          <p:cNvPr id="2" name="Titre 1"/>
-          <p:cNvSpPr>
-            <a:spLocks noGrp="1"/>
-          </p:cNvSpPr>
-          <p:nvPr>
-            <p:ph type="title"/>
-          </p:nvPr>
-        </p:nvSpPr>
-        <p:spPr/>
-        <p:txBody>
-          <a:bodyPr/>
-          <a:lstStyle/>
-          <a:p>
-            <a:r>
-              <a:rPr lang="fr-FR" dirty="0"/>
               <a:t>Régression</a:t>
             </a:r>
           </a:p>
@@ -11434,7 +8320,7 @@
 </p:sld>
 </file>
 
-<file path=ppt/slides/slide8.xml><?xml version="1.0" encoding="utf-8"?>
+<file path=ppt/slides/slide6.xml><?xml version="1.0" encoding="utf-8"?>
 <p:sld xmlns:a="http://schemas.openxmlformats.org/drawingml/2006/main" xmlns:r="http://schemas.openxmlformats.org/officeDocument/2006/relationships" xmlns:p="http://schemas.openxmlformats.org/presentationml/2006/main">
   <p:cSld>
     <p:spTree>
@@ -11552,7 +8438,7 @@
 </p:sld>
 </file>
 
-<file path=ppt/slides/slide9.xml><?xml version="1.0" encoding="utf-8"?>
+<file path=ppt/slides/slide7.xml><?xml version="1.0" encoding="utf-8"?>
 <p:sld xmlns:a="http://schemas.openxmlformats.org/drawingml/2006/main" xmlns:r="http://schemas.openxmlformats.org/officeDocument/2006/relationships" xmlns:p="http://schemas.openxmlformats.org/presentationml/2006/main">
   <p:cSld>
     <p:spTree>
@@ -11682,6 +8568,302 @@
     <p:extLst>
       <p:ext uri="{BB962C8B-B14F-4D97-AF65-F5344CB8AC3E}">
         <p14:creationId xmlns:p14="http://schemas.microsoft.com/office/powerpoint/2010/main" val="2468921661"/>
+      </p:ext>
+    </p:extLst>
+  </p:cSld>
+  <p:clrMapOvr>
+    <a:masterClrMapping/>
+  </p:clrMapOvr>
+</p:sld>
+</file>
+
+<file path=ppt/slides/slide8.xml><?xml version="1.0" encoding="utf-8"?>
+<p:sld xmlns:a="http://schemas.openxmlformats.org/drawingml/2006/main" xmlns:r="http://schemas.openxmlformats.org/officeDocument/2006/relationships" xmlns:p="http://schemas.openxmlformats.org/presentationml/2006/main">
+  <p:cSld>
+    <p:spTree>
+      <p:nvGrpSpPr>
+        <p:cNvPr id="1" name=""/>
+        <p:cNvGrpSpPr/>
+        <p:nvPr/>
+      </p:nvGrpSpPr>
+      <p:grpSpPr>
+        <a:xfrm>
+          <a:off x="0" y="0"/>
+          <a:ext cx="0" cy="0"/>
+          <a:chOff x="0" y="0"/>
+          <a:chExt cx="0" cy="0"/>
+        </a:xfrm>
+      </p:grpSpPr>
+      <p:sp>
+        <p:nvSpPr>
+          <p:cNvPr id="2" name="Titre 1"/>
+          <p:cNvSpPr>
+            <a:spLocks noGrp="1"/>
+          </p:cNvSpPr>
+          <p:nvPr>
+            <p:ph type="title"/>
+          </p:nvPr>
+        </p:nvSpPr>
+        <p:spPr/>
+        <p:txBody>
+          <a:bodyPr/>
+          <a:lstStyle/>
+          <a:p>
+            <a:r>
+              <a:rPr lang="fr-FR" dirty="0"/>
+              <a:t>Classification</a:t>
+            </a:r>
+          </a:p>
+        </p:txBody>
+      </p:sp>
+      <p:sp>
+        <p:nvSpPr>
+          <p:cNvPr id="3" name="Espace réservé du contenu 2"/>
+          <p:cNvSpPr>
+            <a:spLocks noGrp="1"/>
+          </p:cNvSpPr>
+          <p:nvPr>
+            <p:ph idx="1"/>
+          </p:nvPr>
+        </p:nvSpPr>
+        <p:spPr/>
+        <p:txBody>
+          <a:bodyPr/>
+          <a:lstStyle/>
+          <a:p>
+            <a:r>
+              <a:rPr lang="fr-FR" dirty="0"/>
+              <a:t>Une autre distinction qui vous aidera dans le choix d'un algorithme de machine </a:t>
+            </a:r>
+            <a:r>
+              <a:rPr lang="fr-FR" dirty="0" err="1"/>
+              <a:t>learning</a:t>
+            </a:r>
+            <a:r>
+              <a:rPr lang="fr-FR" dirty="0"/>
+              <a:t> est le type de sortie que l'on attend de notre programme</a:t>
+            </a:r>
+          </a:p>
+          <a:p>
+            <a:pPr lvl="1"/>
+            <a:r>
+              <a:rPr lang="fr-FR" dirty="0"/>
+              <a:t>Est-ce une valeur continue (un nombre)</a:t>
+            </a:r>
+          </a:p>
+          <a:p>
+            <a:pPr lvl="1"/>
+            <a:r>
+              <a:rPr lang="fr-FR" dirty="0"/>
+              <a:t>ou bien une valeur discrète (une catégorie) ?</a:t>
+            </a:r>
+          </a:p>
+          <a:p>
+            <a:r>
+              <a:rPr lang="fr-FR" dirty="0"/>
+              <a:t>Le premier cas est appelé une régression, le second une classification</a:t>
+            </a:r>
+          </a:p>
+        </p:txBody>
+      </p:sp>
+      <p:pic>
+        <p:nvPicPr>
+          <p:cNvPr id="1026" name="Picture 2" descr="Illustration de la différence entre régression et classification"/>
+          <p:cNvPicPr>
+            <a:picLocks noChangeAspect="1" noChangeArrowheads="1"/>
+          </p:cNvPicPr>
+          <p:nvPr/>
+        </p:nvPicPr>
+        <p:blipFill>
+          <a:blip r:embed="rId2">
+            <a:extLst>
+              <a:ext uri="{28A0092B-C50C-407E-A947-70E740481C1C}">
+                <a14:useLocalDpi xmlns:a14="http://schemas.microsoft.com/office/drawing/2010/main" val="0"/>
+              </a:ext>
+            </a:extLst>
+          </a:blip>
+          <a:srcRect/>
+          <a:stretch>
+            <a:fillRect/>
+          </a:stretch>
+        </p:blipFill>
+        <p:spPr bwMode="auto">
+          <a:xfrm>
+            <a:off x="2267744" y="4591645"/>
+            <a:ext cx="4286250" cy="2143125"/>
+          </a:xfrm>
+          <a:prstGeom prst="rect">
+            <a:avLst/>
+          </a:prstGeom>
+          <a:noFill/>
+          <a:extLst>
+            <a:ext uri="{909E8E84-426E-40DD-AFC4-6F175D3DCCD1}">
+              <a14:hiddenFill xmlns:a14="http://schemas.microsoft.com/office/drawing/2010/main">
+                <a:solidFill>
+                  <a:srgbClr val="FFFFFF"/>
+                </a:solidFill>
+              </a14:hiddenFill>
+            </a:ext>
+          </a:extLst>
+        </p:spPr>
+      </p:pic>
+    </p:spTree>
+    <p:extLst>
+      <p:ext uri="{BB962C8B-B14F-4D97-AF65-F5344CB8AC3E}">
+        <p14:creationId xmlns:p14="http://schemas.microsoft.com/office/powerpoint/2010/main" val="3746526313"/>
+      </p:ext>
+    </p:extLst>
+  </p:cSld>
+  <p:clrMapOvr>
+    <a:masterClrMapping/>
+  </p:clrMapOvr>
+</p:sld>
+</file>
+
+<file path=ppt/slides/slide9.xml><?xml version="1.0" encoding="utf-8"?>
+<p:sld xmlns:a="http://schemas.openxmlformats.org/drawingml/2006/main" xmlns:r="http://schemas.openxmlformats.org/officeDocument/2006/relationships" xmlns:p="http://schemas.openxmlformats.org/presentationml/2006/main">
+  <p:cSld>
+    <p:spTree>
+      <p:nvGrpSpPr>
+        <p:cNvPr id="1" name=""/>
+        <p:cNvGrpSpPr/>
+        <p:nvPr/>
+      </p:nvGrpSpPr>
+      <p:grpSpPr>
+        <a:xfrm>
+          <a:off x="0" y="0"/>
+          <a:ext cx="0" cy="0"/>
+          <a:chOff x="0" y="0"/>
+          <a:chExt cx="0" cy="0"/>
+        </a:xfrm>
+      </p:grpSpPr>
+      <p:sp>
+        <p:nvSpPr>
+          <p:cNvPr id="2" name="Titre 1">
+            <a:extLst>
+              <a:ext uri="{FF2B5EF4-FFF2-40B4-BE49-F238E27FC236}">
+                <a16:creationId xmlns:a16="http://schemas.microsoft.com/office/drawing/2014/main" id="{43B79A36-DCA2-04FF-4BD9-ADEA618418F6}"/>
+              </a:ext>
+            </a:extLst>
+          </p:cNvPr>
+          <p:cNvSpPr>
+            <a:spLocks noGrp="1"/>
+          </p:cNvSpPr>
+          <p:nvPr>
+            <p:ph type="title"/>
+          </p:nvPr>
+        </p:nvSpPr>
+        <p:spPr/>
+        <p:txBody>
+          <a:bodyPr/>
+          <a:lstStyle/>
+          <a:p>
+            <a:r>
+              <a:rPr lang="fr-FR" dirty="0"/>
+              <a:t>Principes mathématiques</a:t>
+            </a:r>
+          </a:p>
+        </p:txBody>
+      </p:sp>
+      <p:sp>
+        <p:nvSpPr>
+          <p:cNvPr id="3" name="Espace réservé du contenu 2">
+            <a:extLst>
+              <a:ext uri="{FF2B5EF4-FFF2-40B4-BE49-F238E27FC236}">
+                <a16:creationId xmlns:a16="http://schemas.microsoft.com/office/drawing/2014/main" id="{AA9957CF-3C17-0A94-E370-57CDB0345762}"/>
+              </a:ext>
+            </a:extLst>
+          </p:cNvPr>
+          <p:cNvSpPr>
+            <a:spLocks noGrp="1"/>
+          </p:cNvSpPr>
+          <p:nvPr>
+            <p:ph idx="1"/>
+          </p:nvPr>
+        </p:nvSpPr>
+        <p:spPr/>
+        <p:txBody>
+          <a:bodyPr/>
+          <a:lstStyle/>
+          <a:p>
+            <a:r>
+              <a:rPr lang="fr-FR" dirty="0"/>
+              <a:t>De nombreux principes mathématiques et statistiques régissent le Machine Learning</a:t>
+            </a:r>
+          </a:p>
+          <a:p>
+            <a:pPr lvl="1"/>
+            <a:r>
+              <a:rPr lang="fr-FR" sz="2000" dirty="0"/>
+              <a:t>D'avantage pour le </a:t>
+            </a:r>
+            <a:r>
+              <a:rPr lang="fr-FR" sz="2000"/>
+              <a:t>Deep Learning</a:t>
+            </a:r>
+            <a:endParaRPr lang="fr-FR" sz="2000" dirty="0"/>
+          </a:p>
+          <a:p>
+            <a:r>
+              <a:rPr lang="fr-FR" dirty="0"/>
+              <a:t>Statistiques</a:t>
+            </a:r>
+          </a:p>
+          <a:p>
+            <a:pPr lvl="1"/>
+            <a:r>
+              <a:rPr lang="fr-FR" sz="2000" dirty="0"/>
+              <a:t>Distribution, loi normale, échantillonnage</a:t>
+            </a:r>
+          </a:p>
+          <a:p>
+            <a:r>
+              <a:rPr lang="fr-FR" dirty="0"/>
+              <a:t>Algorithmiques</a:t>
+            </a:r>
+            <a:endParaRPr lang="fr-FR" sz="2000" dirty="0"/>
+          </a:p>
+          <a:p>
+            <a:r>
+              <a:rPr lang="fr-FR" dirty="0"/>
+              <a:t>MDP</a:t>
+            </a:r>
+          </a:p>
+          <a:p>
+            <a:pPr lvl="1"/>
+            <a:r>
+              <a:rPr lang="fr-FR" sz="2000" dirty="0"/>
+              <a:t>Les processus de décision markoviens modélisent des états, actions et </a:t>
+            </a:r>
+            <a:r>
+              <a:rPr lang="fr-FR" sz="1800" dirty="0"/>
+              <a:t>récompenses </a:t>
+            </a:r>
+            <a:r>
+              <a:rPr lang="fr-FR" dirty="0"/>
+              <a:t>pour la prise de décision séquentielle.​</a:t>
+            </a:r>
+            <a:endParaRPr lang="fr-FR" sz="2800" dirty="0"/>
+          </a:p>
+          <a:p>
+            <a:r>
+              <a:rPr lang="fr-FR" dirty="0"/>
+              <a:t>Équations de Bellman​</a:t>
+            </a:r>
+          </a:p>
+          <a:p>
+            <a:pPr lvl="1"/>
+            <a:r>
+              <a:rPr lang="fr-FR" sz="2000" dirty="0"/>
+              <a:t>Les équations de Bellman définissent la relation récursive pour calculer les fonctions des valeurs optimales.​</a:t>
+            </a:r>
+          </a:p>
+        </p:txBody>
+      </p:sp>
+    </p:spTree>
+    <p:extLst>
+      <p:ext uri="{BB962C8B-B14F-4D97-AF65-F5344CB8AC3E}">
+        <p14:creationId xmlns:p14="http://schemas.microsoft.com/office/powerpoint/2010/main" val="2444278080"/>
       </p:ext>
     </p:extLst>
   </p:cSld>
